--- a/Hymn of Heaven.pptx
+++ b/Hymn of Heaven.pptx
@@ -6,21 +6,22 @@
   </p:sldMasterIdLst>
   <p:sldIdLst>
     <p:sldId id="256" r:id="rId2"/>
-    <p:sldId id="257" r:id="rId3"/>
-    <p:sldId id="258" r:id="rId4"/>
-    <p:sldId id="259" r:id="rId5"/>
-    <p:sldId id="260" r:id="rId6"/>
-    <p:sldId id="261" r:id="rId7"/>
-    <p:sldId id="262" r:id="rId8"/>
-    <p:sldId id="263" r:id="rId9"/>
-    <p:sldId id="265" r:id="rId10"/>
-    <p:sldId id="264" r:id="rId11"/>
-    <p:sldId id="266" r:id="rId12"/>
-    <p:sldId id="267" r:id="rId13"/>
-    <p:sldId id="270" r:id="rId14"/>
-    <p:sldId id="271" r:id="rId15"/>
-    <p:sldId id="272" r:id="rId16"/>
-    <p:sldId id="273" r:id="rId17"/>
+    <p:sldId id="274" r:id="rId3"/>
+    <p:sldId id="257" r:id="rId4"/>
+    <p:sldId id="258" r:id="rId5"/>
+    <p:sldId id="259" r:id="rId6"/>
+    <p:sldId id="260" r:id="rId7"/>
+    <p:sldId id="261" r:id="rId8"/>
+    <p:sldId id="262" r:id="rId9"/>
+    <p:sldId id="263" r:id="rId10"/>
+    <p:sldId id="265" r:id="rId11"/>
+    <p:sldId id="264" r:id="rId12"/>
+    <p:sldId id="266" r:id="rId13"/>
+    <p:sldId id="267" r:id="rId14"/>
+    <p:sldId id="270" r:id="rId15"/>
+    <p:sldId id="271" r:id="rId16"/>
+    <p:sldId id="272" r:id="rId17"/>
+    <p:sldId id="273" r:id="rId18"/>
   </p:sldIdLst>
   <p:sldSz cx="12192000" cy="6858000"/>
   <p:notesSz cx="6858000" cy="9144000"/>
@@ -119,6 +120,11 @@
       </a:defRPr>
     </a:lvl9pPr>
   </p:defaultTextStyle>
+  <p:extLst>
+    <p:ext uri="{EFAFB233-063F-42B5-8137-9DF3F51BA10A}">
+      <p15:sldGuideLst xmlns:p15="http://schemas.microsoft.com/office/powerpoint/2012/main"/>
+    </p:ext>
+  </p:extLst>
 </p:presentation>
 </file>
 
@@ -269,7 +275,7 @@
           <a:p>
             <a:fld id="{E759A0DE-F190-5444-87AC-4719D5F20D15}" type="datetimeFigureOut">
               <a:rPr lang="en-US" smtClean="0"/>
-              <a:t>11/11/25</a:t>
+              <a:t>11/15/25</a:t>
             </a:fld>
             <a:endParaRPr lang="en-US"/>
           </a:p>
@@ -467,7 +473,7 @@
           <a:p>
             <a:fld id="{E759A0DE-F190-5444-87AC-4719D5F20D15}" type="datetimeFigureOut">
               <a:rPr lang="en-US" smtClean="0"/>
-              <a:t>11/11/25</a:t>
+              <a:t>11/15/25</a:t>
             </a:fld>
             <a:endParaRPr lang="en-US"/>
           </a:p>
@@ -675,7 +681,7 @@
           <a:p>
             <a:fld id="{E759A0DE-F190-5444-87AC-4719D5F20D15}" type="datetimeFigureOut">
               <a:rPr lang="en-US" smtClean="0"/>
-              <a:t>11/11/25</a:t>
+              <a:t>11/15/25</a:t>
             </a:fld>
             <a:endParaRPr lang="en-US"/>
           </a:p>
@@ -873,7 +879,7 @@
           <a:p>
             <a:fld id="{E759A0DE-F190-5444-87AC-4719D5F20D15}" type="datetimeFigureOut">
               <a:rPr lang="en-US" smtClean="0"/>
-              <a:t>11/11/25</a:t>
+              <a:t>11/15/25</a:t>
             </a:fld>
             <a:endParaRPr lang="en-US"/>
           </a:p>
@@ -1148,7 +1154,7 @@
           <a:p>
             <a:fld id="{E759A0DE-F190-5444-87AC-4719D5F20D15}" type="datetimeFigureOut">
               <a:rPr lang="en-US" smtClean="0"/>
-              <a:t>11/11/25</a:t>
+              <a:t>11/15/25</a:t>
             </a:fld>
             <a:endParaRPr lang="en-US"/>
           </a:p>
@@ -1413,7 +1419,7 @@
           <a:p>
             <a:fld id="{E759A0DE-F190-5444-87AC-4719D5F20D15}" type="datetimeFigureOut">
               <a:rPr lang="en-US" smtClean="0"/>
-              <a:t>11/11/25</a:t>
+              <a:t>11/15/25</a:t>
             </a:fld>
             <a:endParaRPr lang="en-US"/>
           </a:p>
@@ -1825,7 +1831,7 @@
           <a:p>
             <a:fld id="{E759A0DE-F190-5444-87AC-4719D5F20D15}" type="datetimeFigureOut">
               <a:rPr lang="en-US" smtClean="0"/>
-              <a:t>11/11/25</a:t>
+              <a:t>11/15/25</a:t>
             </a:fld>
             <a:endParaRPr lang="en-US"/>
           </a:p>
@@ -1966,7 +1972,7 @@
           <a:p>
             <a:fld id="{E759A0DE-F190-5444-87AC-4719D5F20D15}" type="datetimeFigureOut">
               <a:rPr lang="en-US" smtClean="0"/>
-              <a:t>11/11/25</a:t>
+              <a:t>11/15/25</a:t>
             </a:fld>
             <a:endParaRPr lang="en-US"/>
           </a:p>
@@ -2079,7 +2085,7 @@
           <a:p>
             <a:fld id="{E759A0DE-F190-5444-87AC-4719D5F20D15}" type="datetimeFigureOut">
               <a:rPr lang="en-US" smtClean="0"/>
-              <a:t>11/11/25</a:t>
+              <a:t>11/15/25</a:t>
             </a:fld>
             <a:endParaRPr lang="en-US"/>
           </a:p>
@@ -2390,7 +2396,7 @@
           <a:p>
             <a:fld id="{E759A0DE-F190-5444-87AC-4719D5F20D15}" type="datetimeFigureOut">
               <a:rPr lang="en-US" smtClean="0"/>
-              <a:t>11/11/25</a:t>
+              <a:t>11/15/25</a:t>
             </a:fld>
             <a:endParaRPr lang="en-US"/>
           </a:p>
@@ -2678,7 +2684,7 @@
           <a:p>
             <a:fld id="{E759A0DE-F190-5444-87AC-4719D5F20D15}" type="datetimeFigureOut">
               <a:rPr lang="en-US" smtClean="0"/>
-              <a:t>11/11/25</a:t>
+              <a:t>11/15/25</a:t>
             </a:fld>
             <a:endParaRPr lang="en-US"/>
           </a:p>
@@ -2919,7 +2925,7 @@
           <a:p>
             <a:fld id="{E759A0DE-F190-5444-87AC-4719D5F20D15}" type="datetimeFigureOut">
               <a:rPr lang="en-US" smtClean="0"/>
-              <a:t>11/11/25</a:t>
+              <a:t>11/15/25</a:t>
             </a:fld>
             <a:endParaRPr lang="en-US"/>
           </a:p>
@@ -3325,7 +3331,7 @@
     <p:bg>
       <p:bgPr>
         <a:solidFill>
-          <a:schemeClr val="accent1"/>
+          <a:schemeClr val="bg1"/>
         </a:solidFill>
         <a:effectLst/>
       </p:bgPr>
@@ -3344,35 +3350,208 @@
           <a:chExt cx="0" cy="0"/>
         </a:xfrm>
       </p:grpSpPr>
-      <p:sp>
-        <p:nvSpPr>
-          <p:cNvPr id="3" name="Subtitle 2">
-            <a:extLst>
-              <a:ext uri="{FF2B5EF4-FFF2-40B4-BE49-F238E27FC236}">
-                <a16:creationId xmlns:a16="http://schemas.microsoft.com/office/drawing/2014/main" id="{BDDF4048-2958-B759-F7D1-45755BE99DD7}"/>
-              </a:ext>
-            </a:extLst>
-          </p:cNvPr>
-          <p:cNvSpPr>
-            <a:spLocks noGrp="1"/>
-          </p:cNvSpPr>
-          <p:nvPr>
-            <p:ph type="subTitle" idx="1"/>
+      <p:sp useBgFill="1">
+        <p:nvSpPr>
+          <p:cNvPr id="17" name="Rectangle 16">
+            <a:extLst>
+              <a:ext uri="{FF2B5EF4-FFF2-40B4-BE49-F238E27FC236}">
+                <a16:creationId xmlns:a16="http://schemas.microsoft.com/office/drawing/2014/main" id="{0671A8AE-40A1-4631-A6B8-581AFF065482}"/>
+              </a:ext>
+              <a:ext uri="{C183D7F6-B498-43B3-948B-1728B52AA6E4}">
+                <adec:decorative xmlns:adec="http://schemas.microsoft.com/office/drawing/2017/decorative" val="1"/>
+              </a:ext>
+            </a:extLst>
+          </p:cNvPr>
+          <p:cNvSpPr>
+            <a:spLocks noGrp="1" noRot="1" noChangeAspect="1" noMove="1" noResize="1" noEditPoints="1" noAdjustHandles="1" noChangeArrowheads="1" noChangeShapeType="1" noTextEdit="1"/>
+          </p:cNvSpPr>
+          <p:nvPr>
+            <p:extLst>
+              <p:ext uri="{386F3935-93C4-4BCD-93E2-E3B085C9AB24}">
+                <p16:designElem xmlns:p16="http://schemas.microsoft.com/office/powerpoint/2015/main" val="1"/>
+              </p:ext>
+            </p:extLst>
           </p:nvPr>
         </p:nvSpPr>
         <p:spPr>
           <a:xfrm>
-            <a:off x="682831" y="497702"/>
-            <a:ext cx="10826338" cy="5862596"/>
+            <a:off x="0" y="0"/>
+            <a:ext cx="12192000" cy="6858000"/>
+          </a:xfrm>
+          <a:prstGeom prst="rect">
+            <a:avLst/>
+          </a:prstGeom>
+          <a:ln>
+            <a:noFill/>
+          </a:ln>
+        </p:spPr>
+        <p:style>
+          <a:lnRef idx="2">
+            <a:schemeClr val="accent1">
+              <a:shade val="50000"/>
+            </a:schemeClr>
+          </a:lnRef>
+          <a:fillRef idx="1">
+            <a:schemeClr val="accent1"/>
+          </a:fillRef>
+          <a:effectRef idx="0">
+            <a:schemeClr val="accent1"/>
+          </a:effectRef>
+          <a:fontRef idx="minor">
+            <a:schemeClr val="lt1"/>
+          </a:fontRef>
+        </p:style>
+        <p:txBody>
+          <a:bodyPr rtlCol="0" anchor="ctr"/>
+          <a:lstStyle/>
+          <a:p>
+            <a:pPr algn="ctr"/>
+            <a:endParaRPr lang="en-US"/>
+          </a:p>
+        </p:txBody>
+      </p:sp>
+      <p:pic>
+        <p:nvPicPr>
+          <p:cNvPr id="4" name="Picture 3" descr="A mountain with a red sky&#10;&#10;AI-generated content may be incorrect.">
+            <a:extLst>
+              <a:ext uri="{FF2B5EF4-FFF2-40B4-BE49-F238E27FC236}">
+                <a16:creationId xmlns:a16="http://schemas.microsoft.com/office/drawing/2014/main" id="{F8A33EF8-8399-C39F-50A0-F9B748F8C275}"/>
+              </a:ext>
+            </a:extLst>
+          </p:cNvPr>
+          <p:cNvPicPr>
+            <a:picLocks noChangeAspect="1"/>
+          </p:cNvPicPr>
+          <p:nvPr/>
+        </p:nvPicPr>
+        <p:blipFill>
+          <a:blip r:embed="rId2"/>
+          <a:srcRect l="8141" t="9091" r="27222"/>
+          <a:stretch>
+            <a:fillRect/>
+          </a:stretch>
+        </p:blipFill>
+        <p:spPr>
+          <a:xfrm>
+            <a:off x="3523488" y="10"/>
+            <a:ext cx="8668512" cy="6857990"/>
+          </a:xfrm>
+          <a:prstGeom prst="rect">
+            <a:avLst/>
+          </a:prstGeom>
+        </p:spPr>
+      </p:pic>
+      <p:sp>
+        <p:nvSpPr>
+          <p:cNvPr id="18" name="Rectangle 17">
+            <a:extLst>
+              <a:ext uri="{FF2B5EF4-FFF2-40B4-BE49-F238E27FC236}">
+                <a16:creationId xmlns:a16="http://schemas.microsoft.com/office/drawing/2014/main" id="{AB58EF07-17C2-48CF-ABB0-EEF1F17CB8F0}"/>
+              </a:ext>
+              <a:ext uri="{C183D7F6-B498-43B3-948B-1728B52AA6E4}">
+                <adec:decorative xmlns:adec="http://schemas.microsoft.com/office/drawing/2017/decorative" val="1"/>
+              </a:ext>
+            </a:extLst>
+          </p:cNvPr>
+          <p:cNvSpPr>
+            <a:spLocks noGrp="1" noRot="1" noChangeAspect="1" noMove="1" noResize="1" noEditPoints="1" noAdjustHandles="1" noChangeArrowheads="1" noChangeShapeType="1" noTextEdit="1"/>
+          </p:cNvSpPr>
+          <p:nvPr>
+            <p:extLst>
+              <p:ext uri="{386F3935-93C4-4BCD-93E2-E3B085C9AB24}">
+                <p16:designElem xmlns:p16="http://schemas.microsoft.com/office/powerpoint/2015/main" val="1"/>
+              </p:ext>
+            </p:extLst>
+          </p:nvPr>
+        </p:nvSpPr>
+        <p:spPr>
+          <a:xfrm>
+            <a:off x="3" y="0"/>
+            <a:ext cx="9339206" cy="6858000"/>
+          </a:xfrm>
+          <a:prstGeom prst="rect">
+            <a:avLst/>
+          </a:prstGeom>
+          <a:gradFill>
+            <a:gsLst>
+              <a:gs pos="58000">
+                <a:schemeClr val="tx1"/>
+              </a:gs>
+              <a:gs pos="33000">
+                <a:schemeClr val="tx1">
+                  <a:alpha val="64000"/>
+                </a:schemeClr>
+              </a:gs>
+              <a:gs pos="0">
+                <a:schemeClr val="tx1">
+                  <a:alpha val="0"/>
+                </a:schemeClr>
+              </a:gs>
+              <a:gs pos="100000">
+                <a:schemeClr val="tx1"/>
+              </a:gs>
+            </a:gsLst>
+            <a:lin ang="10800000" scaled="0"/>
+          </a:gradFill>
+          <a:ln>
+            <a:noFill/>
+          </a:ln>
+        </p:spPr>
+        <p:style>
+          <a:lnRef idx="2">
+            <a:schemeClr val="accent1">
+              <a:shade val="50000"/>
+            </a:schemeClr>
+          </a:lnRef>
+          <a:fillRef idx="1">
+            <a:schemeClr val="accent1"/>
+          </a:fillRef>
+          <a:effectRef idx="0">
+            <a:schemeClr val="accent1"/>
+          </a:effectRef>
+          <a:fontRef idx="minor">
+            <a:schemeClr val="lt1"/>
+          </a:fontRef>
+        </p:style>
+        <p:txBody>
+          <a:bodyPr rtlCol="0" anchor="ctr"/>
+          <a:lstStyle/>
+          <a:p>
+            <a:pPr algn="ctr"/>
+            <a:endParaRPr lang="en-US" dirty="0"/>
+          </a:p>
+        </p:txBody>
+      </p:sp>
+      <p:sp>
+        <p:nvSpPr>
+          <p:cNvPr id="3" name="Subtitle 2">
+            <a:extLst>
+              <a:ext uri="{FF2B5EF4-FFF2-40B4-BE49-F238E27FC236}">
+                <a16:creationId xmlns:a16="http://schemas.microsoft.com/office/drawing/2014/main" id="{BDDF4048-2958-B759-F7D1-45755BE99DD7}"/>
+              </a:ext>
+            </a:extLst>
+          </p:cNvPr>
+          <p:cNvSpPr>
+            <a:spLocks noGrp="1"/>
+          </p:cNvSpPr>
+          <p:nvPr>
+            <p:ph type="subTitle" idx="1"/>
+          </p:nvPr>
+        </p:nvSpPr>
+        <p:spPr>
+          <a:xfrm>
+            <a:off x="477980" y="4872922"/>
+            <a:ext cx="4023359" cy="1208141"/>
           </a:xfrm>
         </p:spPr>
         <p:txBody>
           <a:bodyPr>
-            <a:noAutofit/>
+            <a:normAutofit/>
           </a:bodyPr>
           <a:lstStyle/>
           <a:p>
-            <a:endParaRPr lang="en-US" sz="4400" dirty="0">
+            <a:pPr algn="l"/>
+            <a:endParaRPr lang="en-US" sz="2000" dirty="0">
               <a:solidFill>
                 <a:schemeClr val="bg1"/>
               </a:solidFill>
@@ -3381,58 +3560,178 @@
             </a:endParaRPr>
           </a:p>
           <a:p>
-            <a:r>
-              <a:rPr lang="en-US" sz="4400" dirty="0">
+            <a:pPr algn="l"/>
+            <a:r>
+              <a:rPr lang="en-US" sz="4000" i="1" dirty="0">
                 <a:solidFill>
                   <a:schemeClr val="bg1"/>
                 </a:solidFill>
-                <a:latin typeface="Avenir Medium" panose="02000503020000020003" pitchFamily="2" charset="0"/>
+                <a:latin typeface="Avenir Oblique" panose="02000503020000020003" pitchFamily="2" charset="0"/>
                 <a:ea typeface="Bodoni Ornaments" pitchFamily="2" charset="0"/>
               </a:rPr>
-              <a:t>How I long to breathe the air of Heaven</a:t>
-            </a:r>
-          </a:p>
-          <a:p>
-            <a:endParaRPr lang="en-US" sz="4400" dirty="0">
+              <a:t>Hymn of Heaven</a:t>
+            </a:r>
+          </a:p>
+        </p:txBody>
+      </p:sp>
+      <p:sp>
+        <p:nvSpPr>
+          <p:cNvPr id="19" name="Rectangle 18">
+            <a:extLst>
+              <a:ext uri="{FF2B5EF4-FFF2-40B4-BE49-F238E27FC236}">
+                <a16:creationId xmlns:a16="http://schemas.microsoft.com/office/drawing/2014/main" id="{AF2F604E-43BE-4DC3-B983-E071523364F8}"/>
+              </a:ext>
+              <a:ext uri="{C183D7F6-B498-43B3-948B-1728B52AA6E4}">
+                <adec:decorative xmlns:adec="http://schemas.microsoft.com/office/drawing/2017/decorative" val="1"/>
+              </a:ext>
+            </a:extLst>
+          </p:cNvPr>
+          <p:cNvSpPr>
+            <a:spLocks noGrp="1" noRot="1" noChangeAspect="1" noMove="1" noResize="1" noEditPoints="1" noAdjustHandles="1" noChangeArrowheads="1" noChangeShapeType="1" noTextEdit="1"/>
+          </p:cNvSpPr>
+          <p:nvPr>
+            <p:extLst>
+              <p:ext uri="{386F3935-93C4-4BCD-93E2-E3B085C9AB24}">
+                <p16:designElem xmlns:p16="http://schemas.microsoft.com/office/powerpoint/2015/main" val="1"/>
+              </p:ext>
+            </p:extLst>
+          </p:nvPr>
+        </p:nvSpPr>
+        <p:spPr>
+          <a:xfrm rot="5400000">
+            <a:off x="759921" y="346791"/>
+            <a:ext cx="146304" cy="704088"/>
+          </a:xfrm>
+          <a:prstGeom prst="rect">
+            <a:avLst/>
+          </a:prstGeom>
+          <a:solidFill>
+            <a:schemeClr val="accent2"/>
+          </a:solidFill>
+          <a:ln>
+            <a:noFill/>
+          </a:ln>
+        </p:spPr>
+        <p:style>
+          <a:lnRef idx="2">
+            <a:schemeClr val="accent1">
+              <a:shade val="50000"/>
+            </a:schemeClr>
+          </a:lnRef>
+          <a:fillRef idx="1">
+            <a:schemeClr val="accent1"/>
+          </a:fillRef>
+          <a:effectRef idx="0">
+            <a:schemeClr val="accent1"/>
+          </a:effectRef>
+          <a:fontRef idx="minor">
+            <a:schemeClr val="lt1"/>
+          </a:fontRef>
+        </p:style>
+        <p:txBody>
+          <a:bodyPr rtlCol="0" anchor="ctr"/>
+          <a:lstStyle/>
+          <a:p>
+            <a:pPr algn="ctr"/>
+            <a:endParaRPr lang="en-US">
               <a:solidFill>
-                <a:schemeClr val="bg1"/>
+                <a:prstClr val="white"/>
               </a:solidFill>
-              <a:latin typeface="Avenir Medium" panose="02000503020000020003" pitchFamily="2" charset="0"/>
-              <a:ea typeface="Bodoni Ornaments" pitchFamily="2" charset="0"/>
+              <a:latin typeface="Calibri" panose="020F0502020204030204"/>
             </a:endParaRPr>
           </a:p>
-          <a:p>
-            <a:r>
-              <a:rPr lang="en-US" sz="4400" dirty="0">
-                <a:solidFill>
-                  <a:schemeClr val="bg1"/>
-                </a:solidFill>
-                <a:latin typeface="Avenir Medium" panose="02000503020000020003" pitchFamily="2" charset="0"/>
-                <a:ea typeface="Bodoni Ornaments" pitchFamily="2" charset="0"/>
-              </a:rPr>
-              <a:t>Where pain is gone </a:t>
-            </a:r>
-          </a:p>
-          <a:p>
-            <a:endParaRPr lang="en-US" sz="4400" dirty="0">
+        </p:txBody>
+      </p:sp>
+      <p:sp>
+        <p:nvSpPr>
+          <p:cNvPr id="20" name="Rectangle 19">
+            <a:extLst>
+              <a:ext uri="{FF2B5EF4-FFF2-40B4-BE49-F238E27FC236}">
+                <a16:creationId xmlns:a16="http://schemas.microsoft.com/office/drawing/2014/main" id="{08C9B587-E65E-4B52-B37C-ABEBB6E87928}"/>
+              </a:ext>
+              <a:ext uri="{C183D7F6-B498-43B3-948B-1728B52AA6E4}">
+                <adec:decorative xmlns:adec="http://schemas.microsoft.com/office/drawing/2017/decorative" val="1"/>
+              </a:ext>
+            </a:extLst>
+          </p:cNvPr>
+          <p:cNvSpPr>
+            <a:spLocks noGrp="1" noRot="1" noChangeAspect="1" noMove="1" noResize="1" noEditPoints="1" noAdjustHandles="1" noChangeArrowheads="1" noChangeShapeType="1" noTextEdit="1"/>
+          </p:cNvSpPr>
+          <p:nvPr>
+            <p:extLst>
+              <p:ext uri="{386F3935-93C4-4BCD-93E2-E3B085C9AB24}">
+                <p16:designElem xmlns:p16="http://schemas.microsoft.com/office/powerpoint/2015/main" val="1"/>
+              </p:ext>
+            </p:extLst>
+          </p:nvPr>
+        </p:nvSpPr>
+        <p:spPr>
+          <a:xfrm>
+            <a:off x="481029" y="4546920"/>
+            <a:ext cx="3977640" cy="18288"/>
+          </a:xfrm>
+          <a:prstGeom prst="rect">
+            <a:avLst/>
+          </a:prstGeom>
+          <a:solidFill>
+            <a:schemeClr val="tx1"/>
+          </a:solidFill>
+          <a:ln w="3175">
+            <a:noFill/>
+          </a:ln>
+          <a:effectLst/>
+        </p:spPr>
+        <p:style>
+          <a:lnRef idx="2">
+            <a:schemeClr val="accent1">
+              <a:shade val="50000"/>
+            </a:schemeClr>
+          </a:lnRef>
+          <a:fillRef idx="1">
+            <a:schemeClr val="accent1"/>
+          </a:fillRef>
+          <a:effectRef idx="0">
+            <a:schemeClr val="accent1"/>
+          </a:effectRef>
+          <a:fontRef idx="minor">
+            <a:schemeClr val="lt1"/>
+          </a:fontRef>
+        </p:style>
+        <p:txBody>
+          <a:bodyPr rtlCol="0" anchor="ctr"/>
+          <a:lstStyle/>
+          <a:p>
+            <a:pPr marL="0" marR="0" lvl="0" indent="0" algn="ctr" defTabSz="914400" rtl="0" eaLnBrk="1" fontAlgn="auto" latinLnBrk="0" hangingPunct="1">
+              <a:lnSpc>
+                <a:spcPct val="100000"/>
+              </a:lnSpc>
+              <a:spcBef>
+                <a:spcPts val="0"/>
+              </a:spcBef>
+              <a:spcAft>
+                <a:spcPts val="0"/>
+              </a:spcAft>
+              <a:buClrTx/>
+              <a:buSzTx/>
+              <a:buFontTx/>
+              <a:buNone/>
+              <a:tabLst/>
+              <a:defRPr/>
+            </a:pPr>
+            <a:endParaRPr kumimoji="0" lang="en-US" sz="1800" b="0" i="0" u="none" strike="noStrike" kern="1200" cap="none" spc="0" normalizeH="0" baseline="0" noProof="0">
+              <a:ln>
+                <a:noFill/>
+              </a:ln>
               <a:solidFill>
-                <a:schemeClr val="bg1"/>
+                <a:prstClr val="white"/>
               </a:solidFill>
-              <a:latin typeface="Avenir Medium" panose="02000503020000020003" pitchFamily="2" charset="0"/>
-              <a:ea typeface="Bodoni Ornaments" pitchFamily="2" charset="0"/>
+              <a:effectLst/>
+              <a:uLnTx/>
+              <a:uFillTx/>
+              <a:latin typeface="Calibri" panose="020F0502020204030204"/>
+              <a:ea typeface="+mn-ea"/>
+              <a:cs typeface="+mn-cs"/>
             </a:endParaRPr>
-          </a:p>
-          <a:p>
-            <a:r>
-              <a:rPr lang="en-US" sz="4400" dirty="0">
-                <a:solidFill>
-                  <a:schemeClr val="bg1"/>
-                </a:solidFill>
-                <a:latin typeface="Avenir Medium" panose="02000503020000020003" pitchFamily="2" charset="0"/>
-                <a:ea typeface="Bodoni Ornaments" pitchFamily="2" charset="0"/>
-              </a:rPr>
-              <a:t>and mercy fills the streets</a:t>
-            </a:r>
           </a:p>
         </p:txBody>
       </p:sp>
@@ -3450,6 +3749,121 @@
 </file>
 
 <file path=ppt/slides/slide10.xml><?xml version="1.0" encoding="utf-8"?>
+<p:sld xmlns:a="http://schemas.openxmlformats.org/drawingml/2006/main" xmlns:r="http://schemas.openxmlformats.org/officeDocument/2006/relationships" xmlns:p="http://schemas.openxmlformats.org/presentationml/2006/main">
+  <p:cSld>
+    <p:bg>
+      <p:bgPr>
+        <a:solidFill>
+          <a:schemeClr val="accent1"/>
+        </a:solidFill>
+        <a:effectLst/>
+      </p:bgPr>
+    </p:bg>
+    <p:spTree>
+      <p:nvGrpSpPr>
+        <p:cNvPr id="1" name="">
+          <a:extLst>
+            <a:ext uri="{FF2B5EF4-FFF2-40B4-BE49-F238E27FC236}">
+              <a16:creationId xmlns:a16="http://schemas.microsoft.com/office/drawing/2014/main" id="{379F9209-9E9A-6DE6-D13F-ADB369977555}"/>
+            </a:ext>
+          </a:extLst>
+        </p:cNvPr>
+        <p:cNvGrpSpPr/>
+        <p:nvPr/>
+      </p:nvGrpSpPr>
+      <p:grpSpPr>
+        <a:xfrm>
+          <a:off x="0" y="0"/>
+          <a:ext cx="0" cy="0"/>
+          <a:chOff x="0" y="0"/>
+          <a:chExt cx="0" cy="0"/>
+        </a:xfrm>
+      </p:grpSpPr>
+      <p:sp>
+        <p:nvSpPr>
+          <p:cNvPr id="3" name="Subtitle 2">
+            <a:extLst>
+              <a:ext uri="{FF2B5EF4-FFF2-40B4-BE49-F238E27FC236}">
+                <a16:creationId xmlns:a16="http://schemas.microsoft.com/office/drawing/2014/main" id="{6F1D2590-69D4-C086-7DB2-EBE408F42946}"/>
+              </a:ext>
+            </a:extLst>
+          </p:cNvPr>
+          <p:cNvSpPr>
+            <a:spLocks noGrp="1"/>
+          </p:cNvSpPr>
+          <p:nvPr>
+            <p:ph type="subTitle" idx="1"/>
+          </p:nvPr>
+        </p:nvSpPr>
+        <p:spPr>
+          <a:xfrm>
+            <a:off x="682831" y="497702"/>
+            <a:ext cx="10826338" cy="5862596"/>
+          </a:xfrm>
+        </p:spPr>
+        <p:txBody>
+          <a:bodyPr>
+            <a:noAutofit/>
+          </a:bodyPr>
+          <a:lstStyle/>
+          <a:p>
+            <a:endParaRPr lang="en-US" sz="4400" dirty="0">
+              <a:solidFill>
+                <a:schemeClr val="bg1"/>
+              </a:solidFill>
+              <a:latin typeface="Avenir Medium" panose="02000503020000020003" pitchFamily="2" charset="0"/>
+              <a:ea typeface="Bodoni Ornaments" pitchFamily="2" charset="0"/>
+            </a:endParaRPr>
+          </a:p>
+          <a:p>
+            <a:r>
+              <a:rPr lang="en-US" sz="4400" dirty="0">
+                <a:solidFill>
+                  <a:schemeClr val="bg1"/>
+                </a:solidFill>
+                <a:latin typeface="Avenir Medium" panose="02000503020000020003" pitchFamily="2" charset="0"/>
+                <a:ea typeface="Bodoni Ornaments" pitchFamily="2" charset="0"/>
+              </a:rPr>
+              <a:t>On that day we join the resurrection</a:t>
+            </a:r>
+          </a:p>
+          <a:p>
+            <a:endParaRPr lang="en-US" sz="4400" dirty="0">
+              <a:solidFill>
+                <a:schemeClr val="bg1"/>
+              </a:solidFill>
+              <a:latin typeface="Avenir Medium" panose="02000503020000020003" pitchFamily="2" charset="0"/>
+              <a:ea typeface="Bodoni Ornaments" pitchFamily="2" charset="0"/>
+            </a:endParaRPr>
+          </a:p>
+          <a:p>
+            <a:r>
+              <a:rPr lang="en-US" sz="4400" dirty="0">
+                <a:solidFill>
+                  <a:schemeClr val="bg1"/>
+                </a:solidFill>
+                <a:latin typeface="Avenir Medium" panose="02000503020000020003" pitchFamily="2" charset="0"/>
+                <a:ea typeface="Bodoni Ornaments" pitchFamily="2" charset="0"/>
+              </a:rPr>
+              <a:t>And stand beside the heroes of the faith</a:t>
+            </a:r>
+          </a:p>
+        </p:txBody>
+      </p:sp>
+    </p:spTree>
+    <p:extLst>
+      <p:ext uri="{BB962C8B-B14F-4D97-AF65-F5344CB8AC3E}">
+        <p14:creationId xmlns:p14="http://schemas.microsoft.com/office/powerpoint/2010/main" val="1098862308"/>
+      </p:ext>
+    </p:extLst>
+  </p:cSld>
+  <p:clrMapOvr>
+    <a:masterClrMapping/>
+  </p:clrMapOvr>
+</p:sld>
+</file>
+
+<file path=ppt/slides/slide11.xml><?xml version="1.0" encoding="utf-8"?>
 <p:sld xmlns:a="http://schemas.openxmlformats.org/drawingml/2006/main" xmlns:r="http://schemas.openxmlformats.org/officeDocument/2006/relationships" xmlns:p="http://schemas.openxmlformats.org/presentationml/2006/main">
   <p:cSld>
     <p:bg>
@@ -3564,7 +3978,7 @@
 </p:sld>
 </file>
 
-<file path=ppt/slides/slide11.xml><?xml version="1.0" encoding="utf-8"?>
+<file path=ppt/slides/slide12.xml><?xml version="1.0" encoding="utf-8"?>
 <p:sld xmlns:a="http://schemas.openxmlformats.org/drawingml/2006/main" xmlns:r="http://schemas.openxmlformats.org/officeDocument/2006/relationships" xmlns:p="http://schemas.openxmlformats.org/presentationml/2006/main">
   <p:cSld>
     <p:bg>
@@ -3679,7 +4093,7 @@
 </p:sld>
 </file>
 
-<file path=ppt/slides/slide12.xml><?xml version="1.0" encoding="utf-8"?>
+<file path=ppt/slides/slide13.xml><?xml version="1.0" encoding="utf-8"?>
 <p:sld xmlns:a="http://schemas.openxmlformats.org/drawingml/2006/main" xmlns:r="http://schemas.openxmlformats.org/officeDocument/2006/relationships" xmlns:p="http://schemas.openxmlformats.org/presentationml/2006/main">
   <p:cSld>
     <p:bg>
@@ -3815,7 +4229,7 @@
 </p:sld>
 </file>
 
-<file path=ppt/slides/slide13.xml><?xml version="1.0" encoding="utf-8"?>
+<file path=ppt/slides/slide14.xml><?xml version="1.0" encoding="utf-8"?>
 <p:sld xmlns:a="http://schemas.openxmlformats.org/drawingml/2006/main" xmlns:r="http://schemas.openxmlformats.org/officeDocument/2006/relationships" xmlns:p="http://schemas.openxmlformats.org/presentationml/2006/main">
   <p:cSld>
     <p:bg>
@@ -3963,7 +4377,7 @@
 </p:sld>
 </file>
 
-<file path=ppt/slides/slide14.xml><?xml version="1.0" encoding="utf-8"?>
+<file path=ppt/slides/slide15.xml><?xml version="1.0" encoding="utf-8"?>
 <p:sld xmlns:a="http://schemas.openxmlformats.org/drawingml/2006/main" xmlns:r="http://schemas.openxmlformats.org/officeDocument/2006/relationships" xmlns:p="http://schemas.openxmlformats.org/presentationml/2006/main">
   <p:cSld>
     <p:bg>
@@ -4090,7 +4504,7 @@
 </p:sld>
 </file>
 
-<file path=ppt/slides/slide15.xml><?xml version="1.0" encoding="utf-8"?>
+<file path=ppt/slides/slide16.xml><?xml version="1.0" encoding="utf-8"?>
 <p:sld xmlns:a="http://schemas.openxmlformats.org/drawingml/2006/main" xmlns:r="http://schemas.openxmlformats.org/officeDocument/2006/relationships" xmlns:p="http://schemas.openxmlformats.org/presentationml/2006/main">
   <p:cSld>
     <p:bg>
@@ -4238,7 +4652,7 @@
 </p:sld>
 </file>
 
-<file path=ppt/slides/slide16.xml><?xml version="1.0" encoding="utf-8"?>
+<file path=ppt/slides/slide17.xml><?xml version="1.0" encoding="utf-8"?>
 <p:sld xmlns:a="http://schemas.openxmlformats.org/drawingml/2006/main" xmlns:r="http://schemas.openxmlformats.org/officeDocument/2006/relationships" xmlns:p="http://schemas.openxmlformats.org/presentationml/2006/main">
   <p:cSld>
     <p:bg>
@@ -4414,6 +4828,142 @@
         <p:cNvPr id="1" name="">
           <a:extLst>
             <a:ext uri="{FF2B5EF4-FFF2-40B4-BE49-F238E27FC236}">
+              <a16:creationId xmlns:a16="http://schemas.microsoft.com/office/drawing/2014/main" id="{0C7F1709-70D9-7011-5D92-F7E57F5604D0}"/>
+            </a:ext>
+          </a:extLst>
+        </p:cNvPr>
+        <p:cNvGrpSpPr/>
+        <p:nvPr/>
+      </p:nvGrpSpPr>
+      <p:grpSpPr>
+        <a:xfrm>
+          <a:off x="0" y="0"/>
+          <a:ext cx="0" cy="0"/>
+          <a:chOff x="0" y="0"/>
+          <a:chExt cx="0" cy="0"/>
+        </a:xfrm>
+      </p:grpSpPr>
+      <p:sp>
+        <p:nvSpPr>
+          <p:cNvPr id="3" name="Subtitle 2">
+            <a:extLst>
+              <a:ext uri="{FF2B5EF4-FFF2-40B4-BE49-F238E27FC236}">
+                <a16:creationId xmlns:a16="http://schemas.microsoft.com/office/drawing/2014/main" id="{C25DBF04-8174-1226-1E95-AC7FB0F1B0E0}"/>
+              </a:ext>
+            </a:extLst>
+          </p:cNvPr>
+          <p:cNvSpPr>
+            <a:spLocks noGrp="1"/>
+          </p:cNvSpPr>
+          <p:nvPr>
+            <p:ph type="subTitle" idx="1"/>
+          </p:nvPr>
+        </p:nvSpPr>
+        <p:spPr>
+          <a:xfrm>
+            <a:off x="682831" y="497702"/>
+            <a:ext cx="10826338" cy="5862596"/>
+          </a:xfrm>
+        </p:spPr>
+        <p:txBody>
+          <a:bodyPr>
+            <a:noAutofit/>
+          </a:bodyPr>
+          <a:lstStyle/>
+          <a:p>
+            <a:endParaRPr lang="en-US" sz="4400" dirty="0">
+              <a:solidFill>
+                <a:schemeClr val="bg1"/>
+              </a:solidFill>
+              <a:latin typeface="Avenir Medium" panose="02000503020000020003" pitchFamily="2" charset="0"/>
+              <a:ea typeface="Bodoni Ornaments" pitchFamily="2" charset="0"/>
+            </a:endParaRPr>
+          </a:p>
+          <a:p>
+            <a:r>
+              <a:rPr lang="en-US" sz="4400" dirty="0">
+                <a:solidFill>
+                  <a:schemeClr val="bg1"/>
+                </a:solidFill>
+                <a:latin typeface="Avenir Medium" panose="02000503020000020003" pitchFamily="2" charset="0"/>
+                <a:ea typeface="Bodoni Ornaments" pitchFamily="2" charset="0"/>
+              </a:rPr>
+              <a:t>How I long to breathe the air of Heaven</a:t>
+            </a:r>
+          </a:p>
+          <a:p>
+            <a:endParaRPr lang="en-US" sz="4400" dirty="0">
+              <a:solidFill>
+                <a:schemeClr val="bg1"/>
+              </a:solidFill>
+              <a:latin typeface="Avenir Medium" panose="02000503020000020003" pitchFamily="2" charset="0"/>
+              <a:ea typeface="Bodoni Ornaments" pitchFamily="2" charset="0"/>
+            </a:endParaRPr>
+          </a:p>
+          <a:p>
+            <a:r>
+              <a:rPr lang="en-US" sz="4400" dirty="0">
+                <a:solidFill>
+                  <a:schemeClr val="bg1"/>
+                </a:solidFill>
+                <a:latin typeface="Avenir Medium" panose="02000503020000020003" pitchFamily="2" charset="0"/>
+                <a:ea typeface="Bodoni Ornaments" pitchFamily="2" charset="0"/>
+              </a:rPr>
+              <a:t>Where pain is gone </a:t>
+            </a:r>
+          </a:p>
+          <a:p>
+            <a:endParaRPr lang="en-US" sz="4400" dirty="0">
+              <a:solidFill>
+                <a:schemeClr val="bg1"/>
+              </a:solidFill>
+              <a:latin typeface="Avenir Medium" panose="02000503020000020003" pitchFamily="2" charset="0"/>
+              <a:ea typeface="Bodoni Ornaments" pitchFamily="2" charset="0"/>
+            </a:endParaRPr>
+          </a:p>
+          <a:p>
+            <a:r>
+              <a:rPr lang="en-US" sz="4400" dirty="0">
+                <a:solidFill>
+                  <a:schemeClr val="bg1"/>
+                </a:solidFill>
+                <a:latin typeface="Avenir Medium" panose="02000503020000020003" pitchFamily="2" charset="0"/>
+                <a:ea typeface="Bodoni Ornaments" pitchFamily="2" charset="0"/>
+              </a:rPr>
+              <a:t>and mercy fills the streets</a:t>
+            </a:r>
+          </a:p>
+        </p:txBody>
+      </p:sp>
+    </p:spTree>
+    <p:extLst>
+      <p:ext uri="{BB962C8B-B14F-4D97-AF65-F5344CB8AC3E}">
+        <p14:creationId xmlns:p14="http://schemas.microsoft.com/office/powerpoint/2010/main" val="3164163406"/>
+      </p:ext>
+    </p:extLst>
+  </p:cSld>
+  <p:clrMapOvr>
+    <a:masterClrMapping/>
+  </p:clrMapOvr>
+</p:sld>
+</file>
+
+<file path=ppt/slides/slide3.xml><?xml version="1.0" encoding="utf-8"?>
+<p:sld xmlns:a="http://schemas.openxmlformats.org/drawingml/2006/main" xmlns:r="http://schemas.openxmlformats.org/officeDocument/2006/relationships" xmlns:p="http://schemas.openxmlformats.org/presentationml/2006/main">
+  <p:cSld>
+    <p:bg>
+      <p:bgPr>
+        <a:solidFill>
+          <a:schemeClr val="accent1"/>
+        </a:solidFill>
+        <a:effectLst/>
+      </p:bgPr>
+    </p:bg>
+    <p:spTree>
+      <p:nvGrpSpPr>
+        <p:cNvPr id="1" name="">
+          <a:extLst>
+            <a:ext uri="{FF2B5EF4-FFF2-40B4-BE49-F238E27FC236}">
               <a16:creationId xmlns:a16="http://schemas.microsoft.com/office/drawing/2014/main" id="{8EC6DE33-751C-92B4-7B0B-7315139E6835}"/>
             </a:ext>
           </a:extLst>
@@ -4522,7 +5072,7 @@
 </p:sld>
 </file>
 
-<file path=ppt/slides/slide3.xml><?xml version="1.0" encoding="utf-8"?>
+<file path=ppt/slides/slide4.xml><?xml version="1.0" encoding="utf-8"?>
 <p:sld xmlns:a="http://schemas.openxmlformats.org/drawingml/2006/main" xmlns:r="http://schemas.openxmlformats.org/officeDocument/2006/relationships" xmlns:p="http://schemas.openxmlformats.org/presentationml/2006/main">
   <p:cSld>
     <p:bg>
@@ -4670,7 +5220,7 @@
 </p:sld>
 </file>
 
-<file path=ppt/slides/slide4.xml><?xml version="1.0" encoding="utf-8"?>
+<file path=ppt/slides/slide5.xml><?xml version="1.0" encoding="utf-8"?>
 <p:sld xmlns:a="http://schemas.openxmlformats.org/drawingml/2006/main" xmlns:r="http://schemas.openxmlformats.org/officeDocument/2006/relationships" xmlns:p="http://schemas.openxmlformats.org/presentationml/2006/main">
   <p:cSld>
     <p:bg>
@@ -4806,7 +5356,7 @@
 </p:sld>
 </file>
 
-<file path=ppt/slides/slide5.xml><?xml version="1.0" encoding="utf-8"?>
+<file path=ppt/slides/slide6.xml><?xml version="1.0" encoding="utf-8"?>
 <p:sld xmlns:a="http://schemas.openxmlformats.org/drawingml/2006/main" xmlns:r="http://schemas.openxmlformats.org/officeDocument/2006/relationships" xmlns:p="http://schemas.openxmlformats.org/presentationml/2006/main">
   <p:cSld>
     <p:bg>
@@ -4942,7 +5492,7 @@
 </p:sld>
 </file>
 
-<file path=ppt/slides/slide6.xml><?xml version="1.0" encoding="utf-8"?>
+<file path=ppt/slides/slide7.xml><?xml version="1.0" encoding="utf-8"?>
 <p:sld xmlns:a="http://schemas.openxmlformats.org/drawingml/2006/main" xmlns:r="http://schemas.openxmlformats.org/officeDocument/2006/relationships" xmlns:p="http://schemas.openxmlformats.org/presentationml/2006/main">
   <p:cSld>
     <p:bg>
@@ -5078,7 +5628,7 @@
 </p:sld>
 </file>
 
-<file path=ppt/slides/slide7.xml><?xml version="1.0" encoding="utf-8"?>
+<file path=ppt/slides/slide8.xml><?xml version="1.0" encoding="utf-8"?>
 <p:sld xmlns:a="http://schemas.openxmlformats.org/drawingml/2006/main" xmlns:r="http://schemas.openxmlformats.org/officeDocument/2006/relationships" xmlns:p="http://schemas.openxmlformats.org/presentationml/2006/main">
   <p:cSld>
     <p:bg>
@@ -5226,7 +5776,7 @@
 </p:sld>
 </file>
 
-<file path=ppt/slides/slide8.xml><?xml version="1.0" encoding="utf-8"?>
+<file path=ppt/slides/slide9.xml><?xml version="1.0" encoding="utf-8"?>
 <p:sld xmlns:a="http://schemas.openxmlformats.org/drawingml/2006/main" xmlns:r="http://schemas.openxmlformats.org/officeDocument/2006/relationships" xmlns:p="http://schemas.openxmlformats.org/presentationml/2006/main">
   <p:cSld>
     <p:bg>
@@ -5353,121 +5903,6 @@
     <p:extLst>
       <p:ext uri="{BB962C8B-B14F-4D97-AF65-F5344CB8AC3E}">
         <p14:creationId xmlns:p14="http://schemas.microsoft.com/office/powerpoint/2010/main" val="1234787163"/>
-      </p:ext>
-    </p:extLst>
-  </p:cSld>
-  <p:clrMapOvr>
-    <a:masterClrMapping/>
-  </p:clrMapOvr>
-</p:sld>
-</file>
-
-<file path=ppt/slides/slide9.xml><?xml version="1.0" encoding="utf-8"?>
-<p:sld xmlns:a="http://schemas.openxmlformats.org/drawingml/2006/main" xmlns:r="http://schemas.openxmlformats.org/officeDocument/2006/relationships" xmlns:p="http://schemas.openxmlformats.org/presentationml/2006/main">
-  <p:cSld>
-    <p:bg>
-      <p:bgPr>
-        <a:solidFill>
-          <a:schemeClr val="accent1"/>
-        </a:solidFill>
-        <a:effectLst/>
-      </p:bgPr>
-    </p:bg>
-    <p:spTree>
-      <p:nvGrpSpPr>
-        <p:cNvPr id="1" name="">
-          <a:extLst>
-            <a:ext uri="{FF2B5EF4-FFF2-40B4-BE49-F238E27FC236}">
-              <a16:creationId xmlns:a16="http://schemas.microsoft.com/office/drawing/2014/main" id="{379F9209-9E9A-6DE6-D13F-ADB369977555}"/>
-            </a:ext>
-          </a:extLst>
-        </p:cNvPr>
-        <p:cNvGrpSpPr/>
-        <p:nvPr/>
-      </p:nvGrpSpPr>
-      <p:grpSpPr>
-        <a:xfrm>
-          <a:off x="0" y="0"/>
-          <a:ext cx="0" cy="0"/>
-          <a:chOff x="0" y="0"/>
-          <a:chExt cx="0" cy="0"/>
-        </a:xfrm>
-      </p:grpSpPr>
-      <p:sp>
-        <p:nvSpPr>
-          <p:cNvPr id="3" name="Subtitle 2">
-            <a:extLst>
-              <a:ext uri="{FF2B5EF4-FFF2-40B4-BE49-F238E27FC236}">
-                <a16:creationId xmlns:a16="http://schemas.microsoft.com/office/drawing/2014/main" id="{6F1D2590-69D4-C086-7DB2-EBE408F42946}"/>
-              </a:ext>
-            </a:extLst>
-          </p:cNvPr>
-          <p:cNvSpPr>
-            <a:spLocks noGrp="1"/>
-          </p:cNvSpPr>
-          <p:nvPr>
-            <p:ph type="subTitle" idx="1"/>
-          </p:nvPr>
-        </p:nvSpPr>
-        <p:spPr>
-          <a:xfrm>
-            <a:off x="682831" y="497702"/>
-            <a:ext cx="10826338" cy="5862596"/>
-          </a:xfrm>
-        </p:spPr>
-        <p:txBody>
-          <a:bodyPr>
-            <a:noAutofit/>
-          </a:bodyPr>
-          <a:lstStyle/>
-          <a:p>
-            <a:endParaRPr lang="en-US" sz="4400" dirty="0">
-              <a:solidFill>
-                <a:schemeClr val="bg1"/>
-              </a:solidFill>
-              <a:latin typeface="Avenir Medium" panose="02000503020000020003" pitchFamily="2" charset="0"/>
-              <a:ea typeface="Bodoni Ornaments" pitchFamily="2" charset="0"/>
-            </a:endParaRPr>
-          </a:p>
-          <a:p>
-            <a:r>
-              <a:rPr lang="en-US" sz="4400" dirty="0">
-                <a:solidFill>
-                  <a:schemeClr val="bg1"/>
-                </a:solidFill>
-                <a:latin typeface="Avenir Medium" panose="02000503020000020003" pitchFamily="2" charset="0"/>
-                <a:ea typeface="Bodoni Ornaments" pitchFamily="2" charset="0"/>
-              </a:rPr>
-              <a:t>On that day we join the resurrection</a:t>
-            </a:r>
-          </a:p>
-          <a:p>
-            <a:endParaRPr lang="en-US" sz="4400" dirty="0">
-              <a:solidFill>
-                <a:schemeClr val="bg1"/>
-              </a:solidFill>
-              <a:latin typeface="Avenir Medium" panose="02000503020000020003" pitchFamily="2" charset="0"/>
-              <a:ea typeface="Bodoni Ornaments" pitchFamily="2" charset="0"/>
-            </a:endParaRPr>
-          </a:p>
-          <a:p>
-            <a:r>
-              <a:rPr lang="en-US" sz="4400" dirty="0">
-                <a:solidFill>
-                  <a:schemeClr val="bg1"/>
-                </a:solidFill>
-                <a:latin typeface="Avenir Medium" panose="02000503020000020003" pitchFamily="2" charset="0"/>
-                <a:ea typeface="Bodoni Ornaments" pitchFamily="2" charset="0"/>
-              </a:rPr>
-              <a:t>And stand beside the heroes of the faith</a:t>
-            </a:r>
-          </a:p>
-        </p:txBody>
-      </p:sp>
-    </p:spTree>
-    <p:extLst>
-      <p:ext uri="{BB962C8B-B14F-4D97-AF65-F5344CB8AC3E}">
-        <p14:creationId xmlns:p14="http://schemas.microsoft.com/office/powerpoint/2010/main" val="1098862308"/>
       </p:ext>
     </p:extLst>
   </p:cSld>

--- a/Hymn of Heaven.pptx
+++ b/Hymn of Heaven.pptx
@@ -2,34 +2,34 @@
 <file path=ppt/presentation.xml><?xml version="1.0" encoding="utf-8"?>
 <p:presentation xmlns:a="http://schemas.openxmlformats.org/drawingml/2006/main" xmlns:r="http://schemas.openxmlformats.org/officeDocument/2006/relationships" xmlns:p="http://schemas.openxmlformats.org/presentationml/2006/main" saveSubsetFonts="1" autoCompressPictures="0">
   <p:sldMasterIdLst>
-    <p:sldMasterId id="2147483648" r:id="rId1"/>
+    <p:sldMasterId id="2147483660" r:id="rId1"/>
   </p:sldMasterIdLst>
   <p:sldIdLst>
-    <p:sldId id="256" r:id="rId2"/>
-    <p:sldId id="274" r:id="rId3"/>
+    <p:sldId id="274" r:id="rId2"/>
+    <p:sldId id="275" r:id="rId3"/>
     <p:sldId id="257" r:id="rId4"/>
     <p:sldId id="258" r:id="rId5"/>
     <p:sldId id="259" r:id="rId6"/>
     <p:sldId id="260" r:id="rId7"/>
     <p:sldId id="261" r:id="rId8"/>
-    <p:sldId id="262" r:id="rId9"/>
-    <p:sldId id="263" r:id="rId10"/>
+    <p:sldId id="276" r:id="rId9"/>
+    <p:sldId id="277" r:id="rId10"/>
     <p:sldId id="265" r:id="rId11"/>
     <p:sldId id="264" r:id="rId12"/>
     <p:sldId id="266" r:id="rId13"/>
     <p:sldId id="267" r:id="rId14"/>
-    <p:sldId id="270" r:id="rId15"/>
-    <p:sldId id="271" r:id="rId16"/>
+    <p:sldId id="278" r:id="rId15"/>
+    <p:sldId id="279" r:id="rId16"/>
     <p:sldId id="272" r:id="rId17"/>
     <p:sldId id="273" r:id="rId18"/>
   </p:sldIdLst>
-  <p:sldSz cx="12192000" cy="6858000"/>
+  <p:sldSz cx="9144000" cy="6858000" type="screen4x3"/>
   <p:notesSz cx="6858000" cy="9144000"/>
   <p:defaultTextStyle>
     <a:defPPr>
       <a:defRPr lang="en-US"/>
     </a:defPPr>
-    <a:lvl1pPr marL="0" algn="l" defTabSz="914400" rtl="0" eaLnBrk="1" latinLnBrk="0" hangingPunct="1">
+    <a:lvl1pPr marL="0" algn="l" defTabSz="457200" rtl="0" eaLnBrk="1" latinLnBrk="0" hangingPunct="1">
       <a:defRPr sz="1800" kern="1200">
         <a:solidFill>
           <a:schemeClr val="tx1"/>
@@ -39,7 +39,7 @@
         <a:cs typeface="+mn-cs"/>
       </a:defRPr>
     </a:lvl1pPr>
-    <a:lvl2pPr marL="457200" algn="l" defTabSz="914400" rtl="0" eaLnBrk="1" latinLnBrk="0" hangingPunct="1">
+    <a:lvl2pPr marL="457200" algn="l" defTabSz="457200" rtl="0" eaLnBrk="1" latinLnBrk="0" hangingPunct="1">
       <a:defRPr sz="1800" kern="1200">
         <a:solidFill>
           <a:schemeClr val="tx1"/>
@@ -49,7 +49,7 @@
         <a:cs typeface="+mn-cs"/>
       </a:defRPr>
     </a:lvl2pPr>
-    <a:lvl3pPr marL="914400" algn="l" defTabSz="914400" rtl="0" eaLnBrk="1" latinLnBrk="0" hangingPunct="1">
+    <a:lvl3pPr marL="914400" algn="l" defTabSz="457200" rtl="0" eaLnBrk="1" latinLnBrk="0" hangingPunct="1">
       <a:defRPr sz="1800" kern="1200">
         <a:solidFill>
           <a:schemeClr val="tx1"/>
@@ -59,7 +59,7 @@
         <a:cs typeface="+mn-cs"/>
       </a:defRPr>
     </a:lvl3pPr>
-    <a:lvl4pPr marL="1371600" algn="l" defTabSz="914400" rtl="0" eaLnBrk="1" latinLnBrk="0" hangingPunct="1">
+    <a:lvl4pPr marL="1371600" algn="l" defTabSz="457200" rtl="0" eaLnBrk="1" latinLnBrk="0" hangingPunct="1">
       <a:defRPr sz="1800" kern="1200">
         <a:solidFill>
           <a:schemeClr val="tx1"/>
@@ -69,7 +69,7 @@
         <a:cs typeface="+mn-cs"/>
       </a:defRPr>
     </a:lvl4pPr>
-    <a:lvl5pPr marL="1828800" algn="l" defTabSz="914400" rtl="0" eaLnBrk="1" latinLnBrk="0" hangingPunct="1">
+    <a:lvl5pPr marL="1828800" algn="l" defTabSz="457200" rtl="0" eaLnBrk="1" latinLnBrk="0" hangingPunct="1">
       <a:defRPr sz="1800" kern="1200">
         <a:solidFill>
           <a:schemeClr val="tx1"/>
@@ -79,7 +79,7 @@
         <a:cs typeface="+mn-cs"/>
       </a:defRPr>
     </a:lvl5pPr>
-    <a:lvl6pPr marL="2286000" algn="l" defTabSz="914400" rtl="0" eaLnBrk="1" latinLnBrk="0" hangingPunct="1">
+    <a:lvl6pPr marL="2286000" algn="l" defTabSz="457200" rtl="0" eaLnBrk="1" latinLnBrk="0" hangingPunct="1">
       <a:defRPr sz="1800" kern="1200">
         <a:solidFill>
           <a:schemeClr val="tx1"/>
@@ -89,7 +89,7 @@
         <a:cs typeface="+mn-cs"/>
       </a:defRPr>
     </a:lvl6pPr>
-    <a:lvl7pPr marL="2743200" algn="l" defTabSz="914400" rtl="0" eaLnBrk="1" latinLnBrk="0" hangingPunct="1">
+    <a:lvl7pPr marL="2743200" algn="l" defTabSz="457200" rtl="0" eaLnBrk="1" latinLnBrk="0" hangingPunct="1">
       <a:defRPr sz="1800" kern="1200">
         <a:solidFill>
           <a:schemeClr val="tx1"/>
@@ -99,7 +99,7 @@
         <a:cs typeface="+mn-cs"/>
       </a:defRPr>
     </a:lvl7pPr>
-    <a:lvl8pPr marL="3200400" algn="l" defTabSz="914400" rtl="0" eaLnBrk="1" latinLnBrk="0" hangingPunct="1">
+    <a:lvl8pPr marL="3200400" algn="l" defTabSz="457200" rtl="0" eaLnBrk="1" latinLnBrk="0" hangingPunct="1">
       <a:defRPr sz="1800" kern="1200">
         <a:solidFill>
           <a:schemeClr val="tx1"/>
@@ -109,7 +109,7 @@
         <a:cs typeface="+mn-cs"/>
       </a:defRPr>
     </a:lvl8pPr>
-    <a:lvl9pPr marL="3657600" algn="l" defTabSz="914400" rtl="0" eaLnBrk="1" latinLnBrk="0" hangingPunct="1">
+    <a:lvl9pPr marL="3657600" algn="l" defTabSz="457200" rtl="0" eaLnBrk="1" latinLnBrk="0" hangingPunct="1">
       <a:defRPr sz="1800" kern="1200">
         <a:solidFill>
           <a:schemeClr val="tx1"/>
@@ -147,13 +147,7 @@
       </p:grpSpPr>
       <p:sp>
         <p:nvSpPr>
-          <p:cNvPr id="2" name="Title 1">
-            <a:extLst>
-              <a:ext uri="{FF2B5EF4-FFF2-40B4-BE49-F238E27FC236}">
-                <a16:creationId xmlns:a16="http://schemas.microsoft.com/office/drawing/2014/main" id="{50FC4881-024B-CA4F-1A53-33C2DC0E7490}"/>
-              </a:ext>
-            </a:extLst>
-          </p:cNvPr>
+          <p:cNvPr id="2" name="Title 1"/>
           <p:cNvSpPr>
             <a:spLocks noGrp="1"/>
           </p:cNvSpPr>
@@ -163,8 +157,8 @@
         </p:nvSpPr>
         <p:spPr>
           <a:xfrm>
-            <a:off x="1524000" y="1122363"/>
-            <a:ext cx="9144000" cy="2387600"/>
+            <a:off x="685800" y="1122363"/>
+            <a:ext cx="7772400" cy="2387600"/>
           </a:xfrm>
         </p:spPr>
         <p:txBody>
@@ -179,18 +173,13 @@
               <a:rPr lang="en-US"/>
               <a:t>Click to edit Master title style</a:t>
             </a:r>
-          </a:p>
-        </p:txBody>
-      </p:sp>
-      <p:sp>
-        <p:nvSpPr>
-          <p:cNvPr id="3" name="Subtitle 2">
-            <a:extLst>
-              <a:ext uri="{FF2B5EF4-FFF2-40B4-BE49-F238E27FC236}">
-                <a16:creationId xmlns:a16="http://schemas.microsoft.com/office/drawing/2014/main" id="{8B0D2959-CEED-C8E4-130C-7C436E2473A7}"/>
-              </a:ext>
-            </a:extLst>
-          </p:cNvPr>
+            <a:endParaRPr lang="en-US" dirty="0"/>
+          </a:p>
+        </p:txBody>
+      </p:sp>
+      <p:sp>
+        <p:nvSpPr>
+          <p:cNvPr id="3" name="Subtitle 2"/>
           <p:cNvSpPr>
             <a:spLocks noGrp="1"/>
           </p:cNvSpPr>
@@ -200,8 +189,8 @@
         </p:nvSpPr>
         <p:spPr>
           <a:xfrm>
-            <a:off x="1524000" y="3602038"/>
-            <a:ext cx="9144000" cy="1655762"/>
+            <a:off x="1143000" y="3602038"/>
+            <a:ext cx="6858000" cy="1655762"/>
           </a:xfrm>
         </p:spPr>
         <p:txBody>
@@ -249,18 +238,13 @@
               <a:rPr lang="en-US"/>
               <a:t>Click to edit Master subtitle style</a:t>
             </a:r>
-          </a:p>
-        </p:txBody>
-      </p:sp>
-      <p:sp>
-        <p:nvSpPr>
-          <p:cNvPr id="4" name="Date Placeholder 3">
-            <a:extLst>
-              <a:ext uri="{FF2B5EF4-FFF2-40B4-BE49-F238E27FC236}">
-                <a16:creationId xmlns:a16="http://schemas.microsoft.com/office/drawing/2014/main" id="{4ABBB692-36FC-D0C6-12D7-33A0E66EA065}"/>
-              </a:ext>
-            </a:extLst>
-          </p:cNvPr>
+            <a:endParaRPr lang="en-US" dirty="0"/>
+          </a:p>
+        </p:txBody>
+      </p:sp>
+      <p:sp>
+        <p:nvSpPr>
+          <p:cNvPr id="4" name="Date Placeholder 3"/>
           <p:cNvSpPr>
             <a:spLocks noGrp="1"/>
           </p:cNvSpPr>
@@ -275,7 +259,7 @@
           <a:p>
             <a:fld id="{E759A0DE-F190-5444-87AC-4719D5F20D15}" type="datetimeFigureOut">
               <a:rPr lang="en-US" smtClean="0"/>
-              <a:t>11/15/25</a:t>
+              <a:t>6/6/26</a:t>
             </a:fld>
             <a:endParaRPr lang="en-US"/>
           </a:p>
@@ -283,13 +267,7 @@
       </p:sp>
       <p:sp>
         <p:nvSpPr>
-          <p:cNvPr id="5" name="Footer Placeholder 4">
-            <a:extLst>
-              <a:ext uri="{FF2B5EF4-FFF2-40B4-BE49-F238E27FC236}">
-                <a16:creationId xmlns:a16="http://schemas.microsoft.com/office/drawing/2014/main" id="{51817876-8CFB-960B-6A57-C7F9FD39D3EC}"/>
-              </a:ext>
-            </a:extLst>
-          </p:cNvPr>
+          <p:cNvPr id="5" name="Footer Placeholder 4"/>
           <p:cNvSpPr>
             <a:spLocks noGrp="1"/>
           </p:cNvSpPr>
@@ -308,13 +286,7 @@
       </p:sp>
       <p:sp>
         <p:nvSpPr>
-          <p:cNvPr id="6" name="Slide Number Placeholder 5">
-            <a:extLst>
-              <a:ext uri="{FF2B5EF4-FFF2-40B4-BE49-F238E27FC236}">
-                <a16:creationId xmlns:a16="http://schemas.microsoft.com/office/drawing/2014/main" id="{DB548E83-1153-3307-5818-CD7F2833A3F5}"/>
-              </a:ext>
-            </a:extLst>
-          </p:cNvPr>
+          <p:cNvPr id="6" name="Slide Number Placeholder 5"/>
           <p:cNvSpPr>
             <a:spLocks noGrp="1"/>
           </p:cNvSpPr>
@@ -338,7 +310,7 @@
     </p:spTree>
     <p:extLst>
       <p:ext uri="{BB962C8B-B14F-4D97-AF65-F5344CB8AC3E}">
-        <p14:creationId xmlns:p14="http://schemas.microsoft.com/office/powerpoint/2010/main" val="2594881872"/>
+        <p14:creationId xmlns:p14="http://schemas.microsoft.com/office/powerpoint/2010/main" val="555176512"/>
       </p:ext>
     </p:extLst>
   </p:cSld>
@@ -367,13 +339,7 @@
       </p:grpSpPr>
       <p:sp>
         <p:nvSpPr>
-          <p:cNvPr id="2" name="Title 1">
-            <a:extLst>
-              <a:ext uri="{FF2B5EF4-FFF2-40B4-BE49-F238E27FC236}">
-                <a16:creationId xmlns:a16="http://schemas.microsoft.com/office/drawing/2014/main" id="{9015C597-3152-5765-EBC1-B17D9951543D}"/>
-              </a:ext>
-            </a:extLst>
-          </p:cNvPr>
+          <p:cNvPr id="2" name="Title 1"/>
           <p:cNvSpPr>
             <a:spLocks noGrp="1"/>
           </p:cNvSpPr>
@@ -390,18 +356,13 @@
               <a:rPr lang="en-US"/>
               <a:t>Click to edit Master title style</a:t>
             </a:r>
-          </a:p>
-        </p:txBody>
-      </p:sp>
-      <p:sp>
-        <p:nvSpPr>
-          <p:cNvPr id="3" name="Vertical Text Placeholder 2">
-            <a:extLst>
-              <a:ext uri="{FF2B5EF4-FFF2-40B4-BE49-F238E27FC236}">
-                <a16:creationId xmlns:a16="http://schemas.microsoft.com/office/drawing/2014/main" id="{5BA5F73E-18E1-021C-9878-B37DC31E2802}"/>
-              </a:ext>
-            </a:extLst>
-          </p:cNvPr>
+            <a:endParaRPr lang="en-US" dirty="0"/>
+          </a:p>
+        </p:txBody>
+      </p:sp>
+      <p:sp>
+        <p:nvSpPr>
+          <p:cNvPr id="3" name="Vertical Text Placeholder 2"/>
           <p:cNvSpPr>
             <a:spLocks noGrp="1"/>
           </p:cNvSpPr>
@@ -447,18 +408,13 @@
               <a:rPr lang="en-US"/>
               <a:t>Fifth level</a:t>
             </a:r>
-          </a:p>
-        </p:txBody>
-      </p:sp>
-      <p:sp>
-        <p:nvSpPr>
-          <p:cNvPr id="4" name="Date Placeholder 3">
-            <a:extLst>
-              <a:ext uri="{FF2B5EF4-FFF2-40B4-BE49-F238E27FC236}">
-                <a16:creationId xmlns:a16="http://schemas.microsoft.com/office/drawing/2014/main" id="{B683AF53-E0B5-2F63-C15E-4BF621A3186B}"/>
-              </a:ext>
-            </a:extLst>
-          </p:cNvPr>
+            <a:endParaRPr lang="en-US" dirty="0"/>
+          </a:p>
+        </p:txBody>
+      </p:sp>
+      <p:sp>
+        <p:nvSpPr>
+          <p:cNvPr id="4" name="Date Placeholder 3"/>
           <p:cNvSpPr>
             <a:spLocks noGrp="1"/>
           </p:cNvSpPr>
@@ -473,7 +429,7 @@
           <a:p>
             <a:fld id="{E759A0DE-F190-5444-87AC-4719D5F20D15}" type="datetimeFigureOut">
               <a:rPr lang="en-US" smtClean="0"/>
-              <a:t>11/15/25</a:t>
+              <a:t>6/6/26</a:t>
             </a:fld>
             <a:endParaRPr lang="en-US"/>
           </a:p>
@@ -481,13 +437,7 @@
       </p:sp>
       <p:sp>
         <p:nvSpPr>
-          <p:cNvPr id="5" name="Footer Placeholder 4">
-            <a:extLst>
-              <a:ext uri="{FF2B5EF4-FFF2-40B4-BE49-F238E27FC236}">
-                <a16:creationId xmlns:a16="http://schemas.microsoft.com/office/drawing/2014/main" id="{D1CA465D-C46F-7FA4-9154-773B74869505}"/>
-              </a:ext>
-            </a:extLst>
-          </p:cNvPr>
+          <p:cNvPr id="5" name="Footer Placeholder 4"/>
           <p:cNvSpPr>
             <a:spLocks noGrp="1"/>
           </p:cNvSpPr>
@@ -506,13 +456,7 @@
       </p:sp>
       <p:sp>
         <p:nvSpPr>
-          <p:cNvPr id="6" name="Slide Number Placeholder 5">
-            <a:extLst>
-              <a:ext uri="{FF2B5EF4-FFF2-40B4-BE49-F238E27FC236}">
-                <a16:creationId xmlns:a16="http://schemas.microsoft.com/office/drawing/2014/main" id="{BBA3BEE5-DE05-B54F-20CA-E8C336AE957E}"/>
-              </a:ext>
-            </a:extLst>
-          </p:cNvPr>
+          <p:cNvPr id="6" name="Slide Number Placeholder 5"/>
           <p:cNvSpPr>
             <a:spLocks noGrp="1"/>
           </p:cNvSpPr>
@@ -536,7 +480,7 @@
     </p:spTree>
     <p:extLst>
       <p:ext uri="{BB962C8B-B14F-4D97-AF65-F5344CB8AC3E}">
-        <p14:creationId xmlns:p14="http://schemas.microsoft.com/office/powerpoint/2010/main" val="3115587574"/>
+        <p14:creationId xmlns:p14="http://schemas.microsoft.com/office/powerpoint/2010/main" val="1767137468"/>
       </p:ext>
     </p:extLst>
   </p:cSld>
@@ -565,13 +509,7 @@
       </p:grpSpPr>
       <p:sp>
         <p:nvSpPr>
-          <p:cNvPr id="2" name="Vertical Title 1">
-            <a:extLst>
-              <a:ext uri="{FF2B5EF4-FFF2-40B4-BE49-F238E27FC236}">
-                <a16:creationId xmlns:a16="http://schemas.microsoft.com/office/drawing/2014/main" id="{42C72931-C193-DCDC-01FD-20CDA0AD4513}"/>
-              </a:ext>
-            </a:extLst>
-          </p:cNvPr>
+          <p:cNvPr id="2" name="Vertical Title 1"/>
           <p:cNvSpPr>
             <a:spLocks noGrp="1"/>
           </p:cNvSpPr>
@@ -581,8 +519,8 @@
         </p:nvSpPr>
         <p:spPr>
           <a:xfrm>
-            <a:off x="8724900" y="365125"/>
-            <a:ext cx="2628900" cy="5811838"/>
+            <a:off x="6543675" y="365125"/>
+            <a:ext cx="1971675" cy="5811838"/>
           </a:xfrm>
         </p:spPr>
         <p:txBody>
@@ -593,18 +531,13 @@
               <a:rPr lang="en-US"/>
               <a:t>Click to edit Master title style</a:t>
             </a:r>
-          </a:p>
-        </p:txBody>
-      </p:sp>
-      <p:sp>
-        <p:nvSpPr>
-          <p:cNvPr id="3" name="Vertical Text Placeholder 2">
-            <a:extLst>
-              <a:ext uri="{FF2B5EF4-FFF2-40B4-BE49-F238E27FC236}">
-                <a16:creationId xmlns:a16="http://schemas.microsoft.com/office/drawing/2014/main" id="{E65B2C1B-4D9D-9A62-13D7-01C6580B781D}"/>
-              </a:ext>
-            </a:extLst>
-          </p:cNvPr>
+            <a:endParaRPr lang="en-US" dirty="0"/>
+          </a:p>
+        </p:txBody>
+      </p:sp>
+      <p:sp>
+        <p:nvSpPr>
+          <p:cNvPr id="3" name="Vertical Text Placeholder 2"/>
           <p:cNvSpPr>
             <a:spLocks noGrp="1"/>
           </p:cNvSpPr>
@@ -614,8 +547,8 @@
         </p:nvSpPr>
         <p:spPr>
           <a:xfrm>
-            <a:off x="838200" y="365125"/>
-            <a:ext cx="7734300" cy="5811838"/>
+            <a:off x="628650" y="365125"/>
+            <a:ext cx="5800725" cy="5811838"/>
           </a:xfrm>
         </p:spPr>
         <p:txBody>
@@ -655,18 +588,13 @@
               <a:rPr lang="en-US"/>
               <a:t>Fifth level</a:t>
             </a:r>
-          </a:p>
-        </p:txBody>
-      </p:sp>
-      <p:sp>
-        <p:nvSpPr>
-          <p:cNvPr id="4" name="Date Placeholder 3">
-            <a:extLst>
-              <a:ext uri="{FF2B5EF4-FFF2-40B4-BE49-F238E27FC236}">
-                <a16:creationId xmlns:a16="http://schemas.microsoft.com/office/drawing/2014/main" id="{57445465-66E1-00A0-A5D2-D034616CC34D}"/>
-              </a:ext>
-            </a:extLst>
-          </p:cNvPr>
+            <a:endParaRPr lang="en-US" dirty="0"/>
+          </a:p>
+        </p:txBody>
+      </p:sp>
+      <p:sp>
+        <p:nvSpPr>
+          <p:cNvPr id="4" name="Date Placeholder 3"/>
           <p:cNvSpPr>
             <a:spLocks noGrp="1"/>
           </p:cNvSpPr>
@@ -681,7 +609,7 @@
           <a:p>
             <a:fld id="{E759A0DE-F190-5444-87AC-4719D5F20D15}" type="datetimeFigureOut">
               <a:rPr lang="en-US" smtClean="0"/>
-              <a:t>11/15/25</a:t>
+              <a:t>6/6/26</a:t>
             </a:fld>
             <a:endParaRPr lang="en-US"/>
           </a:p>
@@ -689,13 +617,7 @@
       </p:sp>
       <p:sp>
         <p:nvSpPr>
-          <p:cNvPr id="5" name="Footer Placeholder 4">
-            <a:extLst>
-              <a:ext uri="{FF2B5EF4-FFF2-40B4-BE49-F238E27FC236}">
-                <a16:creationId xmlns:a16="http://schemas.microsoft.com/office/drawing/2014/main" id="{F253519E-C69A-9396-C73F-1ACB40774508}"/>
-              </a:ext>
-            </a:extLst>
-          </p:cNvPr>
+          <p:cNvPr id="5" name="Footer Placeholder 4"/>
           <p:cNvSpPr>
             <a:spLocks noGrp="1"/>
           </p:cNvSpPr>
@@ -714,13 +636,7 @@
       </p:sp>
       <p:sp>
         <p:nvSpPr>
-          <p:cNvPr id="6" name="Slide Number Placeholder 5">
-            <a:extLst>
-              <a:ext uri="{FF2B5EF4-FFF2-40B4-BE49-F238E27FC236}">
-                <a16:creationId xmlns:a16="http://schemas.microsoft.com/office/drawing/2014/main" id="{CC85BFC6-ABA4-44D2-E110-CE59D7D2AE43}"/>
-              </a:ext>
-            </a:extLst>
-          </p:cNvPr>
+          <p:cNvPr id="6" name="Slide Number Placeholder 5"/>
           <p:cNvSpPr>
             <a:spLocks noGrp="1"/>
           </p:cNvSpPr>
@@ -744,7 +660,7 @@
     </p:spTree>
     <p:extLst>
       <p:ext uri="{BB962C8B-B14F-4D97-AF65-F5344CB8AC3E}">
-        <p14:creationId xmlns:p14="http://schemas.microsoft.com/office/powerpoint/2010/main" val="1588597314"/>
+        <p14:creationId xmlns:p14="http://schemas.microsoft.com/office/powerpoint/2010/main" val="1457990281"/>
       </p:ext>
     </p:extLst>
   </p:cSld>
@@ -773,13 +689,7 @@
       </p:grpSpPr>
       <p:sp>
         <p:nvSpPr>
-          <p:cNvPr id="2" name="Title 1">
-            <a:extLst>
-              <a:ext uri="{FF2B5EF4-FFF2-40B4-BE49-F238E27FC236}">
-                <a16:creationId xmlns:a16="http://schemas.microsoft.com/office/drawing/2014/main" id="{A4C6B7EA-B38C-12D1-5730-E271A11FB914}"/>
-              </a:ext>
-            </a:extLst>
-          </p:cNvPr>
+          <p:cNvPr id="2" name="Title 1"/>
           <p:cNvSpPr>
             <a:spLocks noGrp="1"/>
           </p:cNvSpPr>
@@ -796,18 +706,13 @@
               <a:rPr lang="en-US"/>
               <a:t>Click to edit Master title style</a:t>
             </a:r>
-          </a:p>
-        </p:txBody>
-      </p:sp>
-      <p:sp>
-        <p:nvSpPr>
-          <p:cNvPr id="3" name="Content Placeholder 2">
-            <a:extLst>
-              <a:ext uri="{FF2B5EF4-FFF2-40B4-BE49-F238E27FC236}">
-                <a16:creationId xmlns:a16="http://schemas.microsoft.com/office/drawing/2014/main" id="{5D8D1A30-880C-91DF-D6D6-0BE623BC9F03}"/>
-              </a:ext>
-            </a:extLst>
-          </p:cNvPr>
+            <a:endParaRPr lang="en-US" dirty="0"/>
+          </a:p>
+        </p:txBody>
+      </p:sp>
+      <p:sp>
+        <p:nvSpPr>
+          <p:cNvPr id="3" name="Content Placeholder 2"/>
           <p:cNvSpPr>
             <a:spLocks noGrp="1"/>
           </p:cNvSpPr>
@@ -853,18 +758,13 @@
               <a:rPr lang="en-US"/>
               <a:t>Fifth level</a:t>
             </a:r>
-          </a:p>
-        </p:txBody>
-      </p:sp>
-      <p:sp>
-        <p:nvSpPr>
-          <p:cNvPr id="4" name="Date Placeholder 3">
-            <a:extLst>
-              <a:ext uri="{FF2B5EF4-FFF2-40B4-BE49-F238E27FC236}">
-                <a16:creationId xmlns:a16="http://schemas.microsoft.com/office/drawing/2014/main" id="{27753098-E2DC-41B2-9361-756938A8EBFE}"/>
-              </a:ext>
-            </a:extLst>
-          </p:cNvPr>
+            <a:endParaRPr lang="en-US" dirty="0"/>
+          </a:p>
+        </p:txBody>
+      </p:sp>
+      <p:sp>
+        <p:nvSpPr>
+          <p:cNvPr id="4" name="Date Placeholder 3"/>
           <p:cNvSpPr>
             <a:spLocks noGrp="1"/>
           </p:cNvSpPr>
@@ -879,7 +779,7 @@
           <a:p>
             <a:fld id="{E759A0DE-F190-5444-87AC-4719D5F20D15}" type="datetimeFigureOut">
               <a:rPr lang="en-US" smtClean="0"/>
-              <a:t>11/15/25</a:t>
+              <a:t>6/6/26</a:t>
             </a:fld>
             <a:endParaRPr lang="en-US"/>
           </a:p>
@@ -887,13 +787,7 @@
       </p:sp>
       <p:sp>
         <p:nvSpPr>
-          <p:cNvPr id="5" name="Footer Placeholder 4">
-            <a:extLst>
-              <a:ext uri="{FF2B5EF4-FFF2-40B4-BE49-F238E27FC236}">
-                <a16:creationId xmlns:a16="http://schemas.microsoft.com/office/drawing/2014/main" id="{E463E6B5-5EA8-FE6C-FA06-4515DC0C07A4}"/>
-              </a:ext>
-            </a:extLst>
-          </p:cNvPr>
+          <p:cNvPr id="5" name="Footer Placeholder 4"/>
           <p:cNvSpPr>
             <a:spLocks noGrp="1"/>
           </p:cNvSpPr>
@@ -912,13 +806,7 @@
       </p:sp>
       <p:sp>
         <p:nvSpPr>
-          <p:cNvPr id="6" name="Slide Number Placeholder 5">
-            <a:extLst>
-              <a:ext uri="{FF2B5EF4-FFF2-40B4-BE49-F238E27FC236}">
-                <a16:creationId xmlns:a16="http://schemas.microsoft.com/office/drawing/2014/main" id="{196A6D58-9856-3B55-DBEA-1B9A3269B325}"/>
-              </a:ext>
-            </a:extLst>
-          </p:cNvPr>
+          <p:cNvPr id="6" name="Slide Number Placeholder 5"/>
           <p:cNvSpPr>
             <a:spLocks noGrp="1"/>
           </p:cNvSpPr>
@@ -942,7 +830,7 @@
     </p:spTree>
     <p:extLst>
       <p:ext uri="{BB962C8B-B14F-4D97-AF65-F5344CB8AC3E}">
-        <p14:creationId xmlns:p14="http://schemas.microsoft.com/office/powerpoint/2010/main" val="1474312020"/>
+        <p14:creationId xmlns:p14="http://schemas.microsoft.com/office/powerpoint/2010/main" val="52395872"/>
       </p:ext>
     </p:extLst>
   </p:cSld>
@@ -971,13 +859,7 @@
       </p:grpSpPr>
       <p:sp>
         <p:nvSpPr>
-          <p:cNvPr id="2" name="Title 1">
-            <a:extLst>
-              <a:ext uri="{FF2B5EF4-FFF2-40B4-BE49-F238E27FC236}">
-                <a16:creationId xmlns:a16="http://schemas.microsoft.com/office/drawing/2014/main" id="{F3003BE6-BFB2-0EF8-7BD3-99B4FF56B7C7}"/>
-              </a:ext>
-            </a:extLst>
-          </p:cNvPr>
+          <p:cNvPr id="2" name="Title 1"/>
           <p:cNvSpPr>
             <a:spLocks noGrp="1"/>
           </p:cNvSpPr>
@@ -987,8 +869,8 @@
         </p:nvSpPr>
         <p:spPr>
           <a:xfrm>
-            <a:off x="831850" y="1709738"/>
-            <a:ext cx="10515600" cy="2852737"/>
+            <a:off x="623888" y="1709739"/>
+            <a:ext cx="7886700" cy="2852737"/>
           </a:xfrm>
         </p:spPr>
         <p:txBody>
@@ -1003,18 +885,13 @@
               <a:rPr lang="en-US"/>
               <a:t>Click to edit Master title style</a:t>
             </a:r>
-          </a:p>
-        </p:txBody>
-      </p:sp>
-      <p:sp>
-        <p:nvSpPr>
-          <p:cNvPr id="3" name="Text Placeholder 2">
-            <a:extLst>
-              <a:ext uri="{FF2B5EF4-FFF2-40B4-BE49-F238E27FC236}">
-                <a16:creationId xmlns:a16="http://schemas.microsoft.com/office/drawing/2014/main" id="{95E87140-F157-4DFF-CE20-2F5B759FC1E1}"/>
-              </a:ext>
-            </a:extLst>
-          </p:cNvPr>
+            <a:endParaRPr lang="en-US" dirty="0"/>
+          </a:p>
+        </p:txBody>
+      </p:sp>
+      <p:sp>
+        <p:nvSpPr>
+          <p:cNvPr id="3" name="Text Placeholder 2"/>
           <p:cNvSpPr>
             <a:spLocks noGrp="1"/>
           </p:cNvSpPr>
@@ -1024,8 +901,8 @@
         </p:nvSpPr>
         <p:spPr>
           <a:xfrm>
-            <a:off x="831850" y="4589463"/>
-            <a:ext cx="10515600" cy="1500187"/>
+            <a:off x="623888" y="4589464"/>
+            <a:ext cx="7886700" cy="1500187"/>
           </a:xfrm>
         </p:spPr>
         <p:txBody>
@@ -1133,13 +1010,7 @@
       </p:sp>
       <p:sp>
         <p:nvSpPr>
-          <p:cNvPr id="4" name="Date Placeholder 3">
-            <a:extLst>
-              <a:ext uri="{FF2B5EF4-FFF2-40B4-BE49-F238E27FC236}">
-                <a16:creationId xmlns:a16="http://schemas.microsoft.com/office/drawing/2014/main" id="{E119DC89-D1D7-E179-4B62-551014DFE5B3}"/>
-              </a:ext>
-            </a:extLst>
-          </p:cNvPr>
+          <p:cNvPr id="4" name="Date Placeholder 3"/>
           <p:cNvSpPr>
             <a:spLocks noGrp="1"/>
           </p:cNvSpPr>
@@ -1154,7 +1025,7 @@
           <a:p>
             <a:fld id="{E759A0DE-F190-5444-87AC-4719D5F20D15}" type="datetimeFigureOut">
               <a:rPr lang="en-US" smtClean="0"/>
-              <a:t>11/15/25</a:t>
+              <a:t>6/6/26</a:t>
             </a:fld>
             <a:endParaRPr lang="en-US"/>
           </a:p>
@@ -1162,13 +1033,7 @@
       </p:sp>
       <p:sp>
         <p:nvSpPr>
-          <p:cNvPr id="5" name="Footer Placeholder 4">
-            <a:extLst>
-              <a:ext uri="{FF2B5EF4-FFF2-40B4-BE49-F238E27FC236}">
-                <a16:creationId xmlns:a16="http://schemas.microsoft.com/office/drawing/2014/main" id="{0DC033CF-70D2-4EFC-5477-15F7486A8F3C}"/>
-              </a:ext>
-            </a:extLst>
-          </p:cNvPr>
+          <p:cNvPr id="5" name="Footer Placeholder 4"/>
           <p:cNvSpPr>
             <a:spLocks noGrp="1"/>
           </p:cNvSpPr>
@@ -1187,13 +1052,7 @@
       </p:sp>
       <p:sp>
         <p:nvSpPr>
-          <p:cNvPr id="6" name="Slide Number Placeholder 5">
-            <a:extLst>
-              <a:ext uri="{FF2B5EF4-FFF2-40B4-BE49-F238E27FC236}">
-                <a16:creationId xmlns:a16="http://schemas.microsoft.com/office/drawing/2014/main" id="{797ECCF9-ED4E-20EE-67CD-F55D0D853A8C}"/>
-              </a:ext>
-            </a:extLst>
-          </p:cNvPr>
+          <p:cNvPr id="6" name="Slide Number Placeholder 5"/>
           <p:cNvSpPr>
             <a:spLocks noGrp="1"/>
           </p:cNvSpPr>
@@ -1217,7 +1076,7 @@
     </p:spTree>
     <p:extLst>
       <p:ext uri="{BB962C8B-B14F-4D97-AF65-F5344CB8AC3E}">
-        <p14:creationId xmlns:p14="http://schemas.microsoft.com/office/powerpoint/2010/main" val="3736666041"/>
+        <p14:creationId xmlns:p14="http://schemas.microsoft.com/office/powerpoint/2010/main" val="3300841530"/>
       </p:ext>
     </p:extLst>
   </p:cSld>
@@ -1246,13 +1105,7 @@
       </p:grpSpPr>
       <p:sp>
         <p:nvSpPr>
-          <p:cNvPr id="2" name="Title 1">
-            <a:extLst>
-              <a:ext uri="{FF2B5EF4-FFF2-40B4-BE49-F238E27FC236}">
-                <a16:creationId xmlns:a16="http://schemas.microsoft.com/office/drawing/2014/main" id="{74DD7124-6407-E388-DFAC-CEAEF342D72D}"/>
-              </a:ext>
-            </a:extLst>
-          </p:cNvPr>
+          <p:cNvPr id="2" name="Title 1"/>
           <p:cNvSpPr>
             <a:spLocks noGrp="1"/>
           </p:cNvSpPr>
@@ -1269,18 +1122,13 @@
               <a:rPr lang="en-US"/>
               <a:t>Click to edit Master title style</a:t>
             </a:r>
-          </a:p>
-        </p:txBody>
-      </p:sp>
-      <p:sp>
-        <p:nvSpPr>
-          <p:cNvPr id="3" name="Content Placeholder 2">
-            <a:extLst>
-              <a:ext uri="{FF2B5EF4-FFF2-40B4-BE49-F238E27FC236}">
-                <a16:creationId xmlns:a16="http://schemas.microsoft.com/office/drawing/2014/main" id="{0354C6C2-33DA-0102-6360-654F993BD701}"/>
-              </a:ext>
-            </a:extLst>
-          </p:cNvPr>
+            <a:endParaRPr lang="en-US" dirty="0"/>
+          </a:p>
+        </p:txBody>
+      </p:sp>
+      <p:sp>
+        <p:nvSpPr>
+          <p:cNvPr id="3" name="Content Placeholder 2"/>
           <p:cNvSpPr>
             <a:spLocks noGrp="1"/>
           </p:cNvSpPr>
@@ -1290,8 +1138,8 @@
         </p:nvSpPr>
         <p:spPr>
           <a:xfrm>
-            <a:off x="838200" y="1825625"/>
-            <a:ext cx="5181600" cy="4351338"/>
+            <a:off x="628650" y="1825625"/>
+            <a:ext cx="3886200" cy="4351338"/>
           </a:xfrm>
         </p:spPr>
         <p:txBody>
@@ -1331,18 +1179,13 @@
               <a:rPr lang="en-US"/>
               <a:t>Fifth level</a:t>
             </a:r>
-          </a:p>
-        </p:txBody>
-      </p:sp>
-      <p:sp>
-        <p:nvSpPr>
-          <p:cNvPr id="4" name="Content Placeholder 3">
-            <a:extLst>
-              <a:ext uri="{FF2B5EF4-FFF2-40B4-BE49-F238E27FC236}">
-                <a16:creationId xmlns:a16="http://schemas.microsoft.com/office/drawing/2014/main" id="{EE2B2A58-052B-B454-9932-012243039D08}"/>
-              </a:ext>
-            </a:extLst>
-          </p:cNvPr>
+            <a:endParaRPr lang="en-US" dirty="0"/>
+          </a:p>
+        </p:txBody>
+      </p:sp>
+      <p:sp>
+        <p:nvSpPr>
+          <p:cNvPr id="4" name="Content Placeholder 3"/>
           <p:cNvSpPr>
             <a:spLocks noGrp="1"/>
           </p:cNvSpPr>
@@ -1352,8 +1195,8 @@
         </p:nvSpPr>
         <p:spPr>
           <a:xfrm>
-            <a:off x="6172200" y="1825625"/>
-            <a:ext cx="5181600" cy="4351338"/>
+            <a:off x="4629150" y="1825625"/>
+            <a:ext cx="3886200" cy="4351338"/>
           </a:xfrm>
         </p:spPr>
         <p:txBody>
@@ -1393,18 +1236,13 @@
               <a:rPr lang="en-US"/>
               <a:t>Fifth level</a:t>
             </a:r>
-          </a:p>
-        </p:txBody>
-      </p:sp>
-      <p:sp>
-        <p:nvSpPr>
-          <p:cNvPr id="5" name="Date Placeholder 4">
-            <a:extLst>
-              <a:ext uri="{FF2B5EF4-FFF2-40B4-BE49-F238E27FC236}">
-                <a16:creationId xmlns:a16="http://schemas.microsoft.com/office/drawing/2014/main" id="{52B92D04-ECBD-D55F-A459-4C28DF6A8C2E}"/>
-              </a:ext>
-            </a:extLst>
-          </p:cNvPr>
+            <a:endParaRPr lang="en-US" dirty="0"/>
+          </a:p>
+        </p:txBody>
+      </p:sp>
+      <p:sp>
+        <p:nvSpPr>
+          <p:cNvPr id="5" name="Date Placeholder 4"/>
           <p:cNvSpPr>
             <a:spLocks noGrp="1"/>
           </p:cNvSpPr>
@@ -1419,7 +1257,7 @@
           <a:p>
             <a:fld id="{E759A0DE-F190-5444-87AC-4719D5F20D15}" type="datetimeFigureOut">
               <a:rPr lang="en-US" smtClean="0"/>
-              <a:t>11/15/25</a:t>
+              <a:t>6/6/26</a:t>
             </a:fld>
             <a:endParaRPr lang="en-US"/>
           </a:p>
@@ -1427,13 +1265,7 @@
       </p:sp>
       <p:sp>
         <p:nvSpPr>
-          <p:cNvPr id="6" name="Footer Placeholder 5">
-            <a:extLst>
-              <a:ext uri="{FF2B5EF4-FFF2-40B4-BE49-F238E27FC236}">
-                <a16:creationId xmlns:a16="http://schemas.microsoft.com/office/drawing/2014/main" id="{DF69ACAC-11AF-A864-BD18-A4B426A4AA03}"/>
-              </a:ext>
-            </a:extLst>
-          </p:cNvPr>
+          <p:cNvPr id="6" name="Footer Placeholder 5"/>
           <p:cNvSpPr>
             <a:spLocks noGrp="1"/>
           </p:cNvSpPr>
@@ -1452,13 +1284,7 @@
       </p:sp>
       <p:sp>
         <p:nvSpPr>
-          <p:cNvPr id="7" name="Slide Number Placeholder 6">
-            <a:extLst>
-              <a:ext uri="{FF2B5EF4-FFF2-40B4-BE49-F238E27FC236}">
-                <a16:creationId xmlns:a16="http://schemas.microsoft.com/office/drawing/2014/main" id="{3A3C5DAC-E196-CEC3-6A6B-376BB3F37D19}"/>
-              </a:ext>
-            </a:extLst>
-          </p:cNvPr>
+          <p:cNvPr id="7" name="Slide Number Placeholder 6"/>
           <p:cNvSpPr>
             <a:spLocks noGrp="1"/>
           </p:cNvSpPr>
@@ -1482,7 +1308,7 @@
     </p:spTree>
     <p:extLst>
       <p:ext uri="{BB962C8B-B14F-4D97-AF65-F5344CB8AC3E}">
-        <p14:creationId xmlns:p14="http://schemas.microsoft.com/office/powerpoint/2010/main" val="621302458"/>
+        <p14:creationId xmlns:p14="http://schemas.microsoft.com/office/powerpoint/2010/main" val="2653341335"/>
       </p:ext>
     </p:extLst>
   </p:cSld>
@@ -1511,13 +1337,7 @@
       </p:grpSpPr>
       <p:sp>
         <p:nvSpPr>
-          <p:cNvPr id="2" name="Title 1">
-            <a:extLst>
-              <a:ext uri="{FF2B5EF4-FFF2-40B4-BE49-F238E27FC236}">
-                <a16:creationId xmlns:a16="http://schemas.microsoft.com/office/drawing/2014/main" id="{0C632820-190D-235F-CEAA-9558C5413BC1}"/>
-              </a:ext>
-            </a:extLst>
-          </p:cNvPr>
+          <p:cNvPr id="2" name="Title 1"/>
           <p:cNvSpPr>
             <a:spLocks noGrp="1"/>
           </p:cNvSpPr>
@@ -1527,8 +1347,8 @@
         </p:nvSpPr>
         <p:spPr>
           <a:xfrm>
-            <a:off x="839788" y="365125"/>
-            <a:ext cx="10515600" cy="1325563"/>
+            <a:off x="629841" y="365126"/>
+            <a:ext cx="7886700" cy="1325563"/>
           </a:xfrm>
         </p:spPr>
         <p:txBody>
@@ -1539,18 +1359,13 @@
               <a:rPr lang="en-US"/>
               <a:t>Click to edit Master title style</a:t>
             </a:r>
-          </a:p>
-        </p:txBody>
-      </p:sp>
-      <p:sp>
-        <p:nvSpPr>
-          <p:cNvPr id="3" name="Text Placeholder 2">
-            <a:extLst>
-              <a:ext uri="{FF2B5EF4-FFF2-40B4-BE49-F238E27FC236}">
-                <a16:creationId xmlns:a16="http://schemas.microsoft.com/office/drawing/2014/main" id="{16693254-6651-D942-4099-84C9B6A31CF3}"/>
-              </a:ext>
-            </a:extLst>
-          </p:cNvPr>
+            <a:endParaRPr lang="en-US" dirty="0"/>
+          </a:p>
+        </p:txBody>
+      </p:sp>
+      <p:sp>
+        <p:nvSpPr>
+          <p:cNvPr id="3" name="Text Placeholder 2"/>
           <p:cNvSpPr>
             <a:spLocks noGrp="1"/>
           </p:cNvSpPr>
@@ -1560,8 +1375,8 @@
         </p:nvSpPr>
         <p:spPr>
           <a:xfrm>
-            <a:off x="839788" y="1681163"/>
-            <a:ext cx="5157787" cy="823912"/>
+            <a:off x="629842" y="1681163"/>
+            <a:ext cx="3868340" cy="823912"/>
           </a:xfrm>
         </p:spPr>
         <p:txBody>
@@ -1615,13 +1430,7 @@
       </p:sp>
       <p:sp>
         <p:nvSpPr>
-          <p:cNvPr id="4" name="Content Placeholder 3">
-            <a:extLst>
-              <a:ext uri="{FF2B5EF4-FFF2-40B4-BE49-F238E27FC236}">
-                <a16:creationId xmlns:a16="http://schemas.microsoft.com/office/drawing/2014/main" id="{D6D4DAC3-CF47-11DC-83E8-0B1192A4422A}"/>
-              </a:ext>
-            </a:extLst>
-          </p:cNvPr>
+          <p:cNvPr id="4" name="Content Placeholder 3"/>
           <p:cNvSpPr>
             <a:spLocks noGrp="1"/>
           </p:cNvSpPr>
@@ -1631,8 +1440,8 @@
         </p:nvSpPr>
         <p:spPr>
           <a:xfrm>
-            <a:off x="839788" y="2505075"/>
-            <a:ext cx="5157787" cy="3684588"/>
+            <a:off x="629842" y="2505075"/>
+            <a:ext cx="3868340" cy="3684588"/>
           </a:xfrm>
         </p:spPr>
         <p:txBody>
@@ -1672,18 +1481,13 @@
               <a:rPr lang="en-US"/>
               <a:t>Fifth level</a:t>
             </a:r>
-          </a:p>
-        </p:txBody>
-      </p:sp>
-      <p:sp>
-        <p:nvSpPr>
-          <p:cNvPr id="5" name="Text Placeholder 4">
-            <a:extLst>
-              <a:ext uri="{FF2B5EF4-FFF2-40B4-BE49-F238E27FC236}">
-                <a16:creationId xmlns:a16="http://schemas.microsoft.com/office/drawing/2014/main" id="{3C49067B-AD0F-C796-4C8F-C043DB6FD3B3}"/>
-              </a:ext>
-            </a:extLst>
-          </p:cNvPr>
+            <a:endParaRPr lang="en-US" dirty="0"/>
+          </a:p>
+        </p:txBody>
+      </p:sp>
+      <p:sp>
+        <p:nvSpPr>
+          <p:cNvPr id="5" name="Text Placeholder 4"/>
           <p:cNvSpPr>
             <a:spLocks noGrp="1"/>
           </p:cNvSpPr>
@@ -1693,8 +1497,8 @@
         </p:nvSpPr>
         <p:spPr>
           <a:xfrm>
-            <a:off x="6172200" y="1681163"/>
-            <a:ext cx="5183188" cy="823912"/>
+            <a:off x="4629150" y="1681163"/>
+            <a:ext cx="3887391" cy="823912"/>
           </a:xfrm>
         </p:spPr>
         <p:txBody>
@@ -1748,13 +1552,7 @@
       </p:sp>
       <p:sp>
         <p:nvSpPr>
-          <p:cNvPr id="6" name="Content Placeholder 5">
-            <a:extLst>
-              <a:ext uri="{FF2B5EF4-FFF2-40B4-BE49-F238E27FC236}">
-                <a16:creationId xmlns:a16="http://schemas.microsoft.com/office/drawing/2014/main" id="{A4D0695B-675B-E8DD-D931-29E639B3E559}"/>
-              </a:ext>
-            </a:extLst>
-          </p:cNvPr>
+          <p:cNvPr id="6" name="Content Placeholder 5"/>
           <p:cNvSpPr>
             <a:spLocks noGrp="1"/>
           </p:cNvSpPr>
@@ -1764,8 +1562,8 @@
         </p:nvSpPr>
         <p:spPr>
           <a:xfrm>
-            <a:off x="6172200" y="2505075"/>
-            <a:ext cx="5183188" cy="3684588"/>
+            <a:off x="4629150" y="2505075"/>
+            <a:ext cx="3887391" cy="3684588"/>
           </a:xfrm>
         </p:spPr>
         <p:txBody>
@@ -1805,18 +1603,13 @@
               <a:rPr lang="en-US"/>
               <a:t>Fifth level</a:t>
             </a:r>
-          </a:p>
-        </p:txBody>
-      </p:sp>
-      <p:sp>
-        <p:nvSpPr>
-          <p:cNvPr id="7" name="Date Placeholder 6">
-            <a:extLst>
-              <a:ext uri="{FF2B5EF4-FFF2-40B4-BE49-F238E27FC236}">
-                <a16:creationId xmlns:a16="http://schemas.microsoft.com/office/drawing/2014/main" id="{E7F5423C-A80C-353A-6ADA-AD2195CCE83B}"/>
-              </a:ext>
-            </a:extLst>
-          </p:cNvPr>
+            <a:endParaRPr lang="en-US" dirty="0"/>
+          </a:p>
+        </p:txBody>
+      </p:sp>
+      <p:sp>
+        <p:nvSpPr>
+          <p:cNvPr id="7" name="Date Placeholder 6"/>
           <p:cNvSpPr>
             <a:spLocks noGrp="1"/>
           </p:cNvSpPr>
@@ -1831,7 +1624,7 @@
           <a:p>
             <a:fld id="{E759A0DE-F190-5444-87AC-4719D5F20D15}" type="datetimeFigureOut">
               <a:rPr lang="en-US" smtClean="0"/>
-              <a:t>11/15/25</a:t>
+              <a:t>6/6/26</a:t>
             </a:fld>
             <a:endParaRPr lang="en-US"/>
           </a:p>
@@ -1839,13 +1632,7 @@
       </p:sp>
       <p:sp>
         <p:nvSpPr>
-          <p:cNvPr id="8" name="Footer Placeholder 7">
-            <a:extLst>
-              <a:ext uri="{FF2B5EF4-FFF2-40B4-BE49-F238E27FC236}">
-                <a16:creationId xmlns:a16="http://schemas.microsoft.com/office/drawing/2014/main" id="{3154C085-1B7B-06F2-2F97-8BE5AED3D908}"/>
-              </a:ext>
-            </a:extLst>
-          </p:cNvPr>
+          <p:cNvPr id="8" name="Footer Placeholder 7"/>
           <p:cNvSpPr>
             <a:spLocks noGrp="1"/>
           </p:cNvSpPr>
@@ -1864,13 +1651,7 @@
       </p:sp>
       <p:sp>
         <p:nvSpPr>
-          <p:cNvPr id="9" name="Slide Number Placeholder 8">
-            <a:extLst>
-              <a:ext uri="{FF2B5EF4-FFF2-40B4-BE49-F238E27FC236}">
-                <a16:creationId xmlns:a16="http://schemas.microsoft.com/office/drawing/2014/main" id="{A6C6B0A2-57CB-16B8-1E9B-CA6DA6337B35}"/>
-              </a:ext>
-            </a:extLst>
-          </p:cNvPr>
+          <p:cNvPr id="9" name="Slide Number Placeholder 8"/>
           <p:cNvSpPr>
             <a:spLocks noGrp="1"/>
           </p:cNvSpPr>
@@ -1894,7 +1675,7 @@
     </p:spTree>
     <p:extLst>
       <p:ext uri="{BB962C8B-B14F-4D97-AF65-F5344CB8AC3E}">
-        <p14:creationId xmlns:p14="http://schemas.microsoft.com/office/powerpoint/2010/main" val="3902579014"/>
+        <p14:creationId xmlns:p14="http://schemas.microsoft.com/office/powerpoint/2010/main" val="46970786"/>
       </p:ext>
     </p:extLst>
   </p:cSld>
@@ -1923,13 +1704,7 @@
       </p:grpSpPr>
       <p:sp>
         <p:nvSpPr>
-          <p:cNvPr id="2" name="Title 1">
-            <a:extLst>
-              <a:ext uri="{FF2B5EF4-FFF2-40B4-BE49-F238E27FC236}">
-                <a16:creationId xmlns:a16="http://schemas.microsoft.com/office/drawing/2014/main" id="{42014C2D-A9C6-E4FF-86E0-53926609620A}"/>
-              </a:ext>
-            </a:extLst>
-          </p:cNvPr>
+          <p:cNvPr id="2" name="Title 1"/>
           <p:cNvSpPr>
             <a:spLocks noGrp="1"/>
           </p:cNvSpPr>
@@ -1946,18 +1721,13 @@
               <a:rPr lang="en-US"/>
               <a:t>Click to edit Master title style</a:t>
             </a:r>
-          </a:p>
-        </p:txBody>
-      </p:sp>
-      <p:sp>
-        <p:nvSpPr>
-          <p:cNvPr id="3" name="Date Placeholder 2">
-            <a:extLst>
-              <a:ext uri="{FF2B5EF4-FFF2-40B4-BE49-F238E27FC236}">
-                <a16:creationId xmlns:a16="http://schemas.microsoft.com/office/drawing/2014/main" id="{CAEBDED3-8FA2-E14E-6132-DBF06C0043E9}"/>
-              </a:ext>
-            </a:extLst>
-          </p:cNvPr>
+            <a:endParaRPr lang="en-US" dirty="0"/>
+          </a:p>
+        </p:txBody>
+      </p:sp>
+      <p:sp>
+        <p:nvSpPr>
+          <p:cNvPr id="3" name="Date Placeholder 2"/>
           <p:cNvSpPr>
             <a:spLocks noGrp="1"/>
           </p:cNvSpPr>
@@ -1972,7 +1742,7 @@
           <a:p>
             <a:fld id="{E759A0DE-F190-5444-87AC-4719D5F20D15}" type="datetimeFigureOut">
               <a:rPr lang="en-US" smtClean="0"/>
-              <a:t>11/15/25</a:t>
+              <a:t>6/6/26</a:t>
             </a:fld>
             <a:endParaRPr lang="en-US"/>
           </a:p>
@@ -1980,13 +1750,7 @@
       </p:sp>
       <p:sp>
         <p:nvSpPr>
-          <p:cNvPr id="4" name="Footer Placeholder 3">
-            <a:extLst>
-              <a:ext uri="{FF2B5EF4-FFF2-40B4-BE49-F238E27FC236}">
-                <a16:creationId xmlns:a16="http://schemas.microsoft.com/office/drawing/2014/main" id="{24FF1715-78D0-6155-47B7-64F32ECF5F55}"/>
-              </a:ext>
-            </a:extLst>
-          </p:cNvPr>
+          <p:cNvPr id="4" name="Footer Placeholder 3"/>
           <p:cNvSpPr>
             <a:spLocks noGrp="1"/>
           </p:cNvSpPr>
@@ -2005,13 +1769,7 @@
       </p:sp>
       <p:sp>
         <p:nvSpPr>
-          <p:cNvPr id="5" name="Slide Number Placeholder 4">
-            <a:extLst>
-              <a:ext uri="{FF2B5EF4-FFF2-40B4-BE49-F238E27FC236}">
-                <a16:creationId xmlns:a16="http://schemas.microsoft.com/office/drawing/2014/main" id="{95EE70D1-30EB-D2A6-F6C0-29E5A0681277}"/>
-              </a:ext>
-            </a:extLst>
-          </p:cNvPr>
+          <p:cNvPr id="5" name="Slide Number Placeholder 4"/>
           <p:cNvSpPr>
             <a:spLocks noGrp="1"/>
           </p:cNvSpPr>
@@ -2035,7 +1793,7 @@
     </p:spTree>
     <p:extLst>
       <p:ext uri="{BB962C8B-B14F-4D97-AF65-F5344CB8AC3E}">
-        <p14:creationId xmlns:p14="http://schemas.microsoft.com/office/powerpoint/2010/main" val="2762667879"/>
+        <p14:creationId xmlns:p14="http://schemas.microsoft.com/office/powerpoint/2010/main" val="3543433009"/>
       </p:ext>
     </p:extLst>
   </p:cSld>
@@ -2064,13 +1822,7 @@
       </p:grpSpPr>
       <p:sp>
         <p:nvSpPr>
-          <p:cNvPr id="2" name="Date Placeholder 1">
-            <a:extLst>
-              <a:ext uri="{FF2B5EF4-FFF2-40B4-BE49-F238E27FC236}">
-                <a16:creationId xmlns:a16="http://schemas.microsoft.com/office/drawing/2014/main" id="{9CD2DAB5-6AD5-15BC-026B-B80E34678399}"/>
-              </a:ext>
-            </a:extLst>
-          </p:cNvPr>
+          <p:cNvPr id="2" name="Date Placeholder 1"/>
           <p:cNvSpPr>
             <a:spLocks noGrp="1"/>
           </p:cNvSpPr>
@@ -2085,7 +1837,7 @@
           <a:p>
             <a:fld id="{E759A0DE-F190-5444-87AC-4719D5F20D15}" type="datetimeFigureOut">
               <a:rPr lang="en-US" smtClean="0"/>
-              <a:t>11/15/25</a:t>
+              <a:t>6/6/26</a:t>
             </a:fld>
             <a:endParaRPr lang="en-US"/>
           </a:p>
@@ -2093,13 +1845,7 @@
       </p:sp>
       <p:sp>
         <p:nvSpPr>
-          <p:cNvPr id="3" name="Footer Placeholder 2">
-            <a:extLst>
-              <a:ext uri="{FF2B5EF4-FFF2-40B4-BE49-F238E27FC236}">
-                <a16:creationId xmlns:a16="http://schemas.microsoft.com/office/drawing/2014/main" id="{919D2783-D2E4-47AE-70D6-B4A209E13CBC}"/>
-              </a:ext>
-            </a:extLst>
-          </p:cNvPr>
+          <p:cNvPr id="3" name="Footer Placeholder 2"/>
           <p:cNvSpPr>
             <a:spLocks noGrp="1"/>
           </p:cNvSpPr>
@@ -2118,13 +1864,7 @@
       </p:sp>
       <p:sp>
         <p:nvSpPr>
-          <p:cNvPr id="4" name="Slide Number Placeholder 3">
-            <a:extLst>
-              <a:ext uri="{FF2B5EF4-FFF2-40B4-BE49-F238E27FC236}">
-                <a16:creationId xmlns:a16="http://schemas.microsoft.com/office/drawing/2014/main" id="{009A41F5-9D51-17BE-FB49-C0DC79F1FB33}"/>
-              </a:ext>
-            </a:extLst>
-          </p:cNvPr>
+          <p:cNvPr id="4" name="Slide Number Placeholder 3"/>
           <p:cNvSpPr>
             <a:spLocks noGrp="1"/>
           </p:cNvSpPr>
@@ -2148,7 +1888,7 @@
     </p:spTree>
     <p:extLst>
       <p:ext uri="{BB962C8B-B14F-4D97-AF65-F5344CB8AC3E}">
-        <p14:creationId xmlns:p14="http://schemas.microsoft.com/office/powerpoint/2010/main" val="684399818"/>
+        <p14:creationId xmlns:p14="http://schemas.microsoft.com/office/powerpoint/2010/main" val="56640993"/>
       </p:ext>
     </p:extLst>
   </p:cSld>
@@ -2177,13 +1917,7 @@
       </p:grpSpPr>
       <p:sp>
         <p:nvSpPr>
-          <p:cNvPr id="2" name="Title 1">
-            <a:extLst>
-              <a:ext uri="{FF2B5EF4-FFF2-40B4-BE49-F238E27FC236}">
-                <a16:creationId xmlns:a16="http://schemas.microsoft.com/office/drawing/2014/main" id="{636535ED-82D6-0936-3EEB-AD9435F5EDC9}"/>
-              </a:ext>
-            </a:extLst>
-          </p:cNvPr>
+          <p:cNvPr id="2" name="Title 1"/>
           <p:cNvSpPr>
             <a:spLocks noGrp="1"/>
           </p:cNvSpPr>
@@ -2193,8 +1927,8 @@
         </p:nvSpPr>
         <p:spPr>
           <a:xfrm>
-            <a:off x="839788" y="457200"/>
-            <a:ext cx="3932237" cy="1600200"/>
+            <a:off x="629841" y="457200"/>
+            <a:ext cx="2949178" cy="1600200"/>
           </a:xfrm>
         </p:spPr>
         <p:txBody>
@@ -2209,18 +1943,13 @@
               <a:rPr lang="en-US"/>
               <a:t>Click to edit Master title style</a:t>
             </a:r>
-          </a:p>
-        </p:txBody>
-      </p:sp>
-      <p:sp>
-        <p:nvSpPr>
-          <p:cNvPr id="3" name="Content Placeholder 2">
-            <a:extLst>
-              <a:ext uri="{FF2B5EF4-FFF2-40B4-BE49-F238E27FC236}">
-                <a16:creationId xmlns:a16="http://schemas.microsoft.com/office/drawing/2014/main" id="{1803B2A4-A7AB-CDB0-D7F1-279536A2702A}"/>
-              </a:ext>
-            </a:extLst>
-          </p:cNvPr>
+            <a:endParaRPr lang="en-US" dirty="0"/>
+          </a:p>
+        </p:txBody>
+      </p:sp>
+      <p:sp>
+        <p:nvSpPr>
+          <p:cNvPr id="3" name="Content Placeholder 2"/>
           <p:cNvSpPr>
             <a:spLocks noGrp="1"/>
           </p:cNvSpPr>
@@ -2230,8 +1959,8 @@
         </p:nvSpPr>
         <p:spPr>
           <a:xfrm>
-            <a:off x="5183188" y="987425"/>
-            <a:ext cx="6172200" cy="4873625"/>
+            <a:off x="3887391" y="987426"/>
+            <a:ext cx="4629150" cy="4873625"/>
           </a:xfrm>
         </p:spPr>
         <p:txBody>
@@ -2299,18 +2028,13 @@
               <a:rPr lang="en-US"/>
               <a:t>Fifth level</a:t>
             </a:r>
-          </a:p>
-        </p:txBody>
-      </p:sp>
-      <p:sp>
-        <p:nvSpPr>
-          <p:cNvPr id="4" name="Text Placeholder 3">
-            <a:extLst>
-              <a:ext uri="{FF2B5EF4-FFF2-40B4-BE49-F238E27FC236}">
-                <a16:creationId xmlns:a16="http://schemas.microsoft.com/office/drawing/2014/main" id="{3329566A-3ACC-2A16-1AAE-6B0281DB7E3C}"/>
-              </a:ext>
-            </a:extLst>
-          </p:cNvPr>
+            <a:endParaRPr lang="en-US" dirty="0"/>
+          </a:p>
+        </p:txBody>
+      </p:sp>
+      <p:sp>
+        <p:nvSpPr>
+          <p:cNvPr id="4" name="Text Placeholder 3"/>
           <p:cNvSpPr>
             <a:spLocks noGrp="1"/>
           </p:cNvSpPr>
@@ -2320,8 +2044,8 @@
         </p:nvSpPr>
         <p:spPr>
           <a:xfrm>
-            <a:off x="839788" y="2057400"/>
-            <a:ext cx="3932237" cy="3811588"/>
+            <a:off x="629841" y="2057400"/>
+            <a:ext cx="2949178" cy="3811588"/>
           </a:xfrm>
         </p:spPr>
         <p:txBody>
@@ -2375,13 +2099,7 @@
       </p:sp>
       <p:sp>
         <p:nvSpPr>
-          <p:cNvPr id="5" name="Date Placeholder 4">
-            <a:extLst>
-              <a:ext uri="{FF2B5EF4-FFF2-40B4-BE49-F238E27FC236}">
-                <a16:creationId xmlns:a16="http://schemas.microsoft.com/office/drawing/2014/main" id="{453518F2-2B74-8F2D-171A-15986F3C5152}"/>
-              </a:ext>
-            </a:extLst>
-          </p:cNvPr>
+          <p:cNvPr id="5" name="Date Placeholder 4"/>
           <p:cNvSpPr>
             <a:spLocks noGrp="1"/>
           </p:cNvSpPr>
@@ -2396,7 +2114,7 @@
           <a:p>
             <a:fld id="{E759A0DE-F190-5444-87AC-4719D5F20D15}" type="datetimeFigureOut">
               <a:rPr lang="en-US" smtClean="0"/>
-              <a:t>11/15/25</a:t>
+              <a:t>6/6/26</a:t>
             </a:fld>
             <a:endParaRPr lang="en-US"/>
           </a:p>
@@ -2404,13 +2122,7 @@
       </p:sp>
       <p:sp>
         <p:nvSpPr>
-          <p:cNvPr id="6" name="Footer Placeholder 5">
-            <a:extLst>
-              <a:ext uri="{FF2B5EF4-FFF2-40B4-BE49-F238E27FC236}">
-                <a16:creationId xmlns:a16="http://schemas.microsoft.com/office/drawing/2014/main" id="{6DF8701B-4899-C3D0-CB2F-6C31378A510F}"/>
-              </a:ext>
-            </a:extLst>
-          </p:cNvPr>
+          <p:cNvPr id="6" name="Footer Placeholder 5"/>
           <p:cNvSpPr>
             <a:spLocks noGrp="1"/>
           </p:cNvSpPr>
@@ -2429,13 +2141,7 @@
       </p:sp>
       <p:sp>
         <p:nvSpPr>
-          <p:cNvPr id="7" name="Slide Number Placeholder 6">
-            <a:extLst>
-              <a:ext uri="{FF2B5EF4-FFF2-40B4-BE49-F238E27FC236}">
-                <a16:creationId xmlns:a16="http://schemas.microsoft.com/office/drawing/2014/main" id="{F3240FD0-A8F8-EFCD-2A69-21AB0FB076F6}"/>
-              </a:ext>
-            </a:extLst>
-          </p:cNvPr>
+          <p:cNvPr id="7" name="Slide Number Placeholder 6"/>
           <p:cNvSpPr>
             <a:spLocks noGrp="1"/>
           </p:cNvSpPr>
@@ -2459,7 +2165,7 @@
     </p:spTree>
     <p:extLst>
       <p:ext uri="{BB962C8B-B14F-4D97-AF65-F5344CB8AC3E}">
-        <p14:creationId xmlns:p14="http://schemas.microsoft.com/office/powerpoint/2010/main" val="2191778824"/>
+        <p14:creationId xmlns:p14="http://schemas.microsoft.com/office/powerpoint/2010/main" val="775254254"/>
       </p:ext>
     </p:extLst>
   </p:cSld>
@@ -2488,13 +2194,7 @@
       </p:grpSpPr>
       <p:sp>
         <p:nvSpPr>
-          <p:cNvPr id="2" name="Title 1">
-            <a:extLst>
-              <a:ext uri="{FF2B5EF4-FFF2-40B4-BE49-F238E27FC236}">
-                <a16:creationId xmlns:a16="http://schemas.microsoft.com/office/drawing/2014/main" id="{FD43467F-CDAF-BF3C-2E6D-F2EBB52C7E17}"/>
-              </a:ext>
-            </a:extLst>
-          </p:cNvPr>
+          <p:cNvPr id="2" name="Title 1"/>
           <p:cNvSpPr>
             <a:spLocks noGrp="1"/>
           </p:cNvSpPr>
@@ -2504,8 +2204,8 @@
         </p:nvSpPr>
         <p:spPr>
           <a:xfrm>
-            <a:off x="839788" y="457200"/>
-            <a:ext cx="3932237" cy="1600200"/>
+            <a:off x="629841" y="457200"/>
+            <a:ext cx="2949178" cy="1600200"/>
           </a:xfrm>
         </p:spPr>
         <p:txBody>
@@ -2520,20 +2220,15 @@
               <a:rPr lang="en-US"/>
               <a:t>Click to edit Master title style</a:t>
             </a:r>
-          </a:p>
-        </p:txBody>
-      </p:sp>
-      <p:sp>
-        <p:nvSpPr>
-          <p:cNvPr id="3" name="Picture Placeholder 2">
-            <a:extLst>
-              <a:ext uri="{FF2B5EF4-FFF2-40B4-BE49-F238E27FC236}">
-                <a16:creationId xmlns:a16="http://schemas.microsoft.com/office/drawing/2014/main" id="{63D374E6-7653-1FED-90D8-27F8F5A5A555}"/>
-              </a:ext>
-            </a:extLst>
-          </p:cNvPr>
-          <p:cNvSpPr>
-            <a:spLocks noGrp="1"/>
+            <a:endParaRPr lang="en-US" dirty="0"/>
+          </a:p>
+        </p:txBody>
+      </p:sp>
+      <p:sp>
+        <p:nvSpPr>
+          <p:cNvPr id="3" name="Picture Placeholder 2"/>
+          <p:cNvSpPr>
+            <a:spLocks noGrp="1" noChangeAspect="1"/>
           </p:cNvSpPr>
           <p:nvPr>
             <p:ph type="pic" idx="1"/>
@@ -2541,8 +2236,73 @@
         </p:nvSpPr>
         <p:spPr>
           <a:xfrm>
-            <a:off x="5183188" y="987425"/>
-            <a:ext cx="6172200" cy="4873625"/>
+            <a:off x="3887391" y="987426"/>
+            <a:ext cx="4629150" cy="4873625"/>
+          </a:xfrm>
+        </p:spPr>
+        <p:txBody>
+          <a:bodyPr anchor="t"/>
+          <a:lstStyle>
+            <a:lvl1pPr marL="0" indent="0">
+              <a:buNone/>
+              <a:defRPr sz="3200"/>
+            </a:lvl1pPr>
+            <a:lvl2pPr marL="457200" indent="0">
+              <a:buNone/>
+              <a:defRPr sz="2800"/>
+            </a:lvl2pPr>
+            <a:lvl3pPr marL="914400" indent="0">
+              <a:buNone/>
+              <a:defRPr sz="2400"/>
+            </a:lvl3pPr>
+            <a:lvl4pPr marL="1371600" indent="0">
+              <a:buNone/>
+              <a:defRPr sz="2000"/>
+            </a:lvl4pPr>
+            <a:lvl5pPr marL="1828800" indent="0">
+              <a:buNone/>
+              <a:defRPr sz="2000"/>
+            </a:lvl5pPr>
+            <a:lvl6pPr marL="2286000" indent="0">
+              <a:buNone/>
+              <a:defRPr sz="2000"/>
+            </a:lvl6pPr>
+            <a:lvl7pPr marL="2743200" indent="0">
+              <a:buNone/>
+              <a:defRPr sz="2000"/>
+            </a:lvl7pPr>
+            <a:lvl8pPr marL="3200400" indent="0">
+              <a:buNone/>
+              <a:defRPr sz="2000"/>
+            </a:lvl8pPr>
+            <a:lvl9pPr marL="3657600" indent="0">
+              <a:buNone/>
+              <a:defRPr sz="2000"/>
+            </a:lvl9pPr>
+          </a:lstStyle>
+          <a:p>
+            <a:r>
+              <a:rPr lang="en-US"/>
+              <a:t>Click icon to add picture</a:t>
+            </a:r>
+            <a:endParaRPr lang="en-US" dirty="0"/>
+          </a:p>
+        </p:txBody>
+      </p:sp>
+      <p:sp>
+        <p:nvSpPr>
+          <p:cNvPr id="4" name="Text Placeholder 3"/>
+          <p:cNvSpPr>
+            <a:spLocks noGrp="1"/>
+          </p:cNvSpPr>
+          <p:nvPr>
+            <p:ph type="body" sz="half" idx="2"/>
+          </p:nvPr>
+        </p:nvSpPr>
+        <p:spPr>
+          <a:xfrm>
+            <a:off x="629841" y="2057400"/>
+            <a:ext cx="2949178" cy="3811588"/>
           </a:xfrm>
         </p:spPr>
         <p:txBody>
@@ -2550,73 +2310,6 @@
           <a:lstStyle>
             <a:lvl1pPr marL="0" indent="0">
               <a:buNone/>
-              <a:defRPr sz="3200"/>
-            </a:lvl1pPr>
-            <a:lvl2pPr marL="457200" indent="0">
-              <a:buNone/>
-              <a:defRPr sz="2800"/>
-            </a:lvl2pPr>
-            <a:lvl3pPr marL="914400" indent="0">
-              <a:buNone/>
-              <a:defRPr sz="2400"/>
-            </a:lvl3pPr>
-            <a:lvl4pPr marL="1371600" indent="0">
-              <a:buNone/>
-              <a:defRPr sz="2000"/>
-            </a:lvl4pPr>
-            <a:lvl5pPr marL="1828800" indent="0">
-              <a:buNone/>
-              <a:defRPr sz="2000"/>
-            </a:lvl5pPr>
-            <a:lvl6pPr marL="2286000" indent="0">
-              <a:buNone/>
-              <a:defRPr sz="2000"/>
-            </a:lvl6pPr>
-            <a:lvl7pPr marL="2743200" indent="0">
-              <a:buNone/>
-              <a:defRPr sz="2000"/>
-            </a:lvl7pPr>
-            <a:lvl8pPr marL="3200400" indent="0">
-              <a:buNone/>
-              <a:defRPr sz="2000"/>
-            </a:lvl8pPr>
-            <a:lvl9pPr marL="3657600" indent="0">
-              <a:buNone/>
-              <a:defRPr sz="2000"/>
-            </a:lvl9pPr>
-          </a:lstStyle>
-          <a:p>
-            <a:endParaRPr lang="en-US"/>
-          </a:p>
-        </p:txBody>
-      </p:sp>
-      <p:sp>
-        <p:nvSpPr>
-          <p:cNvPr id="4" name="Text Placeholder 3">
-            <a:extLst>
-              <a:ext uri="{FF2B5EF4-FFF2-40B4-BE49-F238E27FC236}">
-                <a16:creationId xmlns:a16="http://schemas.microsoft.com/office/drawing/2014/main" id="{9318631D-B68A-86EE-A551-F2FE300250A2}"/>
-              </a:ext>
-            </a:extLst>
-          </p:cNvPr>
-          <p:cNvSpPr>
-            <a:spLocks noGrp="1"/>
-          </p:cNvSpPr>
-          <p:nvPr>
-            <p:ph type="body" sz="half" idx="2"/>
-          </p:nvPr>
-        </p:nvSpPr>
-        <p:spPr>
-          <a:xfrm>
-            <a:off x="839788" y="2057400"/>
-            <a:ext cx="3932237" cy="3811588"/>
-          </a:xfrm>
-        </p:spPr>
-        <p:txBody>
-          <a:bodyPr/>
-          <a:lstStyle>
-            <a:lvl1pPr marL="0" indent="0">
-              <a:buNone/>
               <a:defRPr sz="1600"/>
             </a:lvl1pPr>
             <a:lvl2pPr marL="457200" indent="0">
@@ -2663,13 +2356,7 @@
       </p:sp>
       <p:sp>
         <p:nvSpPr>
-          <p:cNvPr id="5" name="Date Placeholder 4">
-            <a:extLst>
-              <a:ext uri="{FF2B5EF4-FFF2-40B4-BE49-F238E27FC236}">
-                <a16:creationId xmlns:a16="http://schemas.microsoft.com/office/drawing/2014/main" id="{0CAD5574-CD0C-0EDC-7EA2-BBDDAA07AD36}"/>
-              </a:ext>
-            </a:extLst>
-          </p:cNvPr>
+          <p:cNvPr id="5" name="Date Placeholder 4"/>
           <p:cNvSpPr>
             <a:spLocks noGrp="1"/>
           </p:cNvSpPr>
@@ -2684,7 +2371,7 @@
           <a:p>
             <a:fld id="{E759A0DE-F190-5444-87AC-4719D5F20D15}" type="datetimeFigureOut">
               <a:rPr lang="en-US" smtClean="0"/>
-              <a:t>11/15/25</a:t>
+              <a:t>6/6/26</a:t>
             </a:fld>
             <a:endParaRPr lang="en-US"/>
           </a:p>
@@ -2692,13 +2379,7 @@
       </p:sp>
       <p:sp>
         <p:nvSpPr>
-          <p:cNvPr id="6" name="Footer Placeholder 5">
-            <a:extLst>
-              <a:ext uri="{FF2B5EF4-FFF2-40B4-BE49-F238E27FC236}">
-                <a16:creationId xmlns:a16="http://schemas.microsoft.com/office/drawing/2014/main" id="{C4ADA4F2-15B1-95FF-AFC8-0BCFB4E4E788}"/>
-              </a:ext>
-            </a:extLst>
-          </p:cNvPr>
+          <p:cNvPr id="6" name="Footer Placeholder 5"/>
           <p:cNvSpPr>
             <a:spLocks noGrp="1"/>
           </p:cNvSpPr>
@@ -2717,13 +2398,7 @@
       </p:sp>
       <p:sp>
         <p:nvSpPr>
-          <p:cNvPr id="7" name="Slide Number Placeholder 6">
-            <a:extLst>
-              <a:ext uri="{FF2B5EF4-FFF2-40B4-BE49-F238E27FC236}">
-                <a16:creationId xmlns:a16="http://schemas.microsoft.com/office/drawing/2014/main" id="{5F57356D-53C5-30FE-E0FE-A480BE6A8E8C}"/>
-              </a:ext>
-            </a:extLst>
-          </p:cNvPr>
+          <p:cNvPr id="7" name="Slide Number Placeholder 6"/>
           <p:cNvSpPr>
             <a:spLocks noGrp="1"/>
           </p:cNvSpPr>
@@ -2747,7 +2422,7 @@
     </p:spTree>
     <p:extLst>
       <p:ext uri="{BB962C8B-B14F-4D97-AF65-F5344CB8AC3E}">
-        <p14:creationId xmlns:p14="http://schemas.microsoft.com/office/powerpoint/2010/main" val="3139710704"/>
+        <p14:creationId xmlns:p14="http://schemas.microsoft.com/office/powerpoint/2010/main" val="4291241616"/>
       </p:ext>
     </p:extLst>
   </p:cSld>
@@ -2781,13 +2456,7 @@
       </p:grpSpPr>
       <p:sp>
         <p:nvSpPr>
-          <p:cNvPr id="2" name="Title Placeholder 1">
-            <a:extLst>
-              <a:ext uri="{FF2B5EF4-FFF2-40B4-BE49-F238E27FC236}">
-                <a16:creationId xmlns:a16="http://schemas.microsoft.com/office/drawing/2014/main" id="{E707FE23-AD5C-E492-4625-B3FFD7D65D58}"/>
-              </a:ext>
-            </a:extLst>
-          </p:cNvPr>
+          <p:cNvPr id="2" name="Title Placeholder 1"/>
           <p:cNvSpPr>
             <a:spLocks noGrp="1"/>
           </p:cNvSpPr>
@@ -2797,8 +2466,8 @@
         </p:nvSpPr>
         <p:spPr>
           <a:xfrm>
-            <a:off x="838200" y="365125"/>
-            <a:ext cx="10515600" cy="1325563"/>
+            <a:off x="628650" y="365126"/>
+            <a:ext cx="7886700" cy="1325563"/>
           </a:xfrm>
           <a:prstGeom prst="rect">
             <a:avLst/>
@@ -2814,18 +2483,13 @@
               <a:rPr lang="en-US"/>
               <a:t>Click to edit Master title style</a:t>
             </a:r>
-          </a:p>
-        </p:txBody>
-      </p:sp>
-      <p:sp>
-        <p:nvSpPr>
-          <p:cNvPr id="3" name="Text Placeholder 2">
-            <a:extLst>
-              <a:ext uri="{FF2B5EF4-FFF2-40B4-BE49-F238E27FC236}">
-                <a16:creationId xmlns:a16="http://schemas.microsoft.com/office/drawing/2014/main" id="{5935509A-545F-6691-9119-47A073D0143B}"/>
-              </a:ext>
-            </a:extLst>
-          </p:cNvPr>
+            <a:endParaRPr lang="en-US" dirty="0"/>
+          </a:p>
+        </p:txBody>
+      </p:sp>
+      <p:sp>
+        <p:nvSpPr>
+          <p:cNvPr id="3" name="Text Placeholder 2"/>
           <p:cNvSpPr>
             <a:spLocks noGrp="1"/>
           </p:cNvSpPr>
@@ -2835,8 +2499,8 @@
         </p:nvSpPr>
         <p:spPr>
           <a:xfrm>
-            <a:off x="838200" y="1825625"/>
-            <a:ext cx="10515600" cy="4351338"/>
+            <a:off x="628650" y="1825625"/>
+            <a:ext cx="7886700" cy="4351338"/>
           </a:xfrm>
           <a:prstGeom prst="rect">
             <a:avLst/>
@@ -2881,18 +2545,13 @@
               <a:rPr lang="en-US"/>
               <a:t>Fifth level</a:t>
             </a:r>
-          </a:p>
-        </p:txBody>
-      </p:sp>
-      <p:sp>
-        <p:nvSpPr>
-          <p:cNvPr id="4" name="Date Placeholder 3">
-            <a:extLst>
-              <a:ext uri="{FF2B5EF4-FFF2-40B4-BE49-F238E27FC236}">
-                <a16:creationId xmlns:a16="http://schemas.microsoft.com/office/drawing/2014/main" id="{B48FCAAE-1AD5-9CBF-A0F6-52A814732FD0}"/>
-              </a:ext>
-            </a:extLst>
-          </p:cNvPr>
+            <a:endParaRPr lang="en-US" dirty="0"/>
+          </a:p>
+        </p:txBody>
+      </p:sp>
+      <p:sp>
+        <p:nvSpPr>
+          <p:cNvPr id="4" name="Date Placeholder 3"/>
           <p:cNvSpPr>
             <a:spLocks noGrp="1"/>
           </p:cNvSpPr>
@@ -2902,8 +2561,8 @@
         </p:nvSpPr>
         <p:spPr>
           <a:xfrm>
-            <a:off x="838200" y="6356350"/>
-            <a:ext cx="2743200" cy="365125"/>
+            <a:off x="628650" y="6356351"/>
+            <a:ext cx="2057400" cy="365125"/>
           </a:xfrm>
           <a:prstGeom prst="rect">
             <a:avLst/>
@@ -2925,7 +2584,7 @@
           <a:p>
             <a:fld id="{E759A0DE-F190-5444-87AC-4719D5F20D15}" type="datetimeFigureOut">
               <a:rPr lang="en-US" smtClean="0"/>
-              <a:t>11/15/25</a:t>
+              <a:t>6/6/26</a:t>
             </a:fld>
             <a:endParaRPr lang="en-US"/>
           </a:p>
@@ -2933,13 +2592,7 @@
       </p:sp>
       <p:sp>
         <p:nvSpPr>
-          <p:cNvPr id="5" name="Footer Placeholder 4">
-            <a:extLst>
-              <a:ext uri="{FF2B5EF4-FFF2-40B4-BE49-F238E27FC236}">
-                <a16:creationId xmlns:a16="http://schemas.microsoft.com/office/drawing/2014/main" id="{22229717-0F21-BE11-1F19-88106B640856}"/>
-              </a:ext>
-            </a:extLst>
-          </p:cNvPr>
+          <p:cNvPr id="5" name="Footer Placeholder 4"/>
           <p:cNvSpPr>
             <a:spLocks noGrp="1"/>
           </p:cNvSpPr>
@@ -2949,8 +2602,8 @@
         </p:nvSpPr>
         <p:spPr>
           <a:xfrm>
-            <a:off x="4038600" y="6356350"/>
-            <a:ext cx="4114800" cy="365125"/>
+            <a:off x="3028950" y="6356351"/>
+            <a:ext cx="3086100" cy="365125"/>
           </a:xfrm>
           <a:prstGeom prst="rect">
             <a:avLst/>
@@ -2976,13 +2629,7 @@
       </p:sp>
       <p:sp>
         <p:nvSpPr>
-          <p:cNvPr id="6" name="Slide Number Placeholder 5">
-            <a:extLst>
-              <a:ext uri="{FF2B5EF4-FFF2-40B4-BE49-F238E27FC236}">
-                <a16:creationId xmlns:a16="http://schemas.microsoft.com/office/drawing/2014/main" id="{3858A247-FF8D-F68A-7E74-66F74B44BB8E}"/>
-              </a:ext>
-            </a:extLst>
-          </p:cNvPr>
+          <p:cNvPr id="6" name="Slide Number Placeholder 5"/>
           <p:cNvSpPr>
             <a:spLocks noGrp="1"/>
           </p:cNvSpPr>
@@ -2992,8 +2639,8 @@
         </p:nvSpPr>
         <p:spPr>
           <a:xfrm>
-            <a:off x="8610600" y="6356350"/>
-            <a:ext cx="2743200" cy="365125"/>
+            <a:off x="6457950" y="6356351"/>
+            <a:ext cx="2057400" cy="365125"/>
           </a:xfrm>
           <a:prstGeom prst="rect">
             <a:avLst/>
@@ -3024,23 +2671,23 @@
     </p:spTree>
     <p:extLst>
       <p:ext uri="{BB962C8B-B14F-4D97-AF65-F5344CB8AC3E}">
-        <p14:creationId xmlns:p14="http://schemas.microsoft.com/office/powerpoint/2010/main" val="3785378211"/>
+        <p14:creationId xmlns:p14="http://schemas.microsoft.com/office/powerpoint/2010/main" val="391710741"/>
       </p:ext>
     </p:extLst>
   </p:cSld>
   <p:clrMap bg1="lt1" tx1="dk1" bg2="lt2" tx2="dk2" accent1="accent1" accent2="accent2" accent3="accent3" accent4="accent4" accent5="accent5" accent6="accent6" hlink="hlink" folHlink="folHlink"/>
   <p:sldLayoutIdLst>
-    <p:sldLayoutId id="2147483649" r:id="rId1"/>
-    <p:sldLayoutId id="2147483650" r:id="rId2"/>
-    <p:sldLayoutId id="2147483651" r:id="rId3"/>
-    <p:sldLayoutId id="2147483652" r:id="rId4"/>
-    <p:sldLayoutId id="2147483653" r:id="rId5"/>
-    <p:sldLayoutId id="2147483654" r:id="rId6"/>
-    <p:sldLayoutId id="2147483655" r:id="rId7"/>
-    <p:sldLayoutId id="2147483656" r:id="rId8"/>
-    <p:sldLayoutId id="2147483657" r:id="rId9"/>
-    <p:sldLayoutId id="2147483658" r:id="rId10"/>
-    <p:sldLayoutId id="2147483659" r:id="rId11"/>
+    <p:sldLayoutId id="2147483661" r:id="rId1"/>
+    <p:sldLayoutId id="2147483662" r:id="rId2"/>
+    <p:sldLayoutId id="2147483663" r:id="rId3"/>
+    <p:sldLayoutId id="2147483664" r:id="rId4"/>
+    <p:sldLayoutId id="2147483665" r:id="rId5"/>
+    <p:sldLayoutId id="2147483666" r:id="rId6"/>
+    <p:sldLayoutId id="2147483667" r:id="rId7"/>
+    <p:sldLayoutId id="2147483668" r:id="rId8"/>
+    <p:sldLayoutId id="2147483669" r:id="rId9"/>
+    <p:sldLayoutId id="2147483670" r:id="rId10"/>
+    <p:sldLayoutId id="2147483671" r:id="rId11"/>
   </p:sldLayoutIdLst>
   <p:txStyles>
     <p:titleStyle>
@@ -3331,14 +2978,20 @@
     <p:bg>
       <p:bgPr>
         <a:solidFill>
-          <a:schemeClr val="bg1"/>
+          <a:schemeClr val="tx1"/>
         </a:solidFill>
         <a:effectLst/>
       </p:bgPr>
     </p:bg>
     <p:spTree>
       <p:nvGrpSpPr>
-        <p:cNvPr id="1" name=""/>
+        <p:cNvPr id="1" name="">
+          <a:extLst>
+            <a:ext uri="{FF2B5EF4-FFF2-40B4-BE49-F238E27FC236}">
+              <a16:creationId xmlns:a16="http://schemas.microsoft.com/office/drawing/2014/main" id="{0C7F1709-70D9-7011-5D92-F7E57F5604D0}"/>
+            </a:ext>
+          </a:extLst>
+        </p:cNvPr>
         <p:cNvGrpSpPr/>
         <p:nvPr/>
       </p:nvGrpSpPr>
@@ -3350,395 +3003,52 @@
           <a:chExt cx="0" cy="0"/>
         </a:xfrm>
       </p:grpSpPr>
-      <p:sp useBgFill="1">
-        <p:nvSpPr>
-          <p:cNvPr id="17" name="Rectangle 16">
+      <p:sp>
+        <p:nvSpPr>
+          <p:cNvPr id="3" name="Subtitle 2">
             <a:extLst>
               <a:ext uri="{FF2B5EF4-FFF2-40B4-BE49-F238E27FC236}">
-                <a16:creationId xmlns:a16="http://schemas.microsoft.com/office/drawing/2014/main" id="{0671A8AE-40A1-4631-A6B8-581AFF065482}"/>
-              </a:ext>
-              <a:ext uri="{C183D7F6-B498-43B3-948B-1728B52AA6E4}">
-                <adec:decorative xmlns:adec="http://schemas.microsoft.com/office/drawing/2017/decorative" val="1"/>
+                <a16:creationId xmlns:a16="http://schemas.microsoft.com/office/drawing/2014/main" id="{C25DBF04-8174-1226-1E95-AC7FB0F1B0E0}"/>
               </a:ext>
             </a:extLst>
           </p:cNvPr>
           <p:cNvSpPr>
-            <a:spLocks noGrp="1" noRot="1" noChangeAspect="1" noMove="1" noResize="1" noEditPoints="1" noAdjustHandles="1" noChangeArrowheads="1" noChangeShapeType="1" noTextEdit="1"/>
-          </p:cNvSpPr>
-          <p:nvPr>
-            <p:extLst>
-              <p:ext uri="{386F3935-93C4-4BCD-93E2-E3B085C9AB24}">
-                <p16:designElem xmlns:p16="http://schemas.microsoft.com/office/powerpoint/2015/main" val="1"/>
-              </p:ext>
-            </p:extLst>
+            <a:spLocks noGrp="1"/>
+          </p:cNvSpPr>
+          <p:nvPr>
+            <p:ph type="subTitle" idx="1"/>
           </p:nvPr>
         </p:nvSpPr>
         <p:spPr>
           <a:xfrm>
-            <a:off x="0" y="0"/>
-            <a:ext cx="12192000" cy="6858000"/>
-          </a:xfrm>
-          <a:prstGeom prst="rect">
-            <a:avLst/>
-          </a:prstGeom>
-          <a:ln>
-            <a:noFill/>
-          </a:ln>
-        </p:spPr>
-        <p:style>
-          <a:lnRef idx="2">
-            <a:schemeClr val="accent1">
-              <a:shade val="50000"/>
-            </a:schemeClr>
-          </a:lnRef>
-          <a:fillRef idx="1">
-            <a:schemeClr val="accent1"/>
-          </a:fillRef>
-          <a:effectRef idx="0">
-            <a:schemeClr val="accent1"/>
-          </a:effectRef>
-          <a:fontRef idx="minor">
-            <a:schemeClr val="lt1"/>
-          </a:fontRef>
-        </p:style>
-        <p:txBody>
-          <a:bodyPr rtlCol="0" anchor="ctr"/>
-          <a:lstStyle/>
-          <a:p>
-            <a:pPr algn="ctr"/>
-            <a:endParaRPr lang="en-US"/>
-          </a:p>
-        </p:txBody>
-      </p:sp>
-      <p:pic>
-        <p:nvPicPr>
-          <p:cNvPr id="4" name="Picture 3" descr="A mountain with a red sky&#10;&#10;AI-generated content may be incorrect.">
-            <a:extLst>
-              <a:ext uri="{FF2B5EF4-FFF2-40B4-BE49-F238E27FC236}">
-                <a16:creationId xmlns:a16="http://schemas.microsoft.com/office/drawing/2014/main" id="{F8A33EF8-8399-C39F-50A0-F9B748F8C275}"/>
-              </a:ext>
-            </a:extLst>
-          </p:cNvPr>
-          <p:cNvPicPr>
-            <a:picLocks noChangeAspect="1"/>
-          </p:cNvPicPr>
-          <p:nvPr/>
-        </p:nvPicPr>
-        <p:blipFill>
-          <a:blip r:embed="rId2"/>
-          <a:srcRect l="8141" t="9091" r="27222"/>
-          <a:stretch>
-            <a:fillRect/>
-          </a:stretch>
-        </p:blipFill>
-        <p:spPr>
-          <a:xfrm>
-            <a:off x="3523488" y="10"/>
-            <a:ext cx="8668512" cy="6857990"/>
-          </a:xfrm>
-          <a:prstGeom prst="rect">
-            <a:avLst/>
-          </a:prstGeom>
-        </p:spPr>
-      </p:pic>
-      <p:sp>
-        <p:nvSpPr>
-          <p:cNvPr id="18" name="Rectangle 17">
-            <a:extLst>
-              <a:ext uri="{FF2B5EF4-FFF2-40B4-BE49-F238E27FC236}">
-                <a16:creationId xmlns:a16="http://schemas.microsoft.com/office/drawing/2014/main" id="{AB58EF07-17C2-48CF-ABB0-EEF1F17CB8F0}"/>
-              </a:ext>
-              <a:ext uri="{C183D7F6-B498-43B3-948B-1728B52AA6E4}">
-                <adec:decorative xmlns:adec="http://schemas.microsoft.com/office/drawing/2017/decorative" val="1"/>
-              </a:ext>
-            </a:extLst>
-          </p:cNvPr>
-          <p:cNvSpPr>
-            <a:spLocks noGrp="1" noRot="1" noChangeAspect="1" noMove="1" noResize="1" noEditPoints="1" noAdjustHandles="1" noChangeArrowheads="1" noChangeShapeType="1" noTextEdit="1"/>
-          </p:cNvSpPr>
-          <p:nvPr>
-            <p:extLst>
-              <p:ext uri="{386F3935-93C4-4BCD-93E2-E3B085C9AB24}">
-                <p16:designElem xmlns:p16="http://schemas.microsoft.com/office/powerpoint/2015/main" val="1"/>
-              </p:ext>
-            </p:extLst>
-          </p:nvPr>
-        </p:nvSpPr>
-        <p:spPr>
-          <a:xfrm>
-            <a:off x="3" y="0"/>
-            <a:ext cx="9339206" cy="6858000"/>
-          </a:xfrm>
-          <a:prstGeom prst="rect">
-            <a:avLst/>
-          </a:prstGeom>
-          <a:gradFill>
-            <a:gsLst>
-              <a:gs pos="58000">
-                <a:schemeClr val="tx1"/>
-              </a:gs>
-              <a:gs pos="33000">
-                <a:schemeClr val="tx1">
-                  <a:alpha val="64000"/>
-                </a:schemeClr>
-              </a:gs>
-              <a:gs pos="0">
-                <a:schemeClr val="tx1">
-                  <a:alpha val="0"/>
-                </a:schemeClr>
-              </a:gs>
-              <a:gs pos="100000">
-                <a:schemeClr val="tx1"/>
-              </a:gs>
-            </a:gsLst>
-            <a:lin ang="10800000" scaled="0"/>
-          </a:gradFill>
-          <a:ln>
-            <a:noFill/>
-          </a:ln>
-        </p:spPr>
-        <p:style>
-          <a:lnRef idx="2">
-            <a:schemeClr val="accent1">
-              <a:shade val="50000"/>
-            </a:schemeClr>
-          </a:lnRef>
-          <a:fillRef idx="1">
-            <a:schemeClr val="accent1"/>
-          </a:fillRef>
-          <a:effectRef idx="0">
-            <a:schemeClr val="accent1"/>
-          </a:effectRef>
-          <a:fontRef idx="minor">
-            <a:schemeClr val="lt1"/>
-          </a:fontRef>
-        </p:style>
-        <p:txBody>
-          <a:bodyPr rtlCol="0" anchor="ctr"/>
-          <a:lstStyle/>
-          <a:p>
-            <a:pPr algn="ctr"/>
-            <a:endParaRPr lang="en-US" dirty="0"/>
-          </a:p>
-        </p:txBody>
-      </p:sp>
-      <p:sp>
-        <p:nvSpPr>
-          <p:cNvPr id="3" name="Subtitle 2">
-            <a:extLst>
-              <a:ext uri="{FF2B5EF4-FFF2-40B4-BE49-F238E27FC236}">
-                <a16:creationId xmlns:a16="http://schemas.microsoft.com/office/drawing/2014/main" id="{BDDF4048-2958-B759-F7D1-45755BE99DD7}"/>
-              </a:ext>
-            </a:extLst>
-          </p:cNvPr>
-          <p:cNvSpPr>
-            <a:spLocks noGrp="1"/>
-          </p:cNvSpPr>
-          <p:nvPr>
-            <p:ph type="subTitle" idx="1"/>
-          </p:nvPr>
-        </p:nvSpPr>
-        <p:spPr>
-          <a:xfrm>
-            <a:off x="477980" y="4872922"/>
-            <a:ext cx="4023359" cy="1208141"/>
+            <a:off x="152400" y="91440"/>
+            <a:ext cx="8816340" cy="6675119"/>
           </a:xfrm>
         </p:spPr>
         <p:txBody>
           <a:bodyPr>
-            <a:normAutofit/>
+            <a:noAutofit/>
           </a:bodyPr>
           <a:lstStyle/>
           <a:p>
             <a:pPr algn="l"/>
-            <a:endParaRPr lang="en-US" sz="2000" dirty="0">
-              <a:solidFill>
-                <a:schemeClr val="bg1"/>
-              </a:solidFill>
-              <a:latin typeface="Avenir Medium" panose="02000503020000020003" pitchFamily="2" charset="0"/>
-              <a:ea typeface="Bodoni Ornaments" pitchFamily="2" charset="0"/>
-            </a:endParaRPr>
-          </a:p>
-          <a:p>
-            <a:pPr algn="l"/>
-            <a:r>
-              <a:rPr lang="en-US" sz="4000" i="1" dirty="0">
-                <a:solidFill>
-                  <a:schemeClr val="bg1"/>
-                </a:solidFill>
-                <a:latin typeface="Avenir Oblique" panose="02000503020000020003" pitchFamily="2" charset="0"/>
+            <a:r>
+              <a:rPr lang="en-US" sz="9600" dirty="0">
+                <a:solidFill>
+                  <a:schemeClr val="bg1"/>
+                </a:solidFill>
+                <a:latin typeface="Avenir Medium" panose="02000503020000020003" pitchFamily="2" charset="0"/>
                 <a:ea typeface="Bodoni Ornaments" pitchFamily="2" charset="0"/>
               </a:rPr>
               <a:t>Hymn of Heaven</a:t>
             </a:r>
-          </a:p>
-        </p:txBody>
-      </p:sp>
-      <p:sp>
-        <p:nvSpPr>
-          <p:cNvPr id="19" name="Rectangle 18">
-            <a:extLst>
-              <a:ext uri="{FF2B5EF4-FFF2-40B4-BE49-F238E27FC236}">
-                <a16:creationId xmlns:a16="http://schemas.microsoft.com/office/drawing/2014/main" id="{AF2F604E-43BE-4DC3-B983-E071523364F8}"/>
-              </a:ext>
-              <a:ext uri="{C183D7F6-B498-43B3-948B-1728B52AA6E4}">
-                <adec:decorative xmlns:adec="http://schemas.microsoft.com/office/drawing/2017/decorative" val="1"/>
-              </a:ext>
-            </a:extLst>
-          </p:cNvPr>
-          <p:cNvSpPr>
-            <a:spLocks noGrp="1" noRot="1" noChangeAspect="1" noMove="1" noResize="1" noEditPoints="1" noAdjustHandles="1" noChangeArrowheads="1" noChangeShapeType="1" noTextEdit="1"/>
-          </p:cNvSpPr>
-          <p:nvPr>
-            <p:extLst>
-              <p:ext uri="{386F3935-93C4-4BCD-93E2-E3B085C9AB24}">
-                <p16:designElem xmlns:p16="http://schemas.microsoft.com/office/powerpoint/2015/main" val="1"/>
-              </p:ext>
-            </p:extLst>
-          </p:nvPr>
-        </p:nvSpPr>
-        <p:spPr>
-          <a:xfrm rot="5400000">
-            <a:off x="759921" y="346791"/>
-            <a:ext cx="146304" cy="704088"/>
-          </a:xfrm>
-          <a:prstGeom prst="rect">
-            <a:avLst/>
-          </a:prstGeom>
-          <a:solidFill>
-            <a:schemeClr val="accent2"/>
-          </a:solidFill>
-          <a:ln>
-            <a:noFill/>
-          </a:ln>
-        </p:spPr>
-        <p:style>
-          <a:lnRef idx="2">
-            <a:schemeClr val="accent1">
-              <a:shade val="50000"/>
-            </a:schemeClr>
-          </a:lnRef>
-          <a:fillRef idx="1">
-            <a:schemeClr val="accent1"/>
-          </a:fillRef>
-          <a:effectRef idx="0">
-            <a:schemeClr val="accent1"/>
-          </a:effectRef>
-          <a:fontRef idx="minor">
-            <a:schemeClr val="lt1"/>
-          </a:fontRef>
-        </p:style>
-        <p:txBody>
-          <a:bodyPr rtlCol="0" anchor="ctr"/>
-          <a:lstStyle/>
-          <a:p>
-            <a:pPr algn="ctr"/>
-            <a:endParaRPr lang="en-US">
-              <a:solidFill>
-                <a:prstClr val="white"/>
-              </a:solidFill>
-              <a:latin typeface="Calibri" panose="020F0502020204030204"/>
-            </a:endParaRPr>
-          </a:p>
-        </p:txBody>
-      </p:sp>
-      <p:sp>
-        <p:nvSpPr>
-          <p:cNvPr id="20" name="Rectangle 19">
-            <a:extLst>
-              <a:ext uri="{FF2B5EF4-FFF2-40B4-BE49-F238E27FC236}">
-                <a16:creationId xmlns:a16="http://schemas.microsoft.com/office/drawing/2014/main" id="{08C9B587-E65E-4B52-B37C-ABEBB6E87928}"/>
-              </a:ext>
-              <a:ext uri="{C183D7F6-B498-43B3-948B-1728B52AA6E4}">
-                <adec:decorative xmlns:adec="http://schemas.microsoft.com/office/drawing/2017/decorative" val="1"/>
-              </a:ext>
-            </a:extLst>
-          </p:cNvPr>
-          <p:cNvSpPr>
-            <a:spLocks noGrp="1" noRot="1" noChangeAspect="1" noMove="1" noResize="1" noEditPoints="1" noAdjustHandles="1" noChangeArrowheads="1" noChangeShapeType="1" noTextEdit="1"/>
-          </p:cNvSpPr>
-          <p:nvPr>
-            <p:extLst>
-              <p:ext uri="{386F3935-93C4-4BCD-93E2-E3B085C9AB24}">
-                <p16:designElem xmlns:p16="http://schemas.microsoft.com/office/powerpoint/2015/main" val="1"/>
-              </p:ext>
-            </p:extLst>
-          </p:nvPr>
-        </p:nvSpPr>
-        <p:spPr>
-          <a:xfrm>
-            <a:off x="481029" y="4546920"/>
-            <a:ext cx="3977640" cy="18288"/>
-          </a:xfrm>
-          <a:prstGeom prst="rect">
-            <a:avLst/>
-          </a:prstGeom>
-          <a:solidFill>
-            <a:schemeClr val="tx1"/>
-          </a:solidFill>
-          <a:ln w="3175">
-            <a:noFill/>
-          </a:ln>
-          <a:effectLst/>
-        </p:spPr>
-        <p:style>
-          <a:lnRef idx="2">
-            <a:schemeClr val="accent1">
-              <a:shade val="50000"/>
-            </a:schemeClr>
-          </a:lnRef>
-          <a:fillRef idx="1">
-            <a:schemeClr val="accent1"/>
-          </a:fillRef>
-          <a:effectRef idx="0">
-            <a:schemeClr val="accent1"/>
-          </a:effectRef>
-          <a:fontRef idx="minor">
-            <a:schemeClr val="lt1"/>
-          </a:fontRef>
-        </p:style>
-        <p:txBody>
-          <a:bodyPr rtlCol="0" anchor="ctr"/>
-          <a:lstStyle/>
-          <a:p>
-            <a:pPr marL="0" marR="0" lvl="0" indent="0" algn="ctr" defTabSz="914400" rtl="0" eaLnBrk="1" fontAlgn="auto" latinLnBrk="0" hangingPunct="1">
-              <a:lnSpc>
-                <a:spcPct val="100000"/>
-              </a:lnSpc>
-              <a:spcBef>
-                <a:spcPts val="0"/>
-              </a:spcBef>
-              <a:spcAft>
-                <a:spcPts val="0"/>
-              </a:spcAft>
-              <a:buClrTx/>
-              <a:buSzTx/>
-              <a:buFontTx/>
-              <a:buNone/>
-              <a:tabLst/>
-              <a:defRPr/>
-            </a:pPr>
-            <a:endParaRPr kumimoji="0" lang="en-US" sz="1800" b="0" i="0" u="none" strike="noStrike" kern="1200" cap="none" spc="0" normalizeH="0" baseline="0" noProof="0">
-              <a:ln>
-                <a:noFill/>
-              </a:ln>
-              <a:solidFill>
-                <a:prstClr val="white"/>
-              </a:solidFill>
-              <a:effectLst/>
-              <a:uLnTx/>
-              <a:uFillTx/>
-              <a:latin typeface="Calibri" panose="020F0502020204030204"/>
-              <a:ea typeface="+mn-ea"/>
-              <a:cs typeface="+mn-cs"/>
-            </a:endParaRPr>
           </a:p>
         </p:txBody>
       </p:sp>
     </p:spTree>
     <p:extLst>
       <p:ext uri="{BB962C8B-B14F-4D97-AF65-F5344CB8AC3E}">
-        <p14:creationId xmlns:p14="http://schemas.microsoft.com/office/powerpoint/2010/main" val="1687888858"/>
+        <p14:creationId xmlns:p14="http://schemas.microsoft.com/office/powerpoint/2010/main" val="3164163406"/>
       </p:ext>
     </p:extLst>
   </p:cSld>
@@ -3754,7 +3064,7 @@
     <p:bg>
       <p:bgPr>
         <a:solidFill>
-          <a:schemeClr val="accent1"/>
+          <a:schemeClr val="tx1"/>
         </a:solidFill>
         <a:effectLst/>
       </p:bgPr>
@@ -3797,8 +3107,8 @@
         </p:nvSpPr>
         <p:spPr>
           <a:xfrm>
-            <a:off x="682831" y="497702"/>
-            <a:ext cx="10826338" cy="5862596"/>
+            <a:off x="284480" y="193040"/>
+            <a:ext cx="8544560" cy="6390639"/>
           </a:xfrm>
         </p:spPr>
         <p:txBody>
@@ -3807,7 +3117,7 @@
           </a:bodyPr>
           <a:lstStyle/>
           <a:p>
-            <a:endParaRPr lang="en-US" sz="4400" dirty="0">
+            <a:endParaRPr lang="en-US" sz="4800" dirty="0">
               <a:solidFill>
                 <a:schemeClr val="bg1"/>
               </a:solidFill>
@@ -3817,18 +3127,30 @@
           </a:p>
           <a:p>
             <a:r>
-              <a:rPr lang="en-US" sz="4400" dirty="0">
-                <a:solidFill>
-                  <a:schemeClr val="bg1"/>
-                </a:solidFill>
-                <a:latin typeface="Avenir Medium" panose="02000503020000020003" pitchFamily="2" charset="0"/>
-                <a:ea typeface="Bodoni Ornaments" pitchFamily="2" charset="0"/>
-              </a:rPr>
-              <a:t>On that day we join the resurrection</a:t>
-            </a:r>
-          </a:p>
-          <a:p>
-            <a:endParaRPr lang="en-US" sz="4400" dirty="0">
+              <a:rPr lang="en-US" sz="4800" dirty="0">
+                <a:solidFill>
+                  <a:schemeClr val="bg1"/>
+                </a:solidFill>
+                <a:latin typeface="Avenir Medium" panose="02000503020000020003" pitchFamily="2" charset="0"/>
+                <a:ea typeface="Bodoni Ornaments" pitchFamily="2" charset="0"/>
+              </a:rPr>
+              <a:t>On that day we join </a:t>
+            </a:r>
+          </a:p>
+          <a:p>
+            <a:r>
+              <a:rPr lang="en-US" sz="4800" dirty="0">
+                <a:solidFill>
+                  <a:schemeClr val="bg1"/>
+                </a:solidFill>
+                <a:latin typeface="Avenir Medium" panose="02000503020000020003" pitchFamily="2" charset="0"/>
+                <a:ea typeface="Bodoni Ornaments" pitchFamily="2" charset="0"/>
+              </a:rPr>
+              <a:t>the resurrection</a:t>
+            </a:r>
+          </a:p>
+          <a:p>
+            <a:endParaRPr lang="en-US" sz="4800" dirty="0">
               <a:solidFill>
                 <a:schemeClr val="bg1"/>
               </a:solidFill>
@@ -3838,14 +3160,26 @@
           </a:p>
           <a:p>
             <a:r>
-              <a:rPr lang="en-US" sz="4400" dirty="0">
-                <a:solidFill>
-                  <a:schemeClr val="bg1"/>
-                </a:solidFill>
-                <a:latin typeface="Avenir Medium" panose="02000503020000020003" pitchFamily="2" charset="0"/>
-                <a:ea typeface="Bodoni Ornaments" pitchFamily="2" charset="0"/>
-              </a:rPr>
-              <a:t>And stand beside the heroes of the faith</a:t>
+              <a:rPr lang="en-US" sz="4800" dirty="0">
+                <a:solidFill>
+                  <a:schemeClr val="bg1"/>
+                </a:solidFill>
+                <a:latin typeface="Avenir Medium" panose="02000503020000020003" pitchFamily="2" charset="0"/>
+                <a:ea typeface="Bodoni Ornaments" pitchFamily="2" charset="0"/>
+              </a:rPr>
+              <a:t>And stand beside the </a:t>
+            </a:r>
+          </a:p>
+          <a:p>
+            <a:r>
+              <a:rPr lang="en-US" sz="4800" dirty="0">
+                <a:solidFill>
+                  <a:schemeClr val="bg1"/>
+                </a:solidFill>
+                <a:latin typeface="Avenir Medium" panose="02000503020000020003" pitchFamily="2" charset="0"/>
+                <a:ea typeface="Bodoni Ornaments" pitchFamily="2" charset="0"/>
+              </a:rPr>
+              <a:t>heroes of the faith</a:t>
             </a:r>
           </a:p>
         </p:txBody>
@@ -3869,7 +3203,7 @@
     <p:bg>
       <p:bgPr>
         <a:solidFill>
-          <a:schemeClr val="accent1"/>
+          <a:schemeClr val="tx1"/>
         </a:solidFill>
         <a:effectLst/>
       </p:bgPr>
@@ -3912,8 +3246,8 @@
         </p:nvSpPr>
         <p:spPr>
           <a:xfrm>
-            <a:off x="682831" y="497702"/>
-            <a:ext cx="10826338" cy="5862596"/>
+            <a:off x="243840" y="162560"/>
+            <a:ext cx="8615680" cy="6563359"/>
           </a:xfrm>
         </p:spPr>
         <p:txBody>
@@ -3922,7 +3256,7 @@
           </a:bodyPr>
           <a:lstStyle/>
           <a:p>
-            <a:endParaRPr lang="en-US" sz="4400" dirty="0">
+            <a:endParaRPr lang="en-US" sz="4800" dirty="0">
               <a:solidFill>
                 <a:schemeClr val="bg1"/>
               </a:solidFill>
@@ -3932,7 +3266,7 @@
           </a:p>
           <a:p>
             <a:r>
-              <a:rPr lang="en-US" sz="4400" dirty="0">
+              <a:rPr lang="en-US" sz="4800" dirty="0">
                 <a:solidFill>
                   <a:schemeClr val="bg1"/>
                 </a:solidFill>
@@ -3943,7 +3277,7 @@
             </a:r>
           </a:p>
           <a:p>
-            <a:endParaRPr lang="en-US" sz="4400" dirty="0">
+            <a:endParaRPr lang="en-US" sz="4800" dirty="0">
               <a:solidFill>
                 <a:schemeClr val="bg1"/>
               </a:solidFill>
@@ -3953,7 +3287,7 @@
           </a:p>
           <a:p>
             <a:r>
-              <a:rPr lang="en-US" sz="4400" dirty="0">
+              <a:rPr lang="en-US" sz="4800" dirty="0">
                 <a:solidFill>
                   <a:schemeClr val="bg1"/>
                 </a:solidFill>
@@ -3984,7 +3318,7 @@
     <p:bg>
       <p:bgPr>
         <a:solidFill>
-          <a:schemeClr val="accent1"/>
+          <a:schemeClr val="tx1"/>
         </a:solidFill>
         <a:effectLst/>
       </p:bgPr>
@@ -4027,8 +3361,8 @@
         </p:nvSpPr>
         <p:spPr>
           <a:xfrm>
-            <a:off x="682831" y="497702"/>
-            <a:ext cx="10826338" cy="5862596"/>
+            <a:off x="284480" y="243840"/>
+            <a:ext cx="8747760" cy="6410959"/>
           </a:xfrm>
         </p:spPr>
         <p:txBody>
@@ -4037,7 +3371,7 @@
           </a:bodyPr>
           <a:lstStyle/>
           <a:p>
-            <a:endParaRPr lang="en-US" sz="4400" dirty="0">
+            <a:endParaRPr lang="en-US" sz="4800" dirty="0">
               <a:solidFill>
                 <a:schemeClr val="bg1"/>
               </a:solidFill>
@@ -4047,7 +3381,7 @@
           </a:p>
           <a:p>
             <a:r>
-              <a:rPr lang="en-US" sz="4400" dirty="0">
+              <a:rPr lang="en-US" sz="4800" dirty="0">
                 <a:solidFill>
                   <a:schemeClr val="bg1"/>
                 </a:solidFill>
@@ -4058,7 +3392,7 @@
             </a:r>
           </a:p>
           <a:p>
-            <a:endParaRPr lang="en-US" sz="4400" dirty="0">
+            <a:endParaRPr lang="en-US" sz="4800" dirty="0">
               <a:solidFill>
                 <a:schemeClr val="bg1"/>
               </a:solidFill>
@@ -4068,7 +3402,7 @@
           </a:p>
           <a:p>
             <a:r>
-              <a:rPr lang="en-US" sz="4400" dirty="0">
+              <a:rPr lang="en-US" sz="4800" dirty="0">
                 <a:solidFill>
                   <a:schemeClr val="bg1"/>
                 </a:solidFill>
@@ -4099,7 +3433,7 @@
     <p:bg>
       <p:bgPr>
         <a:solidFill>
-          <a:schemeClr val="accent1"/>
+          <a:schemeClr val="tx1"/>
         </a:solidFill>
         <a:effectLst/>
       </p:bgPr>
@@ -4142,8 +3476,8 @@
         </p:nvSpPr>
         <p:spPr>
           <a:xfrm>
-            <a:off x="682831" y="497702"/>
-            <a:ext cx="10826338" cy="5862596"/>
+            <a:off x="142240" y="203200"/>
+            <a:ext cx="8829040" cy="6461759"/>
           </a:xfrm>
         </p:spPr>
         <p:txBody>
@@ -4152,7 +3486,7 @@
           </a:bodyPr>
           <a:lstStyle/>
           <a:p>
-            <a:endParaRPr lang="en-US" sz="4400" dirty="0">
+            <a:endParaRPr lang="en-US" sz="4800" dirty="0">
               <a:solidFill>
                 <a:schemeClr val="bg1"/>
               </a:solidFill>
@@ -4162,7 +3496,7 @@
           </a:p>
           <a:p>
             <a:r>
-              <a:rPr lang="en-US" sz="4400" dirty="0">
+              <a:rPr lang="en-US" sz="4800" dirty="0">
                 <a:solidFill>
                   <a:schemeClr val="bg1"/>
                 </a:solidFill>
@@ -4173,7 +3507,7 @@
             </a:r>
           </a:p>
           <a:p>
-            <a:endParaRPr lang="en-US" sz="4400" dirty="0">
+            <a:endParaRPr lang="en-US" sz="4800" dirty="0">
               <a:solidFill>
                 <a:schemeClr val="bg1"/>
               </a:solidFill>
@@ -4183,18 +3517,30 @@
           </a:p>
           <a:p>
             <a:r>
-              <a:rPr lang="en-US" sz="4400" dirty="0">
-                <a:solidFill>
-                  <a:schemeClr val="bg1"/>
-                </a:solidFill>
-                <a:latin typeface="Avenir Medium" panose="02000503020000020003" pitchFamily="2" charset="0"/>
-                <a:ea typeface="Bodoni Ornaments" pitchFamily="2" charset="0"/>
-              </a:rPr>
-              <a:t>Sing worthy is the Lamb who was slain</a:t>
-            </a:r>
-          </a:p>
-          <a:p>
-            <a:endParaRPr lang="en-US" sz="4400" dirty="0">
+              <a:rPr lang="en-US" sz="4800" dirty="0">
+                <a:solidFill>
+                  <a:schemeClr val="bg1"/>
+                </a:solidFill>
+                <a:latin typeface="Avenir Medium" panose="02000503020000020003" pitchFamily="2" charset="0"/>
+                <a:ea typeface="Bodoni Ornaments" pitchFamily="2" charset="0"/>
+              </a:rPr>
+              <a:t>Sing worthy is the Lamb </a:t>
+            </a:r>
+          </a:p>
+          <a:p>
+            <a:r>
+              <a:rPr lang="en-US" sz="4800" dirty="0">
+                <a:solidFill>
+                  <a:schemeClr val="bg1"/>
+                </a:solidFill>
+                <a:latin typeface="Avenir Medium" panose="02000503020000020003" pitchFamily="2" charset="0"/>
+                <a:ea typeface="Bodoni Ornaments" pitchFamily="2" charset="0"/>
+              </a:rPr>
+              <a:t>who was slain</a:t>
+            </a:r>
+          </a:p>
+          <a:p>
+            <a:endParaRPr lang="en-US" sz="4800" dirty="0">
               <a:solidFill>
                 <a:schemeClr val="bg1"/>
               </a:solidFill>
@@ -4204,7 +3550,7 @@
           </a:p>
           <a:p>
             <a:r>
-              <a:rPr lang="en-US" sz="4400" dirty="0">
+              <a:rPr lang="en-US" sz="4800" dirty="0">
                 <a:solidFill>
                   <a:schemeClr val="bg1"/>
                 </a:solidFill>
@@ -4235,7 +3581,7 @@
     <p:bg>
       <p:bgPr>
         <a:solidFill>
-          <a:srgbClr val="7030A0"/>
+          <a:schemeClr val="tx1"/>
         </a:solidFill>
         <a:effectLst/>
       </p:bgPr>
@@ -4245,7 +3591,7 @@
         <p:cNvPr id="1" name="">
           <a:extLst>
             <a:ext uri="{FF2B5EF4-FFF2-40B4-BE49-F238E27FC236}">
-              <a16:creationId xmlns:a16="http://schemas.microsoft.com/office/drawing/2014/main" id="{C34E7897-A55E-6262-6393-541243C3FE7F}"/>
+              <a16:creationId xmlns:a16="http://schemas.microsoft.com/office/drawing/2014/main" id="{B9FF69CC-0C93-3052-CE6A-CAFB3F4677DB}"/>
             </a:ext>
           </a:extLst>
         </p:cNvPr>
@@ -4265,7 +3611,7 @@
           <p:cNvPr id="3" name="Subtitle 2">
             <a:extLst>
               <a:ext uri="{FF2B5EF4-FFF2-40B4-BE49-F238E27FC236}">
-                <a16:creationId xmlns:a16="http://schemas.microsoft.com/office/drawing/2014/main" id="{6AC9CC9F-D7E2-6F47-C910-4E3E025A2729}"/>
+                <a16:creationId xmlns:a16="http://schemas.microsoft.com/office/drawing/2014/main" id="{67C2747E-9CDD-2FD1-BDCE-B086B78C5CE5}"/>
               </a:ext>
             </a:extLst>
           </p:cNvPr>
@@ -4278,8 +3624,8 @@
         </p:nvSpPr>
         <p:spPr>
           <a:xfrm>
-            <a:off x="682831" y="497702"/>
-            <a:ext cx="10826338" cy="5862596"/>
+            <a:off x="172720" y="142240"/>
+            <a:ext cx="8768080" cy="6563359"/>
           </a:xfrm>
         </p:spPr>
         <p:txBody>
@@ -4288,19 +3634,7 @@
           </a:bodyPr>
           <a:lstStyle/>
           <a:p>
-            <a:r>
-              <a:rPr lang="en-US" sz="4400" dirty="0">
-                <a:solidFill>
-                  <a:schemeClr val="bg1"/>
-                </a:solidFill>
-                <a:latin typeface="Avenir Medium" panose="02000503020000020003" pitchFamily="2" charset="0"/>
-                <a:ea typeface="Bodoni Ornaments" pitchFamily="2" charset="0"/>
-              </a:rPr>
-              <a:t>So let it be today </a:t>
-            </a:r>
-          </a:p>
-          <a:p>
-            <a:endParaRPr lang="en-US" sz="4400" dirty="0">
+            <a:endParaRPr lang="en-US" sz="4800" dirty="0">
               <a:solidFill>
                 <a:schemeClr val="bg1"/>
               </a:solidFill>
@@ -4309,19 +3643,7 @@
             </a:endParaRPr>
           </a:p>
           <a:p>
-            <a:r>
-              <a:rPr lang="en-US" sz="4400" dirty="0">
-                <a:solidFill>
-                  <a:schemeClr val="bg1"/>
-                </a:solidFill>
-                <a:latin typeface="Avenir Medium" panose="02000503020000020003" pitchFamily="2" charset="0"/>
-                <a:ea typeface="Bodoni Ornaments" pitchFamily="2" charset="0"/>
-              </a:rPr>
-              <a:t>We shout the hymn of Heaven</a:t>
-            </a:r>
-          </a:p>
-          <a:p>
-            <a:endParaRPr lang="en-US" sz="4400" dirty="0">
+            <a:endParaRPr lang="en-US" sz="4800" dirty="0">
               <a:solidFill>
                 <a:schemeClr val="bg1"/>
               </a:solidFill>
@@ -4331,35 +3653,50 @@
           </a:p>
           <a:p>
             <a:r>
-              <a:rPr lang="en-US" sz="4400" dirty="0">
-                <a:solidFill>
-                  <a:schemeClr val="bg1"/>
-                </a:solidFill>
-                <a:latin typeface="Avenir Medium" panose="02000503020000020003" pitchFamily="2" charset="0"/>
-                <a:ea typeface="Bodoni Ornaments" pitchFamily="2" charset="0"/>
-              </a:rPr>
-              <a:t>With angels and the Saints </a:t>
-            </a:r>
-          </a:p>
-          <a:p>
-            <a:endParaRPr lang="en-US" sz="4400" dirty="0">
-              <a:solidFill>
-                <a:schemeClr val="bg1"/>
-              </a:solidFill>
-              <a:latin typeface="Avenir Medium" panose="02000503020000020003" pitchFamily="2" charset="0"/>
-              <a:ea typeface="Bodoni Ornaments" pitchFamily="2" charset="0"/>
-            </a:endParaRPr>
-          </a:p>
-          <a:p>
-            <a:r>
-              <a:rPr lang="en-US" sz="4400" dirty="0">
-                <a:solidFill>
-                  <a:schemeClr val="bg1"/>
-                </a:solidFill>
-                <a:latin typeface="Avenir Medium" panose="02000503020000020003" pitchFamily="2" charset="0"/>
-                <a:ea typeface="Bodoni Ornaments" pitchFamily="2" charset="0"/>
-              </a:rPr>
-              <a:t>We raise a mighty roar</a:t>
+              <a:rPr lang="en-US" sz="4800" dirty="0">
+                <a:solidFill>
+                  <a:schemeClr val="bg1"/>
+                </a:solidFill>
+                <a:latin typeface="Avenir Medium" panose="02000503020000020003" pitchFamily="2" charset="0"/>
+                <a:ea typeface="Bodoni Ornaments" pitchFamily="2" charset="0"/>
+              </a:rPr>
+              <a:t>There will be a day</a:t>
+            </a:r>
+          </a:p>
+          <a:p>
+            <a:r>
+              <a:rPr lang="en-US" sz="4800" dirty="0">
+                <a:solidFill>
+                  <a:schemeClr val="bg1"/>
+                </a:solidFill>
+                <a:latin typeface="Avenir Medium" panose="02000503020000020003" pitchFamily="2" charset="0"/>
+                <a:ea typeface="Bodoni Ornaments" pitchFamily="2" charset="0"/>
+              </a:rPr>
+              <a:t>When all will bow before Him</a:t>
+            </a:r>
+          </a:p>
+          <a:p>
+            <a:r>
+              <a:rPr lang="en-US" sz="4800" dirty="0">
+                <a:solidFill>
+                  <a:schemeClr val="bg1"/>
+                </a:solidFill>
+                <a:latin typeface="Avenir Medium" panose="02000503020000020003" pitchFamily="2" charset="0"/>
+                <a:ea typeface="Bodoni Ornaments" pitchFamily="2" charset="0"/>
+              </a:rPr>
+              <a:t>There will be a day</a:t>
+            </a:r>
+          </a:p>
+          <a:p>
+            <a:r>
+              <a:rPr lang="en-US" sz="4800" dirty="0">
+                <a:solidFill>
+                  <a:schemeClr val="bg1"/>
+                </a:solidFill>
+                <a:latin typeface="Avenir Medium" panose="02000503020000020003" pitchFamily="2" charset="0"/>
+                <a:ea typeface="Bodoni Ornaments" pitchFamily="2" charset="0"/>
+              </a:rPr>
+              <a:t>When death will be no more</a:t>
             </a:r>
           </a:p>
         </p:txBody>
@@ -4367,7 +3704,7 @@
     </p:spTree>
     <p:extLst>
       <p:ext uri="{BB962C8B-B14F-4D97-AF65-F5344CB8AC3E}">
-        <p14:creationId xmlns:p14="http://schemas.microsoft.com/office/powerpoint/2010/main" val="2973635874"/>
+        <p14:creationId xmlns:p14="http://schemas.microsoft.com/office/powerpoint/2010/main" val="2824683841"/>
       </p:ext>
     </p:extLst>
   </p:cSld>
@@ -4383,7 +3720,7 @@
     <p:bg>
       <p:bgPr>
         <a:solidFill>
-          <a:srgbClr val="7030A0"/>
+          <a:schemeClr val="tx1"/>
         </a:solidFill>
         <a:effectLst/>
       </p:bgPr>
@@ -4393,7 +3730,7 @@
         <p:cNvPr id="1" name="">
           <a:extLst>
             <a:ext uri="{FF2B5EF4-FFF2-40B4-BE49-F238E27FC236}">
-              <a16:creationId xmlns:a16="http://schemas.microsoft.com/office/drawing/2014/main" id="{A94FE043-DEC0-14F3-65D7-04C48F82D72A}"/>
+              <a16:creationId xmlns:a16="http://schemas.microsoft.com/office/drawing/2014/main" id="{65D6E194-AD94-46C1-E861-E5E9EEF93A36}"/>
             </a:ext>
           </a:extLst>
         </p:cNvPr>
@@ -4413,7 +3750,7 @@
           <p:cNvPr id="3" name="Subtitle 2">
             <a:extLst>
               <a:ext uri="{FF2B5EF4-FFF2-40B4-BE49-F238E27FC236}">
-                <a16:creationId xmlns:a16="http://schemas.microsoft.com/office/drawing/2014/main" id="{8CA1C6E0-216C-E27F-BBFB-EE511AD6B69C}"/>
+                <a16:creationId xmlns:a16="http://schemas.microsoft.com/office/drawing/2014/main" id="{7473A48B-872A-226B-A812-9544446C1649}"/>
               </a:ext>
             </a:extLst>
           </p:cNvPr>
@@ -4426,8 +3763,8 @@
         </p:nvSpPr>
         <p:spPr>
           <a:xfrm>
-            <a:off x="682831" y="497702"/>
-            <a:ext cx="10826338" cy="5862596"/>
+            <a:off x="274320" y="142240"/>
+            <a:ext cx="8585200" cy="6522719"/>
           </a:xfrm>
         </p:spPr>
         <p:txBody>
@@ -4436,19 +3773,7 @@
           </a:bodyPr>
           <a:lstStyle/>
           <a:p>
-            <a:r>
-              <a:rPr lang="en-US" sz="4400" dirty="0">
-                <a:solidFill>
-                  <a:schemeClr val="bg1"/>
-                </a:solidFill>
-                <a:latin typeface="Avenir Medium" panose="02000503020000020003" pitchFamily="2" charset="0"/>
-                <a:ea typeface="Bodoni Ornaments" pitchFamily="2" charset="0"/>
-              </a:rPr>
-              <a:t>Glory to our God </a:t>
-            </a:r>
-          </a:p>
-          <a:p>
-            <a:endParaRPr lang="en-US" sz="4400" dirty="0">
+            <a:endParaRPr lang="en-US" sz="4800" dirty="0">
               <a:solidFill>
                 <a:schemeClr val="bg1"/>
               </a:solidFill>
@@ -4457,19 +3782,7 @@
             </a:endParaRPr>
           </a:p>
           <a:p>
-            <a:r>
-              <a:rPr lang="en-US" sz="4400" dirty="0">
-                <a:solidFill>
-                  <a:schemeClr val="bg1"/>
-                </a:solidFill>
-                <a:latin typeface="Avenir Medium" panose="02000503020000020003" pitchFamily="2" charset="0"/>
-                <a:ea typeface="Bodoni Ornaments" pitchFamily="2" charset="0"/>
-              </a:rPr>
-              <a:t>Who gave us life beyond the grave</a:t>
-            </a:r>
-          </a:p>
-          <a:p>
-            <a:endParaRPr lang="en-US" sz="4400" dirty="0">
+            <a:endParaRPr lang="en-US" sz="4800" dirty="0">
               <a:solidFill>
                 <a:schemeClr val="bg1"/>
               </a:solidFill>
@@ -4479,7 +3792,43 @@
           </a:p>
           <a:p>
             <a:r>
-              <a:rPr lang="en-US" sz="4400" dirty="0">
+              <a:rPr lang="en-US" sz="4800" dirty="0">
+                <a:solidFill>
+                  <a:schemeClr val="bg1"/>
+                </a:solidFill>
+                <a:latin typeface="Avenir Medium" panose="02000503020000020003" pitchFamily="2" charset="0"/>
+                <a:ea typeface="Bodoni Ornaments" pitchFamily="2" charset="0"/>
+              </a:rPr>
+              <a:t>Standing face to face</a:t>
+            </a:r>
+          </a:p>
+          <a:p>
+            <a:r>
+              <a:rPr lang="en-US" sz="4800" dirty="0">
+                <a:solidFill>
+                  <a:schemeClr val="bg1"/>
+                </a:solidFill>
+                <a:latin typeface="Avenir Medium" panose="02000503020000020003" pitchFamily="2" charset="0"/>
+                <a:ea typeface="Bodoni Ornaments" pitchFamily="2" charset="0"/>
+              </a:rPr>
+              <a:t>With He who died </a:t>
+            </a:r>
+          </a:p>
+          <a:p>
+            <a:r>
+              <a:rPr lang="en-US" sz="4800" dirty="0">
+                <a:solidFill>
+                  <a:schemeClr val="bg1"/>
+                </a:solidFill>
+                <a:latin typeface="Avenir Medium" panose="02000503020000020003" pitchFamily="2" charset="0"/>
+                <a:ea typeface="Bodoni Ornaments" pitchFamily="2" charset="0"/>
+              </a:rPr>
+              <a:t>and rose again</a:t>
+            </a:r>
+          </a:p>
+          <a:p>
+            <a:r>
+              <a:rPr lang="en-US" sz="4800" dirty="0">
                 <a:solidFill>
                   <a:schemeClr val="bg1"/>
                 </a:solidFill>
@@ -4494,7 +3843,7 @@
     </p:spTree>
     <p:extLst>
       <p:ext uri="{BB962C8B-B14F-4D97-AF65-F5344CB8AC3E}">
-        <p14:creationId xmlns:p14="http://schemas.microsoft.com/office/powerpoint/2010/main" val="3047265071"/>
+        <p14:creationId xmlns:p14="http://schemas.microsoft.com/office/powerpoint/2010/main" val="2905995500"/>
       </p:ext>
     </p:extLst>
   </p:cSld>
@@ -4510,7 +3859,7 @@
     <p:bg>
       <p:bgPr>
         <a:solidFill>
-          <a:srgbClr val="7030A0"/>
+          <a:schemeClr val="tx1"/>
         </a:solidFill>
         <a:effectLst/>
       </p:bgPr>
@@ -4553,8 +3902,8 @@
         </p:nvSpPr>
         <p:spPr>
           <a:xfrm>
-            <a:off x="682831" y="497702"/>
-            <a:ext cx="10826338" cy="5862596"/>
+            <a:off x="264160" y="203200"/>
+            <a:ext cx="8656320" cy="6461759"/>
           </a:xfrm>
         </p:spPr>
         <p:txBody>
@@ -4563,19 +3912,7 @@
           </a:bodyPr>
           <a:lstStyle/>
           <a:p>
-            <a:r>
-              <a:rPr lang="en-US" sz="4400" dirty="0">
-                <a:solidFill>
-                  <a:schemeClr val="bg1"/>
-                </a:solidFill>
-                <a:latin typeface="Avenir Medium" panose="02000503020000020003" pitchFamily="2" charset="0"/>
-                <a:ea typeface="Bodoni Ornaments" pitchFamily="2" charset="0"/>
-              </a:rPr>
-              <a:t>So let it be today </a:t>
-            </a:r>
-          </a:p>
-          <a:p>
-            <a:endParaRPr lang="en-US" sz="4400" dirty="0">
+            <a:endParaRPr lang="en-US" sz="4800" dirty="0">
               <a:solidFill>
                 <a:schemeClr val="bg1"/>
               </a:solidFill>
@@ -4585,7 +3922,19 @@
           </a:p>
           <a:p>
             <a:r>
-              <a:rPr lang="en-US" sz="4400" dirty="0">
+              <a:rPr lang="en-US" sz="4800" dirty="0">
+                <a:solidFill>
+                  <a:schemeClr val="bg1"/>
+                </a:solidFill>
+                <a:latin typeface="Avenir Medium" panose="02000503020000020003" pitchFamily="2" charset="0"/>
+                <a:ea typeface="Bodoni Ornaments" pitchFamily="2" charset="0"/>
+              </a:rPr>
+              <a:t>So let it be today </a:t>
+            </a:r>
+          </a:p>
+          <a:p>
+            <a:r>
+              <a:rPr lang="en-US" sz="4800" dirty="0">
                 <a:solidFill>
                   <a:schemeClr val="bg1"/>
                 </a:solidFill>
@@ -4596,7 +3945,7 @@
             </a:r>
           </a:p>
           <a:p>
-            <a:endParaRPr lang="en-US" sz="4400" dirty="0">
+            <a:endParaRPr lang="en-US" sz="4800" dirty="0">
               <a:solidFill>
                 <a:schemeClr val="bg1"/>
               </a:solidFill>
@@ -4606,7 +3955,7 @@
           </a:p>
           <a:p>
             <a:r>
-              <a:rPr lang="en-US" sz="4400" dirty="0">
+              <a:rPr lang="en-US" sz="4800" dirty="0">
                 <a:solidFill>
                   <a:schemeClr val="bg1"/>
                 </a:solidFill>
@@ -4617,17 +3966,8 @@
             </a:r>
           </a:p>
           <a:p>
-            <a:endParaRPr lang="en-US" sz="4400" dirty="0">
-              <a:solidFill>
-                <a:schemeClr val="bg1"/>
-              </a:solidFill>
-              <a:latin typeface="Avenir Medium" panose="02000503020000020003" pitchFamily="2" charset="0"/>
-              <a:ea typeface="Bodoni Ornaments" pitchFamily="2" charset="0"/>
-            </a:endParaRPr>
-          </a:p>
-          <a:p>
-            <a:r>
-              <a:rPr lang="en-US" sz="4400" dirty="0">
+            <a:r>
+              <a:rPr lang="en-US" sz="4800" dirty="0">
                 <a:solidFill>
                   <a:schemeClr val="bg1"/>
                 </a:solidFill>
@@ -4658,7 +3998,7 @@
     <p:bg>
       <p:bgPr>
         <a:solidFill>
-          <a:srgbClr val="7030A0"/>
+          <a:schemeClr val="tx1"/>
         </a:solidFill>
         <a:effectLst/>
       </p:bgPr>
@@ -4701,8 +4041,8 @@
         </p:nvSpPr>
         <p:spPr>
           <a:xfrm>
-            <a:off x="682831" y="497702"/>
-            <a:ext cx="10826338" cy="5862596"/>
+            <a:off x="274320" y="172720"/>
+            <a:ext cx="8646160" cy="6492239"/>
           </a:xfrm>
         </p:spPr>
         <p:txBody>
@@ -4711,19 +4051,7 @@
           </a:bodyPr>
           <a:lstStyle/>
           <a:p>
-            <a:r>
-              <a:rPr lang="en-US" sz="4400" dirty="0">
-                <a:solidFill>
-                  <a:schemeClr val="bg1"/>
-                </a:solidFill>
-                <a:latin typeface="Avenir Medium" panose="02000503020000020003" pitchFamily="2" charset="0"/>
-                <a:ea typeface="Bodoni Ornaments" pitchFamily="2" charset="0"/>
-              </a:rPr>
-              <a:t>Glory to our God </a:t>
-            </a:r>
-          </a:p>
-          <a:p>
-            <a:endParaRPr lang="en-US" sz="4400" dirty="0">
+            <a:endParaRPr lang="en-US" sz="4800" dirty="0">
               <a:solidFill>
                 <a:schemeClr val="bg1"/>
               </a:solidFill>
@@ -4733,7 +4061,19 @@
           </a:p>
           <a:p>
             <a:r>
-              <a:rPr lang="en-US" sz="4400" dirty="0">
+              <a:rPr lang="en-US" sz="4800" dirty="0">
+                <a:solidFill>
+                  <a:schemeClr val="bg1"/>
+                </a:solidFill>
+                <a:latin typeface="Avenir Medium" panose="02000503020000020003" pitchFamily="2" charset="0"/>
+                <a:ea typeface="Bodoni Ornaments" pitchFamily="2" charset="0"/>
+              </a:rPr>
+              <a:t>Glory to our God </a:t>
+            </a:r>
+          </a:p>
+          <a:p>
+            <a:r>
+              <a:rPr lang="en-US" sz="4800" dirty="0">
                 <a:solidFill>
                   <a:schemeClr val="bg1"/>
                 </a:solidFill>
@@ -4744,7 +4084,7 @@
             </a:r>
           </a:p>
           <a:p>
-            <a:endParaRPr lang="en-US" sz="4400" dirty="0">
+            <a:endParaRPr lang="en-US" sz="4800" dirty="0">
               <a:solidFill>
                 <a:schemeClr val="bg1"/>
               </a:solidFill>
@@ -4754,7 +4094,7 @@
           </a:p>
           <a:p>
             <a:r>
-              <a:rPr lang="en-US" sz="4400" dirty="0">
+              <a:rPr lang="en-US" sz="4800" dirty="0">
                 <a:solidFill>
                   <a:schemeClr val="bg1"/>
                 </a:solidFill>
@@ -4766,7 +4106,7 @@
           </a:p>
           <a:p>
             <a:r>
-              <a:rPr lang="en-US" sz="4400" dirty="0">
+              <a:rPr lang="en-US" sz="4800" dirty="0">
                 <a:solidFill>
                   <a:schemeClr val="bg1"/>
                 </a:solidFill>
@@ -4778,7 +4118,7 @@
           </a:p>
           <a:p>
             <a:r>
-              <a:rPr lang="en-US" sz="4400" dirty="0">
+              <a:rPr lang="en-US" sz="4800" dirty="0">
                 <a:solidFill>
                   <a:schemeClr val="bg1"/>
                 </a:solidFill>
@@ -4789,13 +4129,52 @@
             </a:r>
           </a:p>
           <a:p>
-            <a:endParaRPr lang="en-US" sz="4400" dirty="0">
+            <a:endParaRPr lang="en-US" sz="4800" dirty="0">
               <a:solidFill>
                 <a:schemeClr val="bg1"/>
               </a:solidFill>
               <a:latin typeface="Avenir Medium" panose="02000503020000020003" pitchFamily="2" charset="0"/>
               <a:ea typeface="Bodoni Ornaments" pitchFamily="2" charset="0"/>
             </a:endParaRPr>
+          </a:p>
+        </p:txBody>
+      </p:sp>
+      <p:sp>
+        <p:nvSpPr>
+          <p:cNvPr id="2" name="TextBox 1">
+            <a:extLst>
+              <a:ext uri="{FF2B5EF4-FFF2-40B4-BE49-F238E27FC236}">
+                <a16:creationId xmlns:a16="http://schemas.microsoft.com/office/drawing/2014/main" id="{4A542984-8A82-8EB9-B5FB-7EE30F75B460}"/>
+              </a:ext>
+            </a:extLst>
+          </p:cNvPr>
+          <p:cNvSpPr txBox="1"/>
+          <p:nvPr/>
+        </p:nvSpPr>
+        <p:spPr>
+          <a:xfrm>
+            <a:off x="7390614" y="6488668"/>
+            <a:ext cx="1753386" cy="369332"/>
+          </a:xfrm>
+          <a:prstGeom prst="rect">
+            <a:avLst/>
+          </a:prstGeom>
+          <a:noFill/>
+        </p:spPr>
+        <p:txBody>
+          <a:bodyPr wrap="square" rtlCol="0">
+            <a:spAutoFit/>
+          </a:bodyPr>
+          <a:lstStyle/>
+          <a:p>
+            <a:r>
+              <a:rPr lang="en-US" dirty="0">
+                <a:solidFill>
+                  <a:schemeClr val="bg1"/>
+                </a:solidFill>
+              </a:rPr>
+              <a:t>CCLI#7102397</a:t>
+            </a:r>
           </a:p>
         </p:txBody>
       </p:sp>
@@ -4818,7 +4197,7 @@
     <p:bg>
       <p:bgPr>
         <a:solidFill>
-          <a:schemeClr val="accent1"/>
+          <a:schemeClr val="tx1"/>
         </a:solidFill>
         <a:effectLst/>
       </p:bgPr>
@@ -4828,7 +4207,7 @@
         <p:cNvPr id="1" name="">
           <a:extLst>
             <a:ext uri="{FF2B5EF4-FFF2-40B4-BE49-F238E27FC236}">
-              <a16:creationId xmlns:a16="http://schemas.microsoft.com/office/drawing/2014/main" id="{0C7F1709-70D9-7011-5D92-F7E57F5604D0}"/>
+              <a16:creationId xmlns:a16="http://schemas.microsoft.com/office/drawing/2014/main" id="{CA61A9DA-8873-09B6-E0EE-8AF5B3AE4122}"/>
             </a:ext>
           </a:extLst>
         </p:cNvPr>
@@ -4848,7 +4227,7 @@
           <p:cNvPr id="3" name="Subtitle 2">
             <a:extLst>
               <a:ext uri="{FF2B5EF4-FFF2-40B4-BE49-F238E27FC236}">
-                <a16:creationId xmlns:a16="http://schemas.microsoft.com/office/drawing/2014/main" id="{C25DBF04-8174-1226-1E95-AC7FB0F1B0E0}"/>
+                <a16:creationId xmlns:a16="http://schemas.microsoft.com/office/drawing/2014/main" id="{BB576AEE-30FA-3456-2CB1-2FFDB43E0BF1}"/>
               </a:ext>
             </a:extLst>
           </p:cNvPr>
@@ -4861,8 +4240,8 @@
         </p:nvSpPr>
         <p:spPr>
           <a:xfrm>
-            <a:off x="682831" y="497702"/>
-            <a:ext cx="10826338" cy="5862596"/>
+            <a:off x="193040" y="91440"/>
+            <a:ext cx="8707120" cy="6614159"/>
           </a:xfrm>
         </p:spPr>
         <p:txBody>
@@ -4871,7 +4250,7 @@
           </a:bodyPr>
           <a:lstStyle/>
           <a:p>
-            <a:endParaRPr lang="en-US" sz="4400" dirty="0">
+            <a:endParaRPr lang="en-US" sz="4800" dirty="0">
               <a:solidFill>
                 <a:schemeClr val="bg1"/>
               </a:solidFill>
@@ -4881,28 +4260,31 @@
           </a:p>
           <a:p>
             <a:r>
-              <a:rPr lang="en-US" sz="4400" dirty="0">
-                <a:solidFill>
-                  <a:schemeClr val="bg1"/>
-                </a:solidFill>
-                <a:latin typeface="Avenir Medium" panose="02000503020000020003" pitchFamily="2" charset="0"/>
-                <a:ea typeface="Bodoni Ornaments" pitchFamily="2" charset="0"/>
-              </a:rPr>
-              <a:t>How I long to breathe the air of Heaven</a:t>
-            </a:r>
-          </a:p>
-          <a:p>
-            <a:endParaRPr lang="en-US" sz="4400" dirty="0">
-              <a:solidFill>
-                <a:schemeClr val="bg1"/>
-              </a:solidFill>
-              <a:latin typeface="Avenir Medium" panose="02000503020000020003" pitchFamily="2" charset="0"/>
-              <a:ea typeface="Bodoni Ornaments" pitchFamily="2" charset="0"/>
-            </a:endParaRPr>
-          </a:p>
-          <a:p>
-            <a:r>
-              <a:rPr lang="en-US" sz="4400" dirty="0">
+              <a:rPr lang="en-US" sz="4800" dirty="0">
+                <a:solidFill>
+                  <a:schemeClr val="bg1"/>
+                </a:solidFill>
+                <a:latin typeface="Avenir Medium" panose="02000503020000020003" pitchFamily="2" charset="0"/>
+                <a:ea typeface="Bodoni Ornaments" pitchFamily="2" charset="0"/>
+              </a:rPr>
+              <a:t>How I long to breathe </a:t>
+            </a:r>
+          </a:p>
+          <a:p>
+            <a:r>
+              <a:rPr lang="en-US" sz="4800" dirty="0">
+                <a:solidFill>
+                  <a:schemeClr val="bg1"/>
+                </a:solidFill>
+                <a:latin typeface="Avenir Medium" panose="02000503020000020003" pitchFamily="2" charset="0"/>
+                <a:ea typeface="Bodoni Ornaments" pitchFamily="2" charset="0"/>
+              </a:rPr>
+              <a:t>the air of Heaven</a:t>
+            </a:r>
+          </a:p>
+          <a:p>
+            <a:r>
+              <a:rPr lang="en-US" sz="4800" dirty="0">
                 <a:solidFill>
                   <a:schemeClr val="bg1"/>
                 </a:solidFill>
@@ -4913,17 +4295,8 @@
             </a:r>
           </a:p>
           <a:p>
-            <a:endParaRPr lang="en-US" sz="4400" dirty="0">
-              <a:solidFill>
-                <a:schemeClr val="bg1"/>
-              </a:solidFill>
-              <a:latin typeface="Avenir Medium" panose="02000503020000020003" pitchFamily="2" charset="0"/>
-              <a:ea typeface="Bodoni Ornaments" pitchFamily="2" charset="0"/>
-            </a:endParaRPr>
-          </a:p>
-          <a:p>
-            <a:r>
-              <a:rPr lang="en-US" sz="4400" dirty="0">
+            <a:r>
+              <a:rPr lang="en-US" sz="4800" dirty="0">
                 <a:solidFill>
                   <a:schemeClr val="bg1"/>
                 </a:solidFill>
@@ -4938,7 +4311,7 @@
     </p:spTree>
     <p:extLst>
       <p:ext uri="{BB962C8B-B14F-4D97-AF65-F5344CB8AC3E}">
-        <p14:creationId xmlns:p14="http://schemas.microsoft.com/office/powerpoint/2010/main" val="3164163406"/>
+        <p14:creationId xmlns:p14="http://schemas.microsoft.com/office/powerpoint/2010/main" val="2366943533"/>
       </p:ext>
     </p:extLst>
   </p:cSld>
@@ -4954,7 +4327,7 @@
     <p:bg>
       <p:bgPr>
         <a:solidFill>
-          <a:schemeClr val="accent1"/>
+          <a:schemeClr val="tx1"/>
         </a:solidFill>
         <a:effectLst/>
       </p:bgPr>
@@ -4997,8 +4370,8 @@
         </p:nvSpPr>
         <p:spPr>
           <a:xfrm>
-            <a:off x="682831" y="497702"/>
-            <a:ext cx="10826338" cy="5862596"/>
+            <a:off x="172720" y="101600"/>
+            <a:ext cx="8808720" cy="6634479"/>
           </a:xfrm>
         </p:spPr>
         <p:txBody>
@@ -5007,7 +4380,7 @@
           </a:bodyPr>
           <a:lstStyle/>
           <a:p>
-            <a:endParaRPr lang="en-US" sz="4400" dirty="0">
+            <a:endParaRPr lang="en-US" sz="4800" dirty="0">
               <a:solidFill>
                 <a:schemeClr val="bg1"/>
               </a:solidFill>
@@ -5016,7 +4389,7 @@
             </a:endParaRPr>
           </a:p>
           <a:p>
-            <a:endParaRPr lang="en-US" sz="4400" dirty="0">
+            <a:endParaRPr lang="en-US" sz="4800" dirty="0">
               <a:solidFill>
                 <a:schemeClr val="bg1"/>
               </a:solidFill>
@@ -5026,18 +4399,30 @@
           </a:p>
           <a:p>
             <a:r>
-              <a:rPr lang="en-US" sz="4400" dirty="0">
-                <a:solidFill>
-                  <a:schemeClr val="bg1"/>
-                </a:solidFill>
-                <a:latin typeface="Avenir Medium" panose="02000503020000020003" pitchFamily="2" charset="0"/>
-                <a:ea typeface="Bodoni Ornaments" pitchFamily="2" charset="0"/>
-              </a:rPr>
-              <a:t>To look upon the one who bled to save me</a:t>
-            </a:r>
-          </a:p>
-          <a:p>
-            <a:endParaRPr lang="en-US" sz="4400" dirty="0">
+              <a:rPr lang="en-US" sz="4800" dirty="0">
+                <a:solidFill>
+                  <a:schemeClr val="bg1"/>
+                </a:solidFill>
+                <a:latin typeface="Avenir Medium" panose="02000503020000020003" pitchFamily="2" charset="0"/>
+                <a:ea typeface="Bodoni Ornaments" pitchFamily="2" charset="0"/>
+              </a:rPr>
+              <a:t>To look upon the </a:t>
+            </a:r>
+          </a:p>
+          <a:p>
+            <a:r>
+              <a:rPr lang="en-US" sz="4800" dirty="0">
+                <a:solidFill>
+                  <a:schemeClr val="bg1"/>
+                </a:solidFill>
+                <a:latin typeface="Avenir Medium" panose="02000503020000020003" pitchFamily="2" charset="0"/>
+                <a:ea typeface="Bodoni Ornaments" pitchFamily="2" charset="0"/>
+              </a:rPr>
+              <a:t>one who bled to save me</a:t>
+            </a:r>
+          </a:p>
+          <a:p>
+            <a:endParaRPr lang="en-US" sz="4800" dirty="0">
               <a:solidFill>
                 <a:schemeClr val="bg1"/>
               </a:solidFill>
@@ -5047,7 +4432,7 @@
           </a:p>
           <a:p>
             <a:r>
-              <a:rPr lang="en-US" sz="4400" dirty="0">
+              <a:rPr lang="en-US" sz="4800" dirty="0">
                 <a:solidFill>
                   <a:schemeClr val="bg1"/>
                 </a:solidFill>
@@ -5078,7 +4463,7 @@
     <p:bg>
       <p:bgPr>
         <a:solidFill>
-          <a:srgbClr val="7030A0"/>
+          <a:schemeClr val="tx1"/>
         </a:solidFill>
         <a:effectLst/>
       </p:bgPr>
@@ -5121,8 +4506,8 @@
         </p:nvSpPr>
         <p:spPr>
           <a:xfrm>
-            <a:off x="682831" y="497702"/>
-            <a:ext cx="10826338" cy="5862596"/>
+            <a:off x="172720" y="142240"/>
+            <a:ext cx="8768080" cy="6563359"/>
           </a:xfrm>
         </p:spPr>
         <p:txBody>
@@ -5131,19 +4516,7 @@
           </a:bodyPr>
           <a:lstStyle/>
           <a:p>
-            <a:r>
-              <a:rPr lang="en-US" sz="4400" dirty="0">
-                <a:solidFill>
-                  <a:schemeClr val="bg1"/>
-                </a:solidFill>
-                <a:latin typeface="Avenir Medium" panose="02000503020000020003" pitchFamily="2" charset="0"/>
-                <a:ea typeface="Bodoni Ornaments" pitchFamily="2" charset="0"/>
-              </a:rPr>
-              <a:t>There will be a day</a:t>
-            </a:r>
-          </a:p>
-          <a:p>
-            <a:endParaRPr lang="en-US" sz="4400" dirty="0">
+            <a:endParaRPr lang="en-US" sz="4800" dirty="0">
               <a:solidFill>
                 <a:schemeClr val="bg1"/>
               </a:solidFill>
@@ -5152,19 +4525,7 @@
             </a:endParaRPr>
           </a:p>
           <a:p>
-            <a:r>
-              <a:rPr lang="en-US" sz="4400" dirty="0">
-                <a:solidFill>
-                  <a:schemeClr val="bg1"/>
-                </a:solidFill>
-                <a:latin typeface="Avenir Medium" panose="02000503020000020003" pitchFamily="2" charset="0"/>
-                <a:ea typeface="Bodoni Ornaments" pitchFamily="2" charset="0"/>
-              </a:rPr>
-              <a:t>When all will bow before Him</a:t>
-            </a:r>
-          </a:p>
-          <a:p>
-            <a:endParaRPr lang="en-US" sz="4400" dirty="0">
+            <a:endParaRPr lang="en-US" sz="4800" dirty="0">
               <a:solidFill>
                 <a:schemeClr val="bg1"/>
               </a:solidFill>
@@ -5174,7 +4535,7 @@
           </a:p>
           <a:p>
             <a:r>
-              <a:rPr lang="en-US" sz="4400" dirty="0">
+              <a:rPr lang="en-US" sz="4800" dirty="0">
                 <a:solidFill>
                   <a:schemeClr val="bg1"/>
                 </a:solidFill>
@@ -5185,17 +4546,32 @@
             </a:r>
           </a:p>
           <a:p>
-            <a:endParaRPr lang="en-US" sz="4400" dirty="0">
-              <a:solidFill>
-                <a:schemeClr val="bg1"/>
-              </a:solidFill>
-              <a:latin typeface="Avenir Medium" panose="02000503020000020003" pitchFamily="2" charset="0"/>
-              <a:ea typeface="Bodoni Ornaments" pitchFamily="2" charset="0"/>
-            </a:endParaRPr>
-          </a:p>
-          <a:p>
-            <a:r>
-              <a:rPr lang="en-US" sz="4400" dirty="0">
+            <a:r>
+              <a:rPr lang="en-US" sz="4800" dirty="0">
+                <a:solidFill>
+                  <a:schemeClr val="bg1"/>
+                </a:solidFill>
+                <a:latin typeface="Avenir Medium" panose="02000503020000020003" pitchFamily="2" charset="0"/>
+                <a:ea typeface="Bodoni Ornaments" pitchFamily="2" charset="0"/>
+              </a:rPr>
+              <a:t>When all will bow before Him</a:t>
+            </a:r>
+          </a:p>
+          <a:p>
+            <a:r>
+              <a:rPr lang="en-US" sz="4800" dirty="0">
+                <a:solidFill>
+                  <a:schemeClr val="bg1"/>
+                </a:solidFill>
+                <a:latin typeface="Avenir Medium" panose="02000503020000020003" pitchFamily="2" charset="0"/>
+                <a:ea typeface="Bodoni Ornaments" pitchFamily="2" charset="0"/>
+              </a:rPr>
+              <a:t>There will be a day</a:t>
+            </a:r>
+          </a:p>
+          <a:p>
+            <a:r>
+              <a:rPr lang="en-US" sz="4800" dirty="0">
                 <a:solidFill>
                   <a:schemeClr val="bg1"/>
                 </a:solidFill>
@@ -5226,7 +4602,7 @@
     <p:bg>
       <p:bgPr>
         <a:solidFill>
-          <a:srgbClr val="7030A0"/>
+          <a:schemeClr val="tx1"/>
         </a:solidFill>
         <a:effectLst/>
       </p:bgPr>
@@ -5269,8 +4645,8 @@
         </p:nvSpPr>
         <p:spPr>
           <a:xfrm>
-            <a:off x="682831" y="497702"/>
-            <a:ext cx="10826338" cy="5862596"/>
+            <a:off x="274320" y="142240"/>
+            <a:ext cx="8585200" cy="6522719"/>
           </a:xfrm>
         </p:spPr>
         <p:txBody>
@@ -5279,7 +4655,7 @@
           </a:bodyPr>
           <a:lstStyle/>
           <a:p>
-            <a:endParaRPr lang="en-US" sz="4400" dirty="0">
+            <a:endParaRPr lang="en-US" sz="4800" dirty="0">
               <a:solidFill>
                 <a:schemeClr val="bg1"/>
               </a:solidFill>
@@ -5288,19 +4664,7 @@
             </a:endParaRPr>
           </a:p>
           <a:p>
-            <a:r>
-              <a:rPr lang="en-US" sz="4400" dirty="0">
-                <a:solidFill>
-                  <a:schemeClr val="bg1"/>
-                </a:solidFill>
-                <a:latin typeface="Avenir Medium" panose="02000503020000020003" pitchFamily="2" charset="0"/>
-                <a:ea typeface="Bodoni Ornaments" pitchFamily="2" charset="0"/>
-              </a:rPr>
-              <a:t>Standing face to face</a:t>
-            </a:r>
-          </a:p>
-          <a:p>
-            <a:endParaRPr lang="en-US" sz="4400" dirty="0">
+            <a:endParaRPr lang="en-US" sz="4800" dirty="0">
               <a:solidFill>
                 <a:schemeClr val="bg1"/>
               </a:solidFill>
@@ -5310,28 +4674,43 @@
           </a:p>
           <a:p>
             <a:r>
-              <a:rPr lang="en-US" sz="4400" dirty="0">
-                <a:solidFill>
-                  <a:schemeClr val="bg1"/>
-                </a:solidFill>
-                <a:latin typeface="Avenir Medium" panose="02000503020000020003" pitchFamily="2" charset="0"/>
-                <a:ea typeface="Bodoni Ornaments" pitchFamily="2" charset="0"/>
-              </a:rPr>
-              <a:t>With He who died and rose again</a:t>
-            </a:r>
-          </a:p>
-          <a:p>
-            <a:endParaRPr lang="en-US" sz="4400" dirty="0">
-              <a:solidFill>
-                <a:schemeClr val="bg1"/>
-              </a:solidFill>
-              <a:latin typeface="Avenir Medium" panose="02000503020000020003" pitchFamily="2" charset="0"/>
-              <a:ea typeface="Bodoni Ornaments" pitchFamily="2" charset="0"/>
-            </a:endParaRPr>
-          </a:p>
-          <a:p>
-            <a:r>
-              <a:rPr lang="en-US" sz="4400" dirty="0">
+              <a:rPr lang="en-US" sz="4800" dirty="0">
+                <a:solidFill>
+                  <a:schemeClr val="bg1"/>
+                </a:solidFill>
+                <a:latin typeface="Avenir Medium" panose="02000503020000020003" pitchFamily="2" charset="0"/>
+                <a:ea typeface="Bodoni Ornaments" pitchFamily="2" charset="0"/>
+              </a:rPr>
+              <a:t>Standing face to face</a:t>
+            </a:r>
+          </a:p>
+          <a:p>
+            <a:r>
+              <a:rPr lang="en-US" sz="4800" dirty="0">
+                <a:solidFill>
+                  <a:schemeClr val="bg1"/>
+                </a:solidFill>
+                <a:latin typeface="Avenir Medium" panose="02000503020000020003" pitchFamily="2" charset="0"/>
+                <a:ea typeface="Bodoni Ornaments" pitchFamily="2" charset="0"/>
+              </a:rPr>
+              <a:t>With He who died </a:t>
+            </a:r>
+          </a:p>
+          <a:p>
+            <a:r>
+              <a:rPr lang="en-US" sz="4800" dirty="0">
+                <a:solidFill>
+                  <a:schemeClr val="bg1"/>
+                </a:solidFill>
+                <a:latin typeface="Avenir Medium" panose="02000503020000020003" pitchFamily="2" charset="0"/>
+                <a:ea typeface="Bodoni Ornaments" pitchFamily="2" charset="0"/>
+              </a:rPr>
+              <a:t>and rose again</a:t>
+            </a:r>
+          </a:p>
+          <a:p>
+            <a:r>
+              <a:rPr lang="en-US" sz="4800" dirty="0">
                 <a:solidFill>
                   <a:schemeClr val="bg1"/>
                 </a:solidFill>
@@ -5362,7 +4741,7 @@
     <p:bg>
       <p:bgPr>
         <a:solidFill>
-          <a:schemeClr val="accent1"/>
+          <a:schemeClr val="tx1"/>
         </a:solidFill>
         <a:effectLst/>
       </p:bgPr>
@@ -5405,8 +4784,8 @@
         </p:nvSpPr>
         <p:spPr>
           <a:xfrm>
-            <a:off x="682831" y="497702"/>
-            <a:ext cx="10826338" cy="5862596"/>
+            <a:off x="152400" y="91440"/>
+            <a:ext cx="8808720" cy="6603999"/>
           </a:xfrm>
         </p:spPr>
         <p:txBody>
@@ -5415,7 +4794,7 @@
           </a:bodyPr>
           <a:lstStyle/>
           <a:p>
-            <a:endParaRPr lang="en-US" sz="4400" dirty="0">
+            <a:endParaRPr lang="en-US" sz="4800" dirty="0">
               <a:solidFill>
                 <a:schemeClr val="bg1"/>
               </a:solidFill>
@@ -5425,28 +4804,31 @@
           </a:p>
           <a:p>
             <a:r>
-              <a:rPr lang="en-US" sz="4400" dirty="0">
-                <a:solidFill>
-                  <a:schemeClr val="bg1"/>
-                </a:solidFill>
-                <a:latin typeface="Avenir Medium" panose="02000503020000020003" pitchFamily="2" charset="0"/>
-                <a:ea typeface="Bodoni Ornaments" pitchFamily="2" charset="0"/>
-              </a:rPr>
-              <a:t>Every prayer we prayed in desperation</a:t>
-            </a:r>
-          </a:p>
-          <a:p>
-            <a:endParaRPr lang="en-US" sz="4400" dirty="0">
-              <a:solidFill>
-                <a:schemeClr val="bg1"/>
-              </a:solidFill>
-              <a:latin typeface="Avenir Medium" panose="02000503020000020003" pitchFamily="2" charset="0"/>
-              <a:ea typeface="Bodoni Ornaments" pitchFamily="2" charset="0"/>
-            </a:endParaRPr>
-          </a:p>
-          <a:p>
-            <a:r>
-              <a:rPr lang="en-US" sz="4400" dirty="0">
+              <a:rPr lang="en-US" sz="4800" dirty="0">
+                <a:solidFill>
+                  <a:schemeClr val="bg1"/>
+                </a:solidFill>
+                <a:latin typeface="Avenir Medium" panose="02000503020000020003" pitchFamily="2" charset="0"/>
+                <a:ea typeface="Bodoni Ornaments" pitchFamily="2" charset="0"/>
+              </a:rPr>
+              <a:t>Every prayer we prayed </a:t>
+            </a:r>
+          </a:p>
+          <a:p>
+            <a:r>
+              <a:rPr lang="en-US" sz="4800" dirty="0">
+                <a:solidFill>
+                  <a:schemeClr val="bg1"/>
+                </a:solidFill>
+                <a:latin typeface="Avenir Medium" panose="02000503020000020003" pitchFamily="2" charset="0"/>
+                <a:ea typeface="Bodoni Ornaments" pitchFamily="2" charset="0"/>
+              </a:rPr>
+              <a:t>in desperation</a:t>
+            </a:r>
+          </a:p>
+          <a:p>
+            <a:r>
+              <a:rPr lang="en-US" sz="4800" dirty="0">
                 <a:solidFill>
                   <a:schemeClr val="bg1"/>
                 </a:solidFill>
@@ -5457,24 +4839,27 @@
             </a:r>
           </a:p>
           <a:p>
-            <a:endParaRPr lang="en-US" sz="4400" dirty="0">
-              <a:solidFill>
-                <a:schemeClr val="bg1"/>
-              </a:solidFill>
-              <a:latin typeface="Avenir Medium" panose="02000503020000020003" pitchFamily="2" charset="0"/>
-              <a:ea typeface="Bodoni Ornaments" pitchFamily="2" charset="0"/>
-            </a:endParaRPr>
-          </a:p>
-          <a:p>
-            <a:r>
-              <a:rPr lang="en-US" sz="4400" dirty="0">
-                <a:solidFill>
-                  <a:schemeClr val="bg1"/>
-                </a:solidFill>
-                <a:latin typeface="Avenir Medium" panose="02000503020000020003" pitchFamily="2" charset="0"/>
-                <a:ea typeface="Bodoni Ornaments" pitchFamily="2" charset="0"/>
-              </a:rPr>
-              <a:t>We sang through doubt and fear</a:t>
+            <a:r>
+              <a:rPr lang="en-US" sz="4800" dirty="0">
+                <a:solidFill>
+                  <a:schemeClr val="bg1"/>
+                </a:solidFill>
+                <a:latin typeface="Avenir Medium" panose="02000503020000020003" pitchFamily="2" charset="0"/>
+                <a:ea typeface="Bodoni Ornaments" pitchFamily="2" charset="0"/>
+              </a:rPr>
+              <a:t>We sang through </a:t>
+            </a:r>
+          </a:p>
+          <a:p>
+            <a:r>
+              <a:rPr lang="en-US" sz="4800" dirty="0">
+                <a:solidFill>
+                  <a:schemeClr val="bg1"/>
+                </a:solidFill>
+                <a:latin typeface="Avenir Medium" panose="02000503020000020003" pitchFamily="2" charset="0"/>
+                <a:ea typeface="Bodoni Ornaments" pitchFamily="2" charset="0"/>
+              </a:rPr>
+              <a:t>doubt and fear</a:t>
             </a:r>
           </a:p>
         </p:txBody>
@@ -5498,7 +4883,7 @@
     <p:bg>
       <p:bgPr>
         <a:solidFill>
-          <a:schemeClr val="accent1"/>
+          <a:schemeClr val="tx1"/>
         </a:solidFill>
         <a:effectLst/>
       </p:bgPr>
@@ -5541,8 +4926,8 @@
         </p:nvSpPr>
         <p:spPr>
           <a:xfrm>
-            <a:off x="682831" y="497702"/>
-            <a:ext cx="10826338" cy="5862596"/>
+            <a:off x="314960" y="162560"/>
+            <a:ext cx="8575040" cy="6502399"/>
           </a:xfrm>
         </p:spPr>
         <p:txBody>
@@ -5551,7 +4936,7 @@
           </a:bodyPr>
           <a:lstStyle/>
           <a:p>
-            <a:endParaRPr lang="en-US" sz="4400" dirty="0">
+            <a:endParaRPr lang="en-US" sz="4800" dirty="0">
               <a:solidFill>
                 <a:schemeClr val="bg1"/>
               </a:solidFill>
@@ -5561,18 +4946,30 @@
           </a:p>
           <a:p>
             <a:r>
-              <a:rPr lang="en-US" sz="4400" dirty="0">
-                <a:solidFill>
-                  <a:schemeClr val="bg1"/>
-                </a:solidFill>
-                <a:latin typeface="Avenir Medium" panose="02000503020000020003" pitchFamily="2" charset="0"/>
-                <a:ea typeface="Bodoni Ornaments" pitchFamily="2" charset="0"/>
-              </a:rPr>
-              <a:t>In the end we’ll see that it was worth it</a:t>
-            </a:r>
-          </a:p>
-          <a:p>
-            <a:endParaRPr lang="en-US" sz="4400" dirty="0">
+              <a:rPr lang="en-US" sz="4800" dirty="0">
+                <a:solidFill>
+                  <a:schemeClr val="bg1"/>
+                </a:solidFill>
+                <a:latin typeface="Avenir Medium" panose="02000503020000020003" pitchFamily="2" charset="0"/>
+                <a:ea typeface="Bodoni Ornaments" pitchFamily="2" charset="0"/>
+              </a:rPr>
+              <a:t>In the end we’ll see that </a:t>
+            </a:r>
+          </a:p>
+          <a:p>
+            <a:r>
+              <a:rPr lang="en-US" sz="4800" dirty="0">
+                <a:solidFill>
+                  <a:schemeClr val="bg1"/>
+                </a:solidFill>
+                <a:latin typeface="Avenir Medium" panose="02000503020000020003" pitchFamily="2" charset="0"/>
+                <a:ea typeface="Bodoni Ornaments" pitchFamily="2" charset="0"/>
+              </a:rPr>
+              <a:t>it was worth it</a:t>
+            </a:r>
+          </a:p>
+          <a:p>
+            <a:endParaRPr lang="en-US" sz="4800" dirty="0">
               <a:solidFill>
                 <a:schemeClr val="bg1"/>
               </a:solidFill>
@@ -5582,7 +4979,7 @@
           </a:p>
           <a:p>
             <a:r>
-              <a:rPr lang="en-US" sz="4400" dirty="0">
+              <a:rPr lang="en-US" sz="4800" dirty="0">
                 <a:solidFill>
                   <a:schemeClr val="bg1"/>
                 </a:solidFill>
@@ -5593,17 +4990,8 @@
             </a:r>
           </a:p>
           <a:p>
-            <a:endParaRPr lang="en-US" sz="4400" dirty="0">
-              <a:solidFill>
-                <a:schemeClr val="bg1"/>
-              </a:solidFill>
-              <a:latin typeface="Avenir Medium" panose="02000503020000020003" pitchFamily="2" charset="0"/>
-              <a:ea typeface="Bodoni Ornaments" pitchFamily="2" charset="0"/>
-            </a:endParaRPr>
-          </a:p>
-          <a:p>
-            <a:r>
-              <a:rPr lang="en-US" sz="4400" dirty="0">
+            <a:r>
+              <a:rPr lang="en-US" sz="4800" dirty="0">
                 <a:solidFill>
                   <a:schemeClr val="bg1"/>
                 </a:solidFill>
@@ -5634,7 +5022,7 @@
     <p:bg>
       <p:bgPr>
         <a:solidFill>
-          <a:srgbClr val="7030A0"/>
+          <a:schemeClr val="tx1"/>
         </a:solidFill>
         <a:effectLst/>
       </p:bgPr>
@@ -5644,7 +5032,7 @@
         <p:cNvPr id="1" name="">
           <a:extLst>
             <a:ext uri="{FF2B5EF4-FFF2-40B4-BE49-F238E27FC236}">
-              <a16:creationId xmlns:a16="http://schemas.microsoft.com/office/drawing/2014/main" id="{24EF226F-5A93-E638-EAFD-96417E574931}"/>
+              <a16:creationId xmlns:a16="http://schemas.microsoft.com/office/drawing/2014/main" id="{32DC8D47-A1D1-52BD-808B-D00F4516F967}"/>
             </a:ext>
           </a:extLst>
         </p:cNvPr>
@@ -5664,7 +5052,7 @@
           <p:cNvPr id="3" name="Subtitle 2">
             <a:extLst>
               <a:ext uri="{FF2B5EF4-FFF2-40B4-BE49-F238E27FC236}">
-                <a16:creationId xmlns:a16="http://schemas.microsoft.com/office/drawing/2014/main" id="{D03EB68F-F1A3-231A-50FF-C457BDA66743}"/>
+                <a16:creationId xmlns:a16="http://schemas.microsoft.com/office/drawing/2014/main" id="{67D8FE72-5042-6553-AD70-C9729CEB271A}"/>
               </a:ext>
             </a:extLst>
           </p:cNvPr>
@@ -5677,8 +5065,8 @@
         </p:nvSpPr>
         <p:spPr>
           <a:xfrm>
-            <a:off x="682831" y="497702"/>
-            <a:ext cx="10826338" cy="5862596"/>
+            <a:off x="172720" y="142240"/>
+            <a:ext cx="8768080" cy="6563359"/>
           </a:xfrm>
         </p:spPr>
         <p:txBody>
@@ -5687,19 +5075,7 @@
           </a:bodyPr>
           <a:lstStyle/>
           <a:p>
-            <a:r>
-              <a:rPr lang="en-US" sz="4400" dirty="0">
-                <a:solidFill>
-                  <a:schemeClr val="bg1"/>
-                </a:solidFill>
-                <a:latin typeface="Avenir Medium" panose="02000503020000020003" pitchFamily="2" charset="0"/>
-                <a:ea typeface="Bodoni Ornaments" pitchFamily="2" charset="0"/>
-              </a:rPr>
-              <a:t>There will be a day</a:t>
-            </a:r>
-          </a:p>
-          <a:p>
-            <a:endParaRPr lang="en-US" sz="4400" dirty="0">
+            <a:endParaRPr lang="en-US" sz="4800" dirty="0">
               <a:solidFill>
                 <a:schemeClr val="bg1"/>
               </a:solidFill>
@@ -5708,19 +5084,7 @@
             </a:endParaRPr>
           </a:p>
           <a:p>
-            <a:r>
-              <a:rPr lang="en-US" sz="4400" dirty="0">
-                <a:solidFill>
-                  <a:schemeClr val="bg1"/>
-                </a:solidFill>
-                <a:latin typeface="Avenir Medium" panose="02000503020000020003" pitchFamily="2" charset="0"/>
-                <a:ea typeface="Bodoni Ornaments" pitchFamily="2" charset="0"/>
-              </a:rPr>
-              <a:t>When all will bow before Him</a:t>
-            </a:r>
-          </a:p>
-          <a:p>
-            <a:endParaRPr lang="en-US" sz="4400" dirty="0">
+            <a:endParaRPr lang="en-US" sz="4800" dirty="0">
               <a:solidFill>
                 <a:schemeClr val="bg1"/>
               </a:solidFill>
@@ -5730,7 +5094,7 @@
           </a:p>
           <a:p>
             <a:r>
-              <a:rPr lang="en-US" sz="4400" dirty="0">
+              <a:rPr lang="en-US" sz="4800" dirty="0">
                 <a:solidFill>
                   <a:schemeClr val="bg1"/>
                 </a:solidFill>
@@ -5741,17 +5105,32 @@
             </a:r>
           </a:p>
           <a:p>
-            <a:endParaRPr lang="en-US" sz="4400" dirty="0">
-              <a:solidFill>
-                <a:schemeClr val="bg1"/>
-              </a:solidFill>
-              <a:latin typeface="Avenir Medium" panose="02000503020000020003" pitchFamily="2" charset="0"/>
-              <a:ea typeface="Bodoni Ornaments" pitchFamily="2" charset="0"/>
-            </a:endParaRPr>
-          </a:p>
-          <a:p>
-            <a:r>
-              <a:rPr lang="en-US" sz="4400" dirty="0">
+            <a:r>
+              <a:rPr lang="en-US" sz="4800" dirty="0">
+                <a:solidFill>
+                  <a:schemeClr val="bg1"/>
+                </a:solidFill>
+                <a:latin typeface="Avenir Medium" panose="02000503020000020003" pitchFamily="2" charset="0"/>
+                <a:ea typeface="Bodoni Ornaments" pitchFamily="2" charset="0"/>
+              </a:rPr>
+              <a:t>When all will bow before Him</a:t>
+            </a:r>
+          </a:p>
+          <a:p>
+            <a:r>
+              <a:rPr lang="en-US" sz="4800" dirty="0">
+                <a:solidFill>
+                  <a:schemeClr val="bg1"/>
+                </a:solidFill>
+                <a:latin typeface="Avenir Medium" panose="02000503020000020003" pitchFamily="2" charset="0"/>
+                <a:ea typeface="Bodoni Ornaments" pitchFamily="2" charset="0"/>
+              </a:rPr>
+              <a:t>There will be a day</a:t>
+            </a:r>
+          </a:p>
+          <a:p>
+            <a:r>
+              <a:rPr lang="en-US" sz="4800" dirty="0">
                 <a:solidFill>
                   <a:schemeClr val="bg1"/>
                 </a:solidFill>
@@ -5766,7 +5145,7 @@
     </p:spTree>
     <p:extLst>
       <p:ext uri="{BB962C8B-B14F-4D97-AF65-F5344CB8AC3E}">
-        <p14:creationId xmlns:p14="http://schemas.microsoft.com/office/powerpoint/2010/main" val="3261840918"/>
+        <p14:creationId xmlns:p14="http://schemas.microsoft.com/office/powerpoint/2010/main" val="2690811959"/>
       </p:ext>
     </p:extLst>
   </p:cSld>
@@ -5782,7 +5161,7 @@
     <p:bg>
       <p:bgPr>
         <a:solidFill>
-          <a:srgbClr val="7030A0"/>
+          <a:schemeClr val="tx1"/>
         </a:solidFill>
         <a:effectLst/>
       </p:bgPr>
@@ -5792,7 +5171,7 @@
         <p:cNvPr id="1" name="">
           <a:extLst>
             <a:ext uri="{FF2B5EF4-FFF2-40B4-BE49-F238E27FC236}">
-              <a16:creationId xmlns:a16="http://schemas.microsoft.com/office/drawing/2014/main" id="{74156551-DEA6-474F-B655-7913843078E1}"/>
+              <a16:creationId xmlns:a16="http://schemas.microsoft.com/office/drawing/2014/main" id="{A43A1896-C5E7-6742-EC43-38FDC5C87BE9}"/>
             </a:ext>
           </a:extLst>
         </p:cNvPr>
@@ -5812,7 +5191,7 @@
           <p:cNvPr id="3" name="Subtitle 2">
             <a:extLst>
               <a:ext uri="{FF2B5EF4-FFF2-40B4-BE49-F238E27FC236}">
-                <a16:creationId xmlns:a16="http://schemas.microsoft.com/office/drawing/2014/main" id="{AB67AEAC-8126-3BF1-CB49-31135611B0EB}"/>
+                <a16:creationId xmlns:a16="http://schemas.microsoft.com/office/drawing/2014/main" id="{F29F5F69-E378-5FFF-745F-515FF56A1FFF}"/>
               </a:ext>
             </a:extLst>
           </p:cNvPr>
@@ -5825,8 +5204,8 @@
         </p:nvSpPr>
         <p:spPr>
           <a:xfrm>
-            <a:off x="682831" y="497702"/>
-            <a:ext cx="10826338" cy="5862596"/>
+            <a:off x="274320" y="142240"/>
+            <a:ext cx="8585200" cy="6522719"/>
           </a:xfrm>
         </p:spPr>
         <p:txBody>
@@ -5835,7 +5214,7 @@
           </a:bodyPr>
           <a:lstStyle/>
           <a:p>
-            <a:endParaRPr lang="en-US" sz="4400" dirty="0">
+            <a:endParaRPr lang="en-US" sz="4800" dirty="0">
               <a:solidFill>
                 <a:schemeClr val="bg1"/>
               </a:solidFill>
@@ -5844,19 +5223,7 @@
             </a:endParaRPr>
           </a:p>
           <a:p>
-            <a:r>
-              <a:rPr lang="en-US" sz="4400" dirty="0">
-                <a:solidFill>
-                  <a:schemeClr val="bg1"/>
-                </a:solidFill>
-                <a:latin typeface="Avenir Medium" panose="02000503020000020003" pitchFamily="2" charset="0"/>
-                <a:ea typeface="Bodoni Ornaments" pitchFamily="2" charset="0"/>
-              </a:rPr>
-              <a:t>Standing face to face</a:t>
-            </a:r>
-          </a:p>
-          <a:p>
-            <a:endParaRPr lang="en-US" sz="4400" dirty="0">
+            <a:endParaRPr lang="en-US" sz="4800" dirty="0">
               <a:solidFill>
                 <a:schemeClr val="bg1"/>
               </a:solidFill>
@@ -5866,28 +5233,43 @@
           </a:p>
           <a:p>
             <a:r>
-              <a:rPr lang="en-US" sz="4400" dirty="0">
-                <a:solidFill>
-                  <a:schemeClr val="bg1"/>
-                </a:solidFill>
-                <a:latin typeface="Avenir Medium" panose="02000503020000020003" pitchFamily="2" charset="0"/>
-                <a:ea typeface="Bodoni Ornaments" pitchFamily="2" charset="0"/>
-              </a:rPr>
-              <a:t>With He who died and rose again</a:t>
-            </a:r>
-          </a:p>
-          <a:p>
-            <a:endParaRPr lang="en-US" sz="4400" dirty="0">
-              <a:solidFill>
-                <a:schemeClr val="bg1"/>
-              </a:solidFill>
-              <a:latin typeface="Avenir Medium" panose="02000503020000020003" pitchFamily="2" charset="0"/>
-              <a:ea typeface="Bodoni Ornaments" pitchFamily="2" charset="0"/>
-            </a:endParaRPr>
-          </a:p>
-          <a:p>
-            <a:r>
-              <a:rPr lang="en-US" sz="4400" dirty="0">
+              <a:rPr lang="en-US" sz="4800" dirty="0">
+                <a:solidFill>
+                  <a:schemeClr val="bg1"/>
+                </a:solidFill>
+                <a:latin typeface="Avenir Medium" panose="02000503020000020003" pitchFamily="2" charset="0"/>
+                <a:ea typeface="Bodoni Ornaments" pitchFamily="2" charset="0"/>
+              </a:rPr>
+              <a:t>Standing face to face</a:t>
+            </a:r>
+          </a:p>
+          <a:p>
+            <a:r>
+              <a:rPr lang="en-US" sz="4800" dirty="0">
+                <a:solidFill>
+                  <a:schemeClr val="bg1"/>
+                </a:solidFill>
+                <a:latin typeface="Avenir Medium" panose="02000503020000020003" pitchFamily="2" charset="0"/>
+                <a:ea typeface="Bodoni Ornaments" pitchFamily="2" charset="0"/>
+              </a:rPr>
+              <a:t>With He who died </a:t>
+            </a:r>
+          </a:p>
+          <a:p>
+            <a:r>
+              <a:rPr lang="en-US" sz="4800" dirty="0">
+                <a:solidFill>
+                  <a:schemeClr val="bg1"/>
+                </a:solidFill>
+                <a:latin typeface="Avenir Medium" panose="02000503020000020003" pitchFamily="2" charset="0"/>
+                <a:ea typeface="Bodoni Ornaments" pitchFamily="2" charset="0"/>
+              </a:rPr>
+              <a:t>and rose again</a:t>
+            </a:r>
+          </a:p>
+          <a:p>
+            <a:r>
+              <a:rPr lang="en-US" sz="4800" dirty="0">
                 <a:solidFill>
                   <a:schemeClr val="bg1"/>
                 </a:solidFill>
@@ -5902,7 +5284,7 @@
     </p:spTree>
     <p:extLst>
       <p:ext uri="{BB962C8B-B14F-4D97-AF65-F5344CB8AC3E}">
-        <p14:creationId xmlns:p14="http://schemas.microsoft.com/office/powerpoint/2010/main" val="1234787163"/>
+        <p14:creationId xmlns:p14="http://schemas.microsoft.com/office/powerpoint/2010/main" val="3757572698"/>
       </p:ext>
     </p:extLst>
   </p:cSld>
@@ -5915,7 +5297,7 @@
 <file path=ppt/theme/theme1.xml><?xml version="1.0" encoding="utf-8"?>
 <a:theme xmlns:a="http://schemas.openxmlformats.org/drawingml/2006/main" name="Office Theme">
   <a:themeElements>
-    <a:clrScheme name="Office">
+    <a:clrScheme name="Office Theme">
       <a:dk1>
         <a:sysClr val="windowText" lastClr="000000"/>
       </a:dk1>
@@ -5953,7 +5335,7 @@
         <a:srgbClr val="96607D"/>
       </a:folHlink>
     </a:clrScheme>
-    <a:fontScheme name="Office">
+    <a:fontScheme name="Office Theme">
       <a:majorFont>
         <a:latin typeface="Aptos Display" panose="02110004020202020204"/>
         <a:ea typeface=""/>
@@ -6059,7 +5441,7 @@
         <a:font script="Tfng" typeface="Ebrima"/>
       </a:minorFont>
     </a:fontScheme>
-    <a:fmtScheme name="Office">
+    <a:fmtScheme name="Office Theme">
       <a:fillStyleLst>
         <a:solidFill>
           <a:schemeClr val="phClr"/>

--- a/Hymn of Heaven.pptx
+++ b/Hymn of Heaven.pptx
@@ -259,7 +259,7 @@
           <a:p>
             <a:fld id="{E759A0DE-F190-5444-87AC-4719D5F20D15}" type="datetimeFigureOut">
               <a:rPr lang="en-US" smtClean="0"/>
-              <a:t>6/6/26</a:t>
+              <a:t>8/1/26</a:t>
             </a:fld>
             <a:endParaRPr lang="en-US"/>
           </a:p>
@@ -429,7 +429,7 @@
           <a:p>
             <a:fld id="{E759A0DE-F190-5444-87AC-4719D5F20D15}" type="datetimeFigureOut">
               <a:rPr lang="en-US" smtClean="0"/>
-              <a:t>6/6/26</a:t>
+              <a:t>8/1/26</a:t>
             </a:fld>
             <a:endParaRPr lang="en-US"/>
           </a:p>
@@ -609,7 +609,7 @@
           <a:p>
             <a:fld id="{E759A0DE-F190-5444-87AC-4719D5F20D15}" type="datetimeFigureOut">
               <a:rPr lang="en-US" smtClean="0"/>
-              <a:t>6/6/26</a:t>
+              <a:t>8/1/26</a:t>
             </a:fld>
             <a:endParaRPr lang="en-US"/>
           </a:p>
@@ -779,7 +779,7 @@
           <a:p>
             <a:fld id="{E759A0DE-F190-5444-87AC-4719D5F20D15}" type="datetimeFigureOut">
               <a:rPr lang="en-US" smtClean="0"/>
-              <a:t>6/6/26</a:t>
+              <a:t>8/1/26</a:t>
             </a:fld>
             <a:endParaRPr lang="en-US"/>
           </a:p>
@@ -1025,7 +1025,7 @@
           <a:p>
             <a:fld id="{E759A0DE-F190-5444-87AC-4719D5F20D15}" type="datetimeFigureOut">
               <a:rPr lang="en-US" smtClean="0"/>
-              <a:t>6/6/26</a:t>
+              <a:t>8/1/26</a:t>
             </a:fld>
             <a:endParaRPr lang="en-US"/>
           </a:p>
@@ -1257,7 +1257,7 @@
           <a:p>
             <a:fld id="{E759A0DE-F190-5444-87AC-4719D5F20D15}" type="datetimeFigureOut">
               <a:rPr lang="en-US" smtClean="0"/>
-              <a:t>6/6/26</a:t>
+              <a:t>8/1/26</a:t>
             </a:fld>
             <a:endParaRPr lang="en-US"/>
           </a:p>
@@ -1624,7 +1624,7 @@
           <a:p>
             <a:fld id="{E759A0DE-F190-5444-87AC-4719D5F20D15}" type="datetimeFigureOut">
               <a:rPr lang="en-US" smtClean="0"/>
-              <a:t>6/6/26</a:t>
+              <a:t>8/1/26</a:t>
             </a:fld>
             <a:endParaRPr lang="en-US"/>
           </a:p>
@@ -1742,7 +1742,7 @@
           <a:p>
             <a:fld id="{E759A0DE-F190-5444-87AC-4719D5F20D15}" type="datetimeFigureOut">
               <a:rPr lang="en-US" smtClean="0"/>
-              <a:t>6/6/26</a:t>
+              <a:t>8/1/26</a:t>
             </a:fld>
             <a:endParaRPr lang="en-US"/>
           </a:p>
@@ -1837,7 +1837,7 @@
           <a:p>
             <a:fld id="{E759A0DE-F190-5444-87AC-4719D5F20D15}" type="datetimeFigureOut">
               <a:rPr lang="en-US" smtClean="0"/>
-              <a:t>6/6/26</a:t>
+              <a:t>8/1/26</a:t>
             </a:fld>
             <a:endParaRPr lang="en-US"/>
           </a:p>
@@ -2114,7 +2114,7 @@
           <a:p>
             <a:fld id="{E759A0DE-F190-5444-87AC-4719D5F20D15}" type="datetimeFigureOut">
               <a:rPr lang="en-US" smtClean="0"/>
-              <a:t>6/6/26</a:t>
+              <a:t>8/1/26</a:t>
             </a:fld>
             <a:endParaRPr lang="en-US"/>
           </a:p>
@@ -2371,7 +2371,7 @@
           <a:p>
             <a:fld id="{E759A0DE-F190-5444-87AC-4719D5F20D15}" type="datetimeFigureOut">
               <a:rPr lang="en-US" smtClean="0"/>
-              <a:t>6/6/26</a:t>
+              <a:t>8/1/26</a:t>
             </a:fld>
             <a:endParaRPr lang="en-US"/>
           </a:p>
@@ -2584,7 +2584,7 @@
           <a:p>
             <a:fld id="{E759A0DE-F190-5444-87AC-4719D5F20D15}" type="datetimeFigureOut">
               <a:rPr lang="en-US" smtClean="0"/>
-              <a:t>6/6/26</a:t>
+              <a:t>8/1/26</a:t>
             </a:fld>
             <a:endParaRPr lang="en-US"/>
           </a:p>
@@ -3045,6 +3045,117 @@
           </a:p>
         </p:txBody>
       </p:sp>
+      <p:sp>
+        <p:nvSpPr>
+          <p:cNvPr id="2" name="TextBox 1">
+            <a:extLst>
+              <a:ext uri="{FF2B5EF4-FFF2-40B4-BE49-F238E27FC236}">
+                <a16:creationId xmlns:a16="http://schemas.microsoft.com/office/drawing/2014/main" id="{9C139DF0-2104-9429-16AC-817D40FB4CB7}"/>
+              </a:ext>
+            </a:extLst>
+          </p:cNvPr>
+          <p:cNvSpPr txBox="1"/>
+          <p:nvPr/>
+        </p:nvSpPr>
+        <p:spPr>
+          <a:xfrm>
+            <a:off x="152400" y="5103674"/>
+            <a:ext cx="8807115" cy="1754326"/>
+          </a:xfrm>
+          <a:prstGeom prst="rect">
+            <a:avLst/>
+          </a:prstGeom>
+          <a:noFill/>
+        </p:spPr>
+        <p:txBody>
+          <a:bodyPr wrap="square" rtlCol="0">
+            <a:spAutoFit/>
+          </a:bodyPr>
+          <a:lstStyle/>
+          <a:p>
+            <a:pPr algn="ctr"/>
+            <a:r>
+              <a:rPr lang="en-US" dirty="0">
+                <a:solidFill>
+                  <a:schemeClr val="bg1"/>
+                </a:solidFill>
+              </a:rPr>
+              <a:t>Words &amp; Musci Phil Wickham, Brian Johnson, </a:t>
+            </a:r>
+          </a:p>
+          <a:p>
+            <a:pPr algn="ctr"/>
+            <a:r>
+              <a:rPr lang="en-US" dirty="0">
+                <a:solidFill>
+                  <a:schemeClr val="bg1"/>
+                </a:solidFill>
+              </a:rPr>
+              <a:t>Chris Davenport, and Bill Johnson (2020/2021)</a:t>
+            </a:r>
+          </a:p>
+          <a:p>
+            <a:pPr algn="ctr"/>
+            <a:r>
+              <a:rPr lang="en-US" dirty="0">
+                <a:solidFill>
+                  <a:schemeClr val="bg1"/>
+                </a:solidFill>
+              </a:rPr>
+              <a:t>© © Brian and Jenn Publishing; </a:t>
+            </a:r>
+            <a:r>
+              <a:rPr lang="en-US" dirty="0" err="1">
+                <a:solidFill>
+                  <a:schemeClr val="bg1"/>
+                </a:solidFill>
+              </a:rPr>
+              <a:t>CDavs</a:t>
+            </a:r>
+            <a:r>
+              <a:rPr lang="en-US" dirty="0">
+                <a:solidFill>
+                  <a:schemeClr val="bg1"/>
+                </a:solidFill>
+              </a:rPr>
+              <a:t> Music; </a:t>
+            </a:r>
+          </a:p>
+          <a:p>
+            <a:pPr algn="ctr"/>
+            <a:r>
+              <a:rPr lang="en-US" dirty="0">
+                <a:solidFill>
+                  <a:schemeClr val="bg1"/>
+                </a:solidFill>
+              </a:rPr>
+              <a:t>Songs For TIM; Phil Wickham Music; </a:t>
+            </a:r>
+          </a:p>
+          <a:p>
+            <a:pPr algn="ctr"/>
+            <a:r>
+              <a:rPr lang="en-US" dirty="0">
+                <a:solidFill>
+                  <a:schemeClr val="bg1"/>
+                </a:solidFill>
+              </a:rPr>
+              <a:t>Simply Global Songs; Bethel Music Publishing</a:t>
+            </a:r>
+          </a:p>
+          <a:p>
+            <a:pPr algn="ctr"/>
+            <a:r>
+              <a:rPr lang="en-US" dirty="0">
+                <a:solidFill>
+                  <a:schemeClr val="bg1"/>
+                </a:solidFill>
+              </a:rPr>
+              <a:t>CCLI License #137776</a:t>
+            </a:r>
+          </a:p>
+        </p:txBody>
+      </p:sp>
     </p:spTree>
     <p:extLst>
       <p:ext uri="{BB962C8B-B14F-4D97-AF65-F5344CB8AC3E}">
@@ -4136,45 +4247,6 @@
               <a:latin typeface="Avenir Medium" panose="02000503020000020003" pitchFamily="2" charset="0"/>
               <a:ea typeface="Bodoni Ornaments" pitchFamily="2" charset="0"/>
             </a:endParaRPr>
-          </a:p>
-        </p:txBody>
-      </p:sp>
-      <p:sp>
-        <p:nvSpPr>
-          <p:cNvPr id="2" name="TextBox 1">
-            <a:extLst>
-              <a:ext uri="{FF2B5EF4-FFF2-40B4-BE49-F238E27FC236}">
-                <a16:creationId xmlns:a16="http://schemas.microsoft.com/office/drawing/2014/main" id="{4A542984-8A82-8EB9-B5FB-7EE30F75B460}"/>
-              </a:ext>
-            </a:extLst>
-          </p:cNvPr>
-          <p:cNvSpPr txBox="1"/>
-          <p:nvPr/>
-        </p:nvSpPr>
-        <p:spPr>
-          <a:xfrm>
-            <a:off x="7390614" y="6488668"/>
-            <a:ext cx="1753386" cy="369332"/>
-          </a:xfrm>
-          <a:prstGeom prst="rect">
-            <a:avLst/>
-          </a:prstGeom>
-          <a:noFill/>
-        </p:spPr>
-        <p:txBody>
-          <a:bodyPr wrap="square" rtlCol="0">
-            <a:spAutoFit/>
-          </a:bodyPr>
-          <a:lstStyle/>
-          <a:p>
-            <a:r>
-              <a:rPr lang="en-US" dirty="0">
-                <a:solidFill>
-                  <a:schemeClr val="bg1"/>
-                </a:solidFill>
-              </a:rPr>
-              <a:t>CCLI#7102397</a:t>
-            </a:r>
           </a:p>
         </p:txBody>
       </p:sp>
